--- a/gpu_programming.pptx
+++ b/gpu_programming.pptx
@@ -274,7 +274,7 @@
           <a:p>
             <a:fld id="{8BC644CB-8FFF-4F59-B04D-9A1D2A5DB720}" type="datetimeFigureOut">
               <a:rPr lang="LID4096" smtClean="0"/>
-              <a:t>03/12/2026</a:t>
+              <a:t>05/06/2026</a:t>
             </a:fld>
             <a:endParaRPr lang="LID4096"/>
           </a:p>
@@ -691,7 +691,7 @@
           <a:p>
             <a:fld id="{29DC7A01-813B-4B59-A1CC-F2D63921E46A}" type="datetime1">
               <a:rPr lang="LID4096" smtClean="0"/>
-              <a:t>03/12/2026</a:t>
+              <a:t>05/06/2026</a:t>
             </a:fld>
             <a:endParaRPr lang="LID4096"/>
           </a:p>
@@ -891,7 +891,7 @@
           <a:p>
             <a:fld id="{6C2A7740-B6F2-4CC5-9AD0-B161B943DB10}" type="datetime1">
               <a:rPr lang="LID4096" smtClean="0"/>
-              <a:t>03/12/2026</a:t>
+              <a:t>05/06/2026</a:t>
             </a:fld>
             <a:endParaRPr lang="LID4096"/>
           </a:p>
@@ -1101,7 +1101,7 @@
           <a:p>
             <a:fld id="{2F94B025-8F26-4EDF-B991-413B82D6446E}" type="datetime1">
               <a:rPr lang="LID4096" smtClean="0"/>
-              <a:t>03/12/2026</a:t>
+              <a:t>05/06/2026</a:t>
             </a:fld>
             <a:endParaRPr lang="LID4096"/>
           </a:p>
@@ -1301,7 +1301,7 @@
           <a:p>
             <a:fld id="{CB5C8B8A-B2CE-4D78-88A4-476B2363B71E}" type="datetime1">
               <a:rPr lang="LID4096" smtClean="0"/>
-              <a:t>03/12/2026</a:t>
+              <a:t>05/06/2026</a:t>
             </a:fld>
             <a:endParaRPr lang="LID4096"/>
           </a:p>
@@ -1577,7 +1577,7 @@
           <a:p>
             <a:fld id="{CDDAB553-EE67-480E-BCE3-F64D7D51D294}" type="datetime1">
               <a:rPr lang="LID4096" smtClean="0"/>
-              <a:t>03/12/2026</a:t>
+              <a:t>05/06/2026</a:t>
             </a:fld>
             <a:endParaRPr lang="LID4096"/>
           </a:p>
@@ -1845,7 +1845,7 @@
           <a:p>
             <a:fld id="{CD270038-A599-4345-BE24-96A4E06BF8E3}" type="datetime1">
               <a:rPr lang="LID4096" smtClean="0"/>
-              <a:t>03/12/2026</a:t>
+              <a:t>05/06/2026</a:t>
             </a:fld>
             <a:endParaRPr lang="LID4096"/>
           </a:p>
@@ -2260,7 +2260,7 @@
           <a:p>
             <a:fld id="{44A719F7-59BE-4FD1-8AC5-F7BFCCA290D7}" type="datetime1">
               <a:rPr lang="LID4096" smtClean="0"/>
-              <a:t>03/12/2026</a:t>
+              <a:t>05/06/2026</a:t>
             </a:fld>
             <a:endParaRPr lang="LID4096"/>
           </a:p>
@@ -2402,7 +2402,7 @@
           <a:p>
             <a:fld id="{B4C93A37-6A61-4F10-A100-9676ACB86039}" type="datetime1">
               <a:rPr lang="LID4096" smtClean="0"/>
-              <a:t>03/12/2026</a:t>
+              <a:t>05/06/2026</a:t>
             </a:fld>
             <a:endParaRPr lang="LID4096"/>
           </a:p>
@@ -2515,7 +2515,7 @@
           <a:p>
             <a:fld id="{9E73F7F9-09CC-4C21-BDB8-90E2F1A013BD}" type="datetime1">
               <a:rPr lang="LID4096" smtClean="0"/>
-              <a:t>03/12/2026</a:t>
+              <a:t>05/06/2026</a:t>
             </a:fld>
             <a:endParaRPr lang="LID4096"/>
           </a:p>
@@ -2828,7 +2828,7 @@
           <a:p>
             <a:fld id="{FD166AE6-E2E5-4774-8434-34F2AD9BDDCE}" type="datetime1">
               <a:rPr lang="LID4096" smtClean="0"/>
-              <a:t>03/12/2026</a:t>
+              <a:t>05/06/2026</a:t>
             </a:fld>
             <a:endParaRPr lang="LID4096"/>
           </a:p>
@@ -3117,7 +3117,7 @@
           <a:p>
             <a:fld id="{895E2CCE-BBFE-4BEC-9002-70F26B158681}" type="datetime1">
               <a:rPr lang="LID4096" smtClean="0"/>
-              <a:t>03/12/2026</a:t>
+              <a:t>05/06/2026</a:t>
             </a:fld>
             <a:endParaRPr lang="LID4096"/>
           </a:p>
@@ -3360,7 +3360,7 @@
           <a:p>
             <a:fld id="{C795C0FD-7BB7-48C9-86F3-9771767F1BC3}" type="datetime1">
               <a:rPr lang="LID4096" smtClean="0"/>
-              <a:t>03/12/2026</a:t>
+              <a:t>05/06/2026</a:t>
             </a:fld>
             <a:endParaRPr lang="LID4096"/>
           </a:p>
@@ -3795,7 +3795,7 @@
           <a:p>
             <a:r>
               <a:rPr lang="en-US" dirty="0"/>
-              <a:t>Python on GPUs</a:t>
+              <a:t>GPU programming</a:t>
             </a:r>
           </a:p>
         </p:txBody>
@@ -8716,7 +8716,7 @@
         </p:nvGrpSpPr>
         <p:grpSpPr>
           <a:xfrm>
-            <a:off x="5575610" y="5331337"/>
+            <a:off x="6096000" y="5331337"/>
             <a:ext cx="4083859" cy="935319"/>
             <a:chOff x="4092498" y="4734412"/>
             <a:chExt cx="4083859" cy="935319"/>
@@ -9914,7 +9914,7 @@
             <a:p>
               <a:r>
                 <a:rPr lang="en-US" sz="2400" dirty="0"/>
-                <a:t>Regusters + shared memory </a:t>
+                <a:t>Registers + shared memory </a:t>
               </a:r>
               <a:r>
                 <a:rPr lang="en-US" sz="2400" dirty="0">
@@ -10325,7 +10325,7 @@
             <a:pPr lvl="2"/>
             <a:r>
               <a:rPr lang="en-US" dirty="0"/>
-              <a:t>50 Gb/lane (bi-directional) </a:t>
+              <a:t>50 Gb/s/lane (bi-directional) </a:t>
             </a:r>
             <a:r>
               <a:rPr lang="en-US" dirty="0">
@@ -10335,7 +10335,7 @@
             </a:r>
             <a:r>
               <a:rPr lang="en-US" dirty="0"/>
-              <a:t> 200 Gb between GPUs</a:t>
+              <a:t> 200 Gb/s between GPUs</a:t>
             </a:r>
           </a:p>
           <a:p>
@@ -19714,7 +19714,7 @@
                   <a:srgbClr val="C00000"/>
                 </a:solidFill>
               </a:rPr>
-              <a:t>trided</a:t>
+              <a:t>strided</a:t>
             </a:r>
             <a:r>
               <a:rPr lang="en-US" b="1" dirty="0">

--- a/gpu_programming.pptx
+++ b/gpu_programming.pptx
@@ -5,42 +5,41 @@
     <p:sldMasterId id="2147483648" r:id="rId1"/>
   </p:sldMasterIdLst>
   <p:notesMasterIdLst>
-    <p:notesMasterId r:id="rId35"/>
+    <p:notesMasterId r:id="rId34"/>
   </p:notesMasterIdLst>
   <p:sldIdLst>
     <p:sldId id="257" r:id="rId2"/>
     <p:sldId id="355" r:id="rId3"/>
     <p:sldId id="357" r:id="rId4"/>
-    <p:sldId id="353" r:id="rId5"/>
-    <p:sldId id="348" r:id="rId6"/>
-    <p:sldId id="359" r:id="rId7"/>
-    <p:sldId id="363" r:id="rId8"/>
-    <p:sldId id="380" r:id="rId9"/>
-    <p:sldId id="364" r:id="rId10"/>
-    <p:sldId id="374" r:id="rId11"/>
-    <p:sldId id="360" r:id="rId12"/>
-    <p:sldId id="361" r:id="rId13"/>
-    <p:sldId id="362" r:id="rId14"/>
-    <p:sldId id="372" r:id="rId15"/>
-    <p:sldId id="368" r:id="rId16"/>
-    <p:sldId id="366" r:id="rId17"/>
-    <p:sldId id="376" r:id="rId18"/>
-    <p:sldId id="375" r:id="rId19"/>
-    <p:sldId id="379" r:id="rId20"/>
-    <p:sldId id="381" r:id="rId21"/>
-    <p:sldId id="382" r:id="rId22"/>
-    <p:sldId id="383" r:id="rId23"/>
-    <p:sldId id="384" r:id="rId24"/>
-    <p:sldId id="385" r:id="rId25"/>
-    <p:sldId id="386" r:id="rId26"/>
-    <p:sldId id="387" r:id="rId27"/>
-    <p:sldId id="388" r:id="rId28"/>
-    <p:sldId id="373" r:id="rId29"/>
-    <p:sldId id="378" r:id="rId30"/>
-    <p:sldId id="367" r:id="rId31"/>
-    <p:sldId id="370" r:id="rId32"/>
-    <p:sldId id="377" r:id="rId33"/>
-    <p:sldId id="371" r:id="rId34"/>
+    <p:sldId id="348" r:id="rId5"/>
+    <p:sldId id="359" r:id="rId6"/>
+    <p:sldId id="363" r:id="rId7"/>
+    <p:sldId id="380" r:id="rId8"/>
+    <p:sldId id="364" r:id="rId9"/>
+    <p:sldId id="374" r:id="rId10"/>
+    <p:sldId id="360" r:id="rId11"/>
+    <p:sldId id="361" r:id="rId12"/>
+    <p:sldId id="362" r:id="rId13"/>
+    <p:sldId id="372" r:id="rId14"/>
+    <p:sldId id="368" r:id="rId15"/>
+    <p:sldId id="366" r:id="rId16"/>
+    <p:sldId id="376" r:id="rId17"/>
+    <p:sldId id="375" r:id="rId18"/>
+    <p:sldId id="379" r:id="rId19"/>
+    <p:sldId id="381" r:id="rId20"/>
+    <p:sldId id="382" r:id="rId21"/>
+    <p:sldId id="383" r:id="rId22"/>
+    <p:sldId id="384" r:id="rId23"/>
+    <p:sldId id="385" r:id="rId24"/>
+    <p:sldId id="386" r:id="rId25"/>
+    <p:sldId id="387" r:id="rId26"/>
+    <p:sldId id="388" r:id="rId27"/>
+    <p:sldId id="373" r:id="rId28"/>
+    <p:sldId id="378" r:id="rId29"/>
+    <p:sldId id="367" r:id="rId30"/>
+    <p:sldId id="370" r:id="rId31"/>
+    <p:sldId id="377" r:id="rId32"/>
+    <p:sldId id="371" r:id="rId33"/>
   </p:sldIdLst>
   <p:sldSz cx="12192000" cy="6858000"/>
   <p:notesSz cx="6858000" cy="9144000"/>
@@ -3966,275 +3965,6 @@
 <file path=ppt/slides/slide10.xml><?xml version="1.0" encoding="utf-8"?>
 <p:sld xmlns:a="http://schemas.openxmlformats.org/drawingml/2006/main" xmlns:r="http://schemas.openxmlformats.org/officeDocument/2006/relationships" xmlns:p="http://schemas.openxmlformats.org/presentationml/2006/main">
   <p:cSld>
-    <p:bg>
-      <p:bgPr>
-        <a:solidFill>
-          <a:srgbClr val="000000"/>
-        </a:solidFill>
-        <a:effectLst/>
-      </p:bgPr>
-    </p:bg>
-    <p:spTree>
-      <p:nvGrpSpPr>
-        <p:cNvPr id="1" name=""/>
-        <p:cNvGrpSpPr/>
-        <p:nvPr/>
-      </p:nvGrpSpPr>
-      <p:grpSpPr>
-        <a:xfrm>
-          <a:off x="0" y="0"/>
-          <a:ext cx="0" cy="0"/>
-          <a:chOff x="0" y="0"/>
-          <a:chExt cx="0" cy="0"/>
-        </a:xfrm>
-      </p:grpSpPr>
-      <p:sp>
-        <p:nvSpPr>
-          <p:cNvPr id="12" name="Rectangle 11">
-            <a:extLst>
-              <a:ext uri="{FF2B5EF4-FFF2-40B4-BE49-F238E27FC236}">
-                <a16:creationId xmlns:a16="http://schemas.microsoft.com/office/drawing/2014/main" id="{71B2258F-86CA-4D4D-8270-BC05FCDEBFB3}"/>
-              </a:ext>
-              <a:ext uri="{C183D7F6-B498-43B3-948B-1728B52AA6E4}">
-                <adec:decorative xmlns:adec="http://schemas.microsoft.com/office/drawing/2017/decorative" val="1"/>
-              </a:ext>
-            </a:extLst>
-          </p:cNvPr>
-          <p:cNvSpPr>
-            <a:spLocks noGrp="1" noRot="1" noChangeAspect="1" noMove="1" noResize="1" noEditPoints="1" noAdjustHandles="1" noChangeArrowheads="1" noChangeShapeType="1" noTextEdit="1"/>
-          </p:cNvSpPr>
-          <p:nvPr>
-            <p:extLst>
-              <p:ext uri="{386F3935-93C4-4BCD-93E2-E3B085C9AB24}">
-                <p16:designElem xmlns:p16="http://schemas.microsoft.com/office/powerpoint/2015/main" val="1"/>
-              </p:ext>
-            </p:extLst>
-          </p:nvPr>
-        </p:nvSpPr>
-        <p:spPr>
-          <a:xfrm>
-            <a:off x="0" y="0"/>
-            <a:ext cx="12192000" cy="6857999"/>
-          </a:xfrm>
-          <a:prstGeom prst="rect">
-            <a:avLst/>
-          </a:prstGeom>
-          <a:solidFill>
-            <a:srgbClr val="000000"/>
-          </a:solidFill>
-          <a:ln>
-            <a:noFill/>
-          </a:ln>
-        </p:spPr>
-        <p:style>
-          <a:lnRef idx="2">
-            <a:schemeClr val="accent1">
-              <a:shade val="50000"/>
-            </a:schemeClr>
-          </a:lnRef>
-          <a:fillRef idx="1">
-            <a:schemeClr val="accent1"/>
-          </a:fillRef>
-          <a:effectRef idx="0">
-            <a:schemeClr val="accent1"/>
-          </a:effectRef>
-          <a:fontRef idx="minor">
-            <a:schemeClr val="lt1"/>
-          </a:fontRef>
-        </p:style>
-        <p:txBody>
-          <a:bodyPr rtlCol="0" anchor="ctr"/>
-          <a:lstStyle/>
-          <a:p>
-            <a:pPr algn="ctr"/>
-            <a:endParaRPr lang="en-US"/>
-          </a:p>
-        </p:txBody>
-      </p:sp>
-      <p:pic>
-        <p:nvPicPr>
-          <p:cNvPr id="8" name="Picture 7" descr="Electronic circuit board">
-            <a:extLst>
-              <a:ext uri="{FF2B5EF4-FFF2-40B4-BE49-F238E27FC236}">
-                <a16:creationId xmlns:a16="http://schemas.microsoft.com/office/drawing/2014/main" id="{C29C3DE4-E022-9448-D014-F63D95702C3F}"/>
-              </a:ext>
-            </a:extLst>
-          </p:cNvPr>
-          <p:cNvPicPr>
-            <a:picLocks noChangeAspect="1"/>
-          </p:cNvPicPr>
-          <p:nvPr/>
-        </p:nvPicPr>
-        <p:blipFill>
-          <a:blip r:embed="rId2">
-            <a:alphaModFix amt="50000"/>
-          </a:blip>
-          <a:srcRect t="15730"/>
-          <a:stretch>
-            <a:fillRect/>
-          </a:stretch>
-        </p:blipFill>
-        <p:spPr>
-          <a:xfrm>
-            <a:off x="20" y="1"/>
-            <a:ext cx="12191980" cy="6857999"/>
-          </a:xfrm>
-          <a:prstGeom prst="rect">
-            <a:avLst/>
-          </a:prstGeom>
-        </p:spPr>
-      </p:pic>
-      <p:sp>
-        <p:nvSpPr>
-          <p:cNvPr id="5" name="Title 4">
-            <a:extLst>
-              <a:ext uri="{FF2B5EF4-FFF2-40B4-BE49-F238E27FC236}">
-                <a16:creationId xmlns:a16="http://schemas.microsoft.com/office/drawing/2014/main" id="{714CFB5C-EB10-4A02-3BD2-60706DC9D339}"/>
-              </a:ext>
-            </a:extLst>
-          </p:cNvPr>
-          <p:cNvSpPr>
-            <a:spLocks noGrp="1"/>
-          </p:cNvSpPr>
-          <p:nvPr>
-            <p:ph type="title"/>
-          </p:nvPr>
-        </p:nvSpPr>
-        <p:spPr>
-          <a:xfrm>
-            <a:off x="1524000" y="1122362"/>
-            <a:ext cx="9144000" cy="2900518"/>
-          </a:xfrm>
-        </p:spPr>
-        <p:txBody>
-          <a:bodyPr vert="horz" lIns="91440" tIns="45720" rIns="91440" bIns="45720" rtlCol="0" anchor="b">
-            <a:normAutofit/>
-          </a:bodyPr>
-          <a:lstStyle/>
-          <a:p>
-            <a:pPr algn="ctr"/>
-            <a:r>
-              <a:rPr lang="en-US" dirty="0">
-                <a:solidFill>
-                  <a:srgbClr val="FFFFFF"/>
-                </a:solidFill>
-              </a:rPr>
-              <a:t>GPU hardware</a:t>
-            </a:r>
-          </a:p>
-        </p:txBody>
-      </p:sp>
-      <p:sp>
-        <p:nvSpPr>
-          <p:cNvPr id="6" name="Text Placeholder 5">
-            <a:extLst>
-              <a:ext uri="{FF2B5EF4-FFF2-40B4-BE49-F238E27FC236}">
-                <a16:creationId xmlns:a16="http://schemas.microsoft.com/office/drawing/2014/main" id="{A504F1AE-CC81-FDCF-E4A4-CFBFEEEDA294}"/>
-              </a:ext>
-            </a:extLst>
-          </p:cNvPr>
-          <p:cNvSpPr>
-            <a:spLocks noGrp="1"/>
-          </p:cNvSpPr>
-          <p:nvPr>
-            <p:ph type="body" idx="1"/>
-          </p:nvPr>
-        </p:nvSpPr>
-        <p:spPr>
-          <a:xfrm>
-            <a:off x="1524000" y="4159404"/>
-            <a:ext cx="9144000" cy="1098395"/>
-          </a:xfrm>
-        </p:spPr>
-        <p:txBody>
-          <a:bodyPr vert="horz" lIns="91440" tIns="45720" rIns="91440" bIns="45720" rtlCol="0">
-            <a:normAutofit/>
-          </a:bodyPr>
-          <a:lstStyle/>
-          <a:p>
-            <a:pPr algn="ctr"/>
-            <a:endParaRPr lang="en-US">
-              <a:solidFill>
-                <a:srgbClr val="FFFFFF"/>
-              </a:solidFill>
-            </a:endParaRPr>
-          </a:p>
-        </p:txBody>
-      </p:sp>
-      <p:sp>
-        <p:nvSpPr>
-          <p:cNvPr id="4" name="Slide Number Placeholder 3">
-            <a:extLst>
-              <a:ext uri="{FF2B5EF4-FFF2-40B4-BE49-F238E27FC236}">
-                <a16:creationId xmlns:a16="http://schemas.microsoft.com/office/drawing/2014/main" id="{8657F1CB-18FA-659E-6530-B17C8C4052CD}"/>
-              </a:ext>
-            </a:extLst>
-          </p:cNvPr>
-          <p:cNvSpPr>
-            <a:spLocks noGrp="1"/>
-          </p:cNvSpPr>
-          <p:nvPr>
-            <p:ph type="sldNum" sz="quarter" idx="12"/>
-          </p:nvPr>
-        </p:nvSpPr>
-        <p:spPr>
-          <a:xfrm>
-            <a:off x="8610600" y="6356350"/>
-            <a:ext cx="2743200" cy="365125"/>
-          </a:xfrm>
-        </p:spPr>
-        <p:txBody>
-          <a:bodyPr vert="horz" lIns="91440" tIns="45720" rIns="91440" bIns="45720" rtlCol="0" anchor="ctr">
-            <a:normAutofit/>
-          </a:bodyPr>
-          <a:lstStyle/>
-          <a:p>
-            <a:pPr>
-              <a:spcAft>
-                <a:spcPts val="600"/>
-              </a:spcAft>
-              <a:defRPr/>
-            </a:pPr>
-            <a:fld id="{9C7CE217-4467-4B8D-A735-B008FA7C4816}" type="slidenum">
-              <a:rPr lang="en-US">
-                <a:solidFill>
-                  <a:srgbClr val="FFFFFF"/>
-                </a:solidFill>
-                <a:latin typeface="Calibri" panose="020F0502020204030204"/>
-              </a:rPr>
-              <a:pPr>
-                <a:spcAft>
-                  <a:spcPts val="600"/>
-                </a:spcAft>
-                <a:defRPr/>
-              </a:pPr>
-              <a:t>10</a:t>
-            </a:fld>
-            <a:endParaRPr lang="en-US">
-              <a:solidFill>
-                <a:srgbClr val="FFFFFF"/>
-              </a:solidFill>
-              <a:latin typeface="Calibri" panose="020F0502020204030204"/>
-            </a:endParaRPr>
-          </a:p>
-        </p:txBody>
-      </p:sp>
-    </p:spTree>
-    <p:extLst>
-      <p:ext uri="{BB962C8B-B14F-4D97-AF65-F5344CB8AC3E}">
-        <p14:creationId xmlns:p14="http://schemas.microsoft.com/office/powerpoint/2010/main" val="3856144244"/>
-      </p:ext>
-    </p:extLst>
-  </p:cSld>
-  <p:clrMapOvr>
-    <a:overrideClrMapping bg1="dk1" tx1="lt1" bg2="dk2" tx2="lt2" accent1="accent1" accent2="accent2" accent3="accent3" accent4="accent4" accent5="accent5" accent6="accent6" hlink="hlink" folHlink="folHlink"/>
-  </p:clrMapOvr>
-</p:sld>
-</file>
-
-<file path=ppt/slides/slide11.xml><?xml version="1.0" encoding="utf-8"?>
-<p:sld xmlns:a="http://schemas.openxmlformats.org/drawingml/2006/main" xmlns:r="http://schemas.openxmlformats.org/officeDocument/2006/relationships" xmlns:p="http://schemas.openxmlformats.org/presentationml/2006/main">
-  <p:cSld>
     <p:spTree>
       <p:nvGrpSpPr>
         <p:cNvPr id="1" name=""/>
@@ -4424,7 +4154,7 @@
           <a:p>
             <a:fld id="{9C7CE217-4467-4B8D-A735-B008FA7C4816}" type="slidenum">
               <a:rPr lang="LID4096" smtClean="0"/>
-              <a:t>11</a:t>
+              <a:t>10</a:t>
             </a:fld>
             <a:endParaRPr lang="LID4096"/>
           </a:p>
@@ -5172,7 +4902,7 @@
 </p:sld>
 </file>
 
-<file path=ppt/slides/slide12.xml><?xml version="1.0" encoding="utf-8"?>
+<file path=ppt/slides/slide11.xml><?xml version="1.0" encoding="utf-8"?>
 <p:sld xmlns:a="http://schemas.openxmlformats.org/drawingml/2006/main" xmlns:r="http://schemas.openxmlformats.org/officeDocument/2006/relationships" xmlns:p="http://schemas.openxmlformats.org/presentationml/2006/main">
   <p:cSld>
     <p:spTree>
@@ -5336,7 +5066,7 @@
           <a:p>
             <a:fld id="{9C7CE217-4467-4B8D-A735-B008FA7C4816}" type="slidenum">
               <a:rPr lang="LID4096" smtClean="0"/>
-              <a:t>12</a:t>
+              <a:t>11</a:t>
             </a:fld>
             <a:endParaRPr lang="LID4096"/>
           </a:p>
@@ -5649,7 +5379,7 @@
 </p:sld>
 </file>
 
-<file path=ppt/slides/slide13.xml><?xml version="1.0" encoding="utf-8"?>
+<file path=ppt/slides/slide12.xml><?xml version="1.0" encoding="utf-8"?>
 <p:sld xmlns:a="http://schemas.openxmlformats.org/drawingml/2006/main" xmlns:r="http://schemas.openxmlformats.org/officeDocument/2006/relationships" xmlns:p="http://schemas.openxmlformats.org/presentationml/2006/main">
   <p:cSld>
     <p:spTree>
@@ -5795,7 +5525,7 @@
           <a:p>
             <a:fld id="{9C7CE217-4467-4B8D-A735-B008FA7C4816}" type="slidenum">
               <a:rPr lang="LID4096" smtClean="0"/>
-              <a:t>13</a:t>
+              <a:t>12</a:t>
             </a:fld>
             <a:endParaRPr lang="LID4096"/>
           </a:p>
@@ -6219,7 +5949,7 @@
                   <a:spcPts val="600"/>
                 </a:spcAft>
               </a:pPr>
-              <a:t>13</a:t>
+              <a:t>12</a:t>
             </a:fld>
             <a:endParaRPr lang="LID4096">
               <a:solidFill>
@@ -6594,7 +6324,7 @@
 </p:sld>
 </file>
 
-<file path=ppt/slides/slide14.xml><?xml version="1.0" encoding="utf-8"?>
+<file path=ppt/slides/slide13.xml><?xml version="1.0" encoding="utf-8"?>
 <p:sld xmlns:a="http://schemas.openxmlformats.org/drawingml/2006/main" xmlns:r="http://schemas.openxmlformats.org/officeDocument/2006/relationships" xmlns:p="http://schemas.openxmlformats.org/presentationml/2006/main">
   <p:cSld>
     <p:spTree>
@@ -6971,7 +6701,7 @@
           <a:p>
             <a:fld id="{9C7CE217-4467-4B8D-A735-B008FA7C4816}" type="slidenum">
               <a:rPr lang="LID4096" smtClean="0"/>
-              <a:t>14</a:t>
+              <a:t>13</a:t>
             </a:fld>
             <a:endParaRPr lang="LID4096"/>
           </a:p>
@@ -8533,7 +8263,7 @@
 </p:sld>
 </file>
 
-<file path=ppt/slides/slide15.xml><?xml version="1.0" encoding="utf-8"?>
+<file path=ppt/slides/slide14.xml><?xml version="1.0" encoding="utf-8"?>
 <p:sld xmlns:a="http://schemas.openxmlformats.org/drawingml/2006/main" xmlns:r="http://schemas.openxmlformats.org/officeDocument/2006/relationships" xmlns:p="http://schemas.openxmlformats.org/presentationml/2006/main">
   <p:cSld>
     <p:spTree>
@@ -8696,7 +8426,7 @@
           <a:p>
             <a:fld id="{9C7CE217-4467-4B8D-A735-B008FA7C4816}" type="slidenum">
               <a:rPr lang="LID4096" smtClean="0"/>
-              <a:t>15</a:t>
+              <a:t>14</a:t>
             </a:fld>
             <a:endParaRPr lang="LID4096"/>
           </a:p>
@@ -9134,7 +8864,7 @@
 </p:sld>
 </file>
 
-<file path=ppt/slides/slide16.xml><?xml version="1.0" encoding="utf-8"?>
+<file path=ppt/slides/slide15.xml><?xml version="1.0" encoding="utf-8"?>
 <p:sld xmlns:a="http://schemas.openxmlformats.org/drawingml/2006/main" xmlns:r="http://schemas.openxmlformats.org/officeDocument/2006/relationships" xmlns:p="http://schemas.openxmlformats.org/presentationml/2006/main">
   <p:cSld>
     <p:spTree>
@@ -9853,7 +9583,7 @@
           <a:p>
             <a:fld id="{9C7CE217-4467-4B8D-A735-B008FA7C4816}" type="slidenum">
               <a:rPr lang="LID4096" smtClean="0"/>
-              <a:t>16</a:t>
+              <a:t>15</a:t>
             </a:fld>
             <a:endParaRPr lang="LID4096"/>
           </a:p>
@@ -10209,7 +9939,7 @@
 </p:sld>
 </file>
 
-<file path=ppt/slides/slide17.xml><?xml version="1.0" encoding="utf-8"?>
+<file path=ppt/slides/slide16.xml><?xml version="1.0" encoding="utf-8"?>
 <p:sld xmlns:a="http://schemas.openxmlformats.org/drawingml/2006/main" xmlns:r="http://schemas.openxmlformats.org/officeDocument/2006/relationships" xmlns:p="http://schemas.openxmlformats.org/presentationml/2006/main">
   <p:cSld>
     <p:spTree>
@@ -10386,7 +10116,7 @@
           <a:p>
             <a:fld id="{9C7CE217-4467-4B8D-A735-B008FA7C4816}" type="slidenum">
               <a:rPr lang="LID4096" smtClean="0"/>
-              <a:t>17</a:t>
+              <a:t>16</a:t>
             </a:fld>
             <a:endParaRPr lang="LID4096"/>
           </a:p>
@@ -10730,7 +10460,7 @@
 </p:sld>
 </file>
 
-<file path=ppt/slides/slide18.xml><?xml version="1.0" encoding="utf-8"?>
+<file path=ppt/slides/slide17.xml><?xml version="1.0" encoding="utf-8"?>
 <p:sld xmlns:a="http://schemas.openxmlformats.org/drawingml/2006/main" xmlns:r="http://schemas.openxmlformats.org/officeDocument/2006/relationships" xmlns:p="http://schemas.openxmlformats.org/presentationml/2006/main">
   <p:cSld>
     <p:spTree>
@@ -10925,7 +10655,7 @@
           <a:p>
             <a:fld id="{9C7CE217-4467-4B8D-A735-B008FA7C4816}" type="slidenum">
               <a:rPr lang="LID4096" smtClean="0"/>
-              <a:t>18</a:t>
+              <a:t>17</a:t>
             </a:fld>
             <a:endParaRPr lang="LID4096"/>
           </a:p>
@@ -14073,7 +13803,7 @@
 </p:sld>
 </file>
 
-<file path=ppt/slides/slide19.xml><?xml version="1.0" encoding="utf-8"?>
+<file path=ppt/slides/slide18.xml><?xml version="1.0" encoding="utf-8"?>
 <p:sld xmlns:a="http://schemas.openxmlformats.org/drawingml/2006/main" xmlns:r="http://schemas.openxmlformats.org/officeDocument/2006/relationships" xmlns:p="http://schemas.openxmlformats.org/presentationml/2006/main">
   <p:cSld>
     <p:bg>
@@ -14323,7 +14053,7 @@
                 </a:spcAft>
                 <a:defRPr/>
               </a:pPr>
-              <a:t>19</a:t>
+              <a:t>18</a:t>
             </a:fld>
             <a:endParaRPr lang="en-US">
               <a:solidFill>
@@ -14347,125 +14077,7 @@
 </p:sld>
 </file>
 
-<file path=ppt/slides/slide2.xml><?xml version="1.0" encoding="utf-8"?>
-<p:sld xmlns:a="http://schemas.openxmlformats.org/drawingml/2006/main" xmlns:r="http://schemas.openxmlformats.org/officeDocument/2006/relationships" xmlns:p="http://schemas.openxmlformats.org/presentationml/2006/main">
-  <p:cSld>
-    <p:spTree>
-      <p:nvGrpSpPr>
-        <p:cNvPr id="1" name=""/>
-        <p:cNvGrpSpPr/>
-        <p:nvPr/>
-      </p:nvGrpSpPr>
-      <p:grpSpPr>
-        <a:xfrm>
-          <a:off x="0" y="0"/>
-          <a:ext cx="0" cy="0"/>
-          <a:chOff x="0" y="0"/>
-          <a:chExt cx="0" cy="0"/>
-        </a:xfrm>
-      </p:grpSpPr>
-      <p:sp>
-        <p:nvSpPr>
-          <p:cNvPr id="4" name="Slide Number Placeholder 3"/>
-          <p:cNvSpPr>
-            <a:spLocks noGrp="1"/>
-          </p:cNvSpPr>
-          <p:nvPr>
-            <p:ph type="sldNum" sz="quarter" idx="12"/>
-          </p:nvPr>
-        </p:nvSpPr>
-        <p:spPr/>
-        <p:txBody>
-          <a:bodyPr/>
-          <a:lstStyle/>
-          <a:p>
-            <a:fld id="{0AA598EC-1C61-495B-A9F8-4410E339CCF5}" type="slidenum">
-              <a:rPr lang="en-US" smtClean="0"/>
-              <a:t>2</a:t>
-            </a:fld>
-            <a:endParaRPr lang="en-US"/>
-          </a:p>
-        </p:txBody>
-      </p:sp>
-      <p:sp>
-        <p:nvSpPr>
-          <p:cNvPr id="6" name="TextBox 5"/>
-          <p:cNvSpPr txBox="1"/>
-          <p:nvPr/>
-        </p:nvSpPr>
-        <p:spPr>
-          <a:xfrm>
-            <a:off x="1509523" y="5445224"/>
-            <a:ext cx="9204636" cy="707886"/>
-          </a:xfrm>
-          <a:prstGeom prst="rect">
-            <a:avLst/>
-          </a:prstGeom>
-          <a:noFill/>
-        </p:spPr>
-        <p:txBody>
-          <a:bodyPr wrap="none" rtlCol="0">
-            <a:spAutoFit/>
-          </a:bodyPr>
-          <a:lstStyle/>
-          <a:p>
-            <a:r>
-              <a:rPr lang="en-US" sz="4000" dirty="0">
-                <a:hlinkClick r:id="rId2"/>
-              </a:rPr>
-              <a:t>https://gjbex.github.io/Python-on-GPUs/</a:t>
-            </a:r>
-            <a:r>
-              <a:rPr lang="en-US" sz="4000" dirty="0"/>
-              <a:t> </a:t>
-            </a:r>
-          </a:p>
-        </p:txBody>
-      </p:sp>
-      <p:pic>
-        <p:nvPicPr>
-          <p:cNvPr id="3" name="Picture 2" descr="A qr code with a dinosaur&#10;&#10;AI-generated content may be incorrect.">
-            <a:extLst>
-              <a:ext uri="{FF2B5EF4-FFF2-40B4-BE49-F238E27FC236}">
-                <a16:creationId xmlns:a16="http://schemas.microsoft.com/office/drawing/2014/main" id="{FBC866DE-5B09-981F-D91D-CC7E68853B35}"/>
-              </a:ext>
-            </a:extLst>
-          </p:cNvPr>
-          <p:cNvPicPr>
-            <a:picLocks noChangeAspect="1"/>
-          </p:cNvPicPr>
-          <p:nvPr/>
-        </p:nvPicPr>
-        <p:blipFill>
-          <a:blip r:embed="rId3"/>
-          <a:stretch>
-            <a:fillRect/>
-          </a:stretch>
-        </p:blipFill>
-        <p:spPr>
-          <a:xfrm>
-            <a:off x="3952875" y="1285875"/>
-            <a:ext cx="4286250" cy="4286250"/>
-          </a:xfrm>
-          <a:prstGeom prst="rect">
-            <a:avLst/>
-          </a:prstGeom>
-        </p:spPr>
-      </p:pic>
-    </p:spTree>
-    <p:extLst>
-      <p:ext uri="{BB962C8B-B14F-4D97-AF65-F5344CB8AC3E}">
-        <p14:creationId xmlns:p14="http://schemas.microsoft.com/office/powerpoint/2010/main" val="4231110881"/>
-      </p:ext>
-    </p:extLst>
-  </p:cSld>
-  <p:clrMapOvr>
-    <a:masterClrMapping/>
-  </p:clrMapOvr>
-</p:sld>
-</file>
-
-<file path=ppt/slides/slide20.xml><?xml version="1.0" encoding="utf-8"?>
+<file path=ppt/slides/slide19.xml><?xml version="1.0" encoding="utf-8"?>
 <p:sld xmlns:a="http://schemas.openxmlformats.org/drawingml/2006/main" xmlns:r="http://schemas.openxmlformats.org/officeDocument/2006/relationships" xmlns:p="http://schemas.openxmlformats.org/presentationml/2006/main">
   <p:cSld>
     <p:spTree>
@@ -14605,7 +14217,7 @@
           <a:p>
             <a:fld id="{9C7CE217-4467-4B8D-A735-B008FA7C4816}" type="slidenum">
               <a:rPr lang="LID4096" smtClean="0"/>
-              <a:t>20</a:t>
+              <a:t>19</a:t>
             </a:fld>
             <a:endParaRPr lang="LID4096"/>
           </a:p>
@@ -14954,7 +14566,125 @@
 </p:sld>
 </file>
 
-<file path=ppt/slides/slide21.xml><?xml version="1.0" encoding="utf-8"?>
+<file path=ppt/slides/slide2.xml><?xml version="1.0" encoding="utf-8"?>
+<p:sld xmlns:a="http://schemas.openxmlformats.org/drawingml/2006/main" xmlns:r="http://schemas.openxmlformats.org/officeDocument/2006/relationships" xmlns:p="http://schemas.openxmlformats.org/presentationml/2006/main">
+  <p:cSld>
+    <p:spTree>
+      <p:nvGrpSpPr>
+        <p:cNvPr id="1" name=""/>
+        <p:cNvGrpSpPr/>
+        <p:nvPr/>
+      </p:nvGrpSpPr>
+      <p:grpSpPr>
+        <a:xfrm>
+          <a:off x="0" y="0"/>
+          <a:ext cx="0" cy="0"/>
+          <a:chOff x="0" y="0"/>
+          <a:chExt cx="0" cy="0"/>
+        </a:xfrm>
+      </p:grpSpPr>
+      <p:sp>
+        <p:nvSpPr>
+          <p:cNvPr id="4" name="Slide Number Placeholder 3"/>
+          <p:cNvSpPr>
+            <a:spLocks noGrp="1"/>
+          </p:cNvSpPr>
+          <p:nvPr>
+            <p:ph type="sldNum" sz="quarter" idx="12"/>
+          </p:nvPr>
+        </p:nvSpPr>
+        <p:spPr/>
+        <p:txBody>
+          <a:bodyPr/>
+          <a:lstStyle/>
+          <a:p>
+            <a:fld id="{0AA598EC-1C61-495B-A9F8-4410E339CCF5}" type="slidenum">
+              <a:rPr lang="en-US" smtClean="0"/>
+              <a:t>2</a:t>
+            </a:fld>
+            <a:endParaRPr lang="en-US"/>
+          </a:p>
+        </p:txBody>
+      </p:sp>
+      <p:sp>
+        <p:nvSpPr>
+          <p:cNvPr id="6" name="TextBox 5"/>
+          <p:cNvSpPr txBox="1"/>
+          <p:nvPr/>
+        </p:nvSpPr>
+        <p:spPr>
+          <a:xfrm>
+            <a:off x="914096" y="5445224"/>
+            <a:ext cx="10003829" cy="707886"/>
+          </a:xfrm>
+          <a:prstGeom prst="rect">
+            <a:avLst/>
+          </a:prstGeom>
+          <a:noFill/>
+        </p:spPr>
+        <p:txBody>
+          <a:bodyPr wrap="none" rtlCol="0">
+            <a:spAutoFit/>
+          </a:bodyPr>
+          <a:lstStyle/>
+          <a:p>
+            <a:r>
+              <a:rPr lang="en-US" sz="4000" dirty="0">
+                <a:hlinkClick r:id="rId2"/>
+              </a:rPr>
+              <a:t>https://github.com/gjbex/GPU-programming</a:t>
+            </a:r>
+            <a:r>
+              <a:rPr lang="en-US" sz="4000" dirty="0"/>
+              <a:t> </a:t>
+            </a:r>
+          </a:p>
+        </p:txBody>
+      </p:sp>
+      <p:pic>
+        <p:nvPicPr>
+          <p:cNvPr id="5" name="Picture 4">
+            <a:extLst>
+              <a:ext uri="{FF2B5EF4-FFF2-40B4-BE49-F238E27FC236}">
+                <a16:creationId xmlns:a16="http://schemas.microsoft.com/office/drawing/2014/main" id="{8A4748FA-3DAD-887F-51C8-0A0B7D38DA34}"/>
+              </a:ext>
+            </a:extLst>
+          </p:cNvPr>
+          <p:cNvPicPr>
+            <a:picLocks noChangeAspect="1"/>
+          </p:cNvPicPr>
+          <p:nvPr/>
+        </p:nvPicPr>
+        <p:blipFill>
+          <a:blip r:embed="rId3"/>
+          <a:stretch>
+            <a:fillRect/>
+          </a:stretch>
+        </p:blipFill>
+        <p:spPr>
+          <a:xfrm>
+            <a:off x="3952875" y="1285875"/>
+            <a:ext cx="4286250" cy="4286250"/>
+          </a:xfrm>
+          <a:prstGeom prst="rect">
+            <a:avLst/>
+          </a:prstGeom>
+        </p:spPr>
+      </p:pic>
+    </p:spTree>
+    <p:extLst>
+      <p:ext uri="{BB962C8B-B14F-4D97-AF65-F5344CB8AC3E}">
+        <p14:creationId xmlns:p14="http://schemas.microsoft.com/office/powerpoint/2010/main" val="4231110881"/>
+      </p:ext>
+    </p:extLst>
+  </p:cSld>
+  <p:clrMapOvr>
+    <a:masterClrMapping/>
+  </p:clrMapOvr>
+</p:sld>
+</file>
+
+<file path=ppt/slides/slide20.xml><?xml version="1.0" encoding="utf-8"?>
 <p:sld xmlns:a="http://schemas.openxmlformats.org/drawingml/2006/main" xmlns:r="http://schemas.openxmlformats.org/officeDocument/2006/relationships" xmlns:p="http://schemas.openxmlformats.org/presentationml/2006/main">
   <p:cSld>
     <p:spTree>
@@ -15171,7 +14901,7 @@
           <a:p>
             <a:fld id="{9C7CE217-4467-4B8D-A735-B008FA7C4816}" type="slidenum">
               <a:rPr lang="LID4096" smtClean="0"/>
-              <a:t>21</a:t>
+              <a:t>20</a:t>
             </a:fld>
             <a:endParaRPr lang="LID4096"/>
           </a:p>
@@ -16163,7 +15893,7 @@
 </p:sld>
 </file>
 
-<file path=ppt/slides/slide22.xml><?xml version="1.0" encoding="utf-8"?>
+<file path=ppt/slides/slide21.xml><?xml version="1.0" encoding="utf-8"?>
 <p:sld xmlns:a="http://schemas.openxmlformats.org/drawingml/2006/main" xmlns:r="http://schemas.openxmlformats.org/officeDocument/2006/relationships" xmlns:p="http://schemas.openxmlformats.org/presentationml/2006/main">
   <p:cSld>
     <p:spTree>
@@ -16292,7 +16022,7 @@
           <a:p>
             <a:fld id="{9C7CE217-4467-4B8D-A735-B008FA7C4816}" type="slidenum">
               <a:rPr lang="LID4096" smtClean="0"/>
-              <a:t>22</a:t>
+              <a:t>21</a:t>
             </a:fld>
             <a:endParaRPr lang="LID4096"/>
           </a:p>
@@ -16605,7 +16335,7 @@
 </p:sld>
 </file>
 
-<file path=ppt/slides/slide23.xml><?xml version="1.0" encoding="utf-8"?>
+<file path=ppt/slides/slide22.xml><?xml version="1.0" encoding="utf-8"?>
 <p:sld xmlns:a="http://schemas.openxmlformats.org/drawingml/2006/main" xmlns:r="http://schemas.openxmlformats.org/officeDocument/2006/relationships" xmlns:p="http://schemas.openxmlformats.org/presentationml/2006/main">
   <p:cSld>
     <p:spTree>
@@ -16865,7 +16595,7 @@
           <a:p>
             <a:fld id="{9C7CE217-4467-4B8D-A735-B008FA7C4816}" type="slidenum">
               <a:rPr lang="LID4096" smtClean="0"/>
-              <a:t>23</a:t>
+              <a:t>22</a:t>
             </a:fld>
             <a:endParaRPr lang="LID4096"/>
           </a:p>
@@ -17433,7 +17163,7 @@
 </p:sld>
 </file>
 
-<file path=ppt/slides/slide24.xml><?xml version="1.0" encoding="utf-8"?>
+<file path=ppt/slides/slide23.xml><?xml version="1.0" encoding="utf-8"?>
 <p:sld xmlns:a="http://schemas.openxmlformats.org/drawingml/2006/main" xmlns:r="http://schemas.openxmlformats.org/officeDocument/2006/relationships" xmlns:p="http://schemas.openxmlformats.org/presentationml/2006/main">
   <p:cSld>
     <p:spTree>
@@ -17629,7 +17359,7 @@
           <a:p>
             <a:fld id="{9C7CE217-4467-4B8D-A735-B008FA7C4816}" type="slidenum">
               <a:rPr lang="LID4096" smtClean="0"/>
-              <a:t>24</a:t>
+              <a:t>23</a:t>
             </a:fld>
             <a:endParaRPr lang="LID4096"/>
           </a:p>
@@ -18305,7 +18035,7 @@
 </p:sld>
 </file>
 
-<file path=ppt/slides/slide25.xml><?xml version="1.0" encoding="utf-8"?>
+<file path=ppt/slides/slide24.xml><?xml version="1.0" encoding="utf-8"?>
 <p:sld xmlns:a="http://schemas.openxmlformats.org/drawingml/2006/main" xmlns:r="http://schemas.openxmlformats.org/officeDocument/2006/relationships" xmlns:p="http://schemas.openxmlformats.org/presentationml/2006/main">
   <p:cSld>
     <p:spTree>
@@ -18460,7 +18190,7 @@
           <a:p>
             <a:fld id="{9C7CE217-4467-4B8D-A735-B008FA7C4816}" type="slidenum">
               <a:rPr lang="LID4096" smtClean="0"/>
-              <a:t>25</a:t>
+              <a:t>24</a:t>
             </a:fld>
             <a:endParaRPr lang="LID4096"/>
           </a:p>
@@ -19126,7 +18856,7 @@
 </p:sld>
 </file>
 
-<file path=ppt/slides/slide26.xml><?xml version="1.0" encoding="utf-8"?>
+<file path=ppt/slides/slide25.xml><?xml version="1.0" encoding="utf-8"?>
 <p:sld xmlns:a="http://schemas.openxmlformats.org/drawingml/2006/main" xmlns:r="http://schemas.openxmlformats.org/officeDocument/2006/relationships" xmlns:p="http://schemas.openxmlformats.org/presentationml/2006/main">
   <p:cSld>
     <p:spTree>
@@ -19260,7 +18990,7 @@
           <a:p>
             <a:fld id="{9C7CE217-4467-4B8D-A735-B008FA7C4816}" type="slidenum">
               <a:rPr lang="LID4096" smtClean="0"/>
-              <a:t>26</a:t>
+              <a:t>25</a:t>
             </a:fld>
             <a:endParaRPr lang="LID4096"/>
           </a:p>
@@ -19537,7 +19267,7 @@
 </p:sld>
 </file>
 
-<file path=ppt/slides/slide27.xml><?xml version="1.0" encoding="utf-8"?>
+<file path=ppt/slides/slide26.xml><?xml version="1.0" encoding="utf-8"?>
 <p:sld xmlns:a="http://schemas.openxmlformats.org/drawingml/2006/main" xmlns:r="http://schemas.openxmlformats.org/officeDocument/2006/relationships" xmlns:p="http://schemas.openxmlformats.org/presentationml/2006/main">
   <p:cSld>
     <p:spTree>
@@ -19795,7 +19525,7 @@
           <a:p>
             <a:fld id="{9C7CE217-4467-4B8D-A735-B008FA7C4816}" type="slidenum">
               <a:rPr lang="LID4096" smtClean="0"/>
-              <a:t>27</a:t>
+              <a:t>26</a:t>
             </a:fld>
             <a:endParaRPr lang="LID4096"/>
           </a:p>
@@ -20604,7 +20334,7 @@
 </p:sld>
 </file>
 
-<file path=ppt/slides/slide28.xml><?xml version="1.0" encoding="utf-8"?>
+<file path=ppt/slides/slide27.xml><?xml version="1.0" encoding="utf-8"?>
 <p:sld xmlns:a="http://schemas.openxmlformats.org/drawingml/2006/main" xmlns:r="http://schemas.openxmlformats.org/officeDocument/2006/relationships" xmlns:p="http://schemas.openxmlformats.org/presentationml/2006/main">
   <p:cSld>
     <p:bg>
@@ -20849,7 +20579,7 @@
                 </a:spcAft>
                 <a:defRPr/>
               </a:pPr>
-              <a:t>28</a:t>
+              <a:t>27</a:t>
             </a:fld>
             <a:endParaRPr lang="en-US">
               <a:solidFill>
@@ -20873,7 +20603,7 @@
 </p:sld>
 </file>
 
-<file path=ppt/slides/slide29.xml><?xml version="1.0" encoding="utf-8"?>
+<file path=ppt/slides/slide28.xml><?xml version="1.0" encoding="utf-8"?>
 <p:sld xmlns:a="http://schemas.openxmlformats.org/drawingml/2006/main" xmlns:r="http://schemas.openxmlformats.org/officeDocument/2006/relationships" xmlns:p="http://schemas.openxmlformats.org/presentationml/2006/main">
   <p:cSld>
     <p:spTree>
@@ -21661,7 +21391,7 @@
           <a:p>
             <a:fld id="{9C7CE217-4467-4B8D-A735-B008FA7C4816}" type="slidenum">
               <a:rPr lang="LID4096" smtClean="0"/>
-              <a:t>29</a:t>
+              <a:t>28</a:t>
             </a:fld>
             <a:endParaRPr lang="LID4096"/>
           </a:p>
@@ -21680,102 +21410,7 @@
 </p:sld>
 </file>
 
-<file path=ppt/slides/slide3.xml><?xml version="1.0" encoding="utf-8"?>
-<p:sld xmlns:a="http://schemas.openxmlformats.org/drawingml/2006/main" xmlns:r="http://schemas.openxmlformats.org/officeDocument/2006/relationships" xmlns:p="http://schemas.openxmlformats.org/presentationml/2006/main">
-  <p:cSld>
-    <p:spTree>
-      <p:nvGrpSpPr>
-        <p:cNvPr id="1" name=""/>
-        <p:cNvGrpSpPr/>
-        <p:nvPr/>
-      </p:nvGrpSpPr>
-      <p:grpSpPr>
-        <a:xfrm>
-          <a:off x="0" y="0"/>
-          <a:ext cx="0" cy="0"/>
-          <a:chOff x="0" y="0"/>
-          <a:chExt cx="0" cy="0"/>
-        </a:xfrm>
-      </p:grpSpPr>
-      <p:pic>
-        <p:nvPicPr>
-          <p:cNvPr id="3" name="Picture 2" descr="Qr code&#10;&#10;Description automatically generated">
-            <a:extLst>
-              <a:ext uri="{FF2B5EF4-FFF2-40B4-BE49-F238E27FC236}">
-                <a16:creationId xmlns:a16="http://schemas.microsoft.com/office/drawing/2014/main" id="{73A4FCC5-DC3D-4500-9780-EECF84D9A9C9}"/>
-              </a:ext>
-            </a:extLst>
-          </p:cNvPr>
-          <p:cNvPicPr>
-            <a:picLocks noChangeAspect="1"/>
-          </p:cNvPicPr>
-          <p:nvPr/>
-        </p:nvPicPr>
-        <p:blipFill>
-          <a:blip r:embed="rId2">
-            <a:extLst>
-              <a:ext uri="{28A0092B-C50C-407E-A947-70E740481C1C}">
-                <a14:useLocalDpi xmlns:a14="http://schemas.microsoft.com/office/drawing/2010/main" val="0"/>
-              </a:ext>
-            </a:extLst>
-          </a:blip>
-          <a:stretch>
-            <a:fillRect/>
-          </a:stretch>
-        </p:blipFill>
-        <p:spPr>
-          <a:xfrm>
-            <a:off x="0" y="0"/>
-            <a:ext cx="12192000" cy="6858000"/>
-          </a:xfrm>
-          <a:prstGeom prst="rect">
-            <a:avLst/>
-          </a:prstGeom>
-        </p:spPr>
-      </p:pic>
-      <p:sp>
-        <p:nvSpPr>
-          <p:cNvPr id="2" name="Slide Number Placeholder 1">
-            <a:extLst>
-              <a:ext uri="{FF2B5EF4-FFF2-40B4-BE49-F238E27FC236}">
-                <a16:creationId xmlns:a16="http://schemas.microsoft.com/office/drawing/2014/main" id="{F570AEBC-58DC-06FC-AE67-813A2E7C9CA8}"/>
-              </a:ext>
-            </a:extLst>
-          </p:cNvPr>
-          <p:cNvSpPr>
-            <a:spLocks noGrp="1"/>
-          </p:cNvSpPr>
-          <p:nvPr>
-            <p:ph type="sldNum" sz="quarter" idx="12"/>
-          </p:nvPr>
-        </p:nvSpPr>
-        <p:spPr/>
-        <p:txBody>
-          <a:bodyPr/>
-          <a:lstStyle/>
-          <a:p>
-            <a:fld id="{9C7CE217-4467-4B8D-A735-B008FA7C4816}" type="slidenum">
-              <a:rPr lang="LID4096" smtClean="0"/>
-              <a:t>3</a:t>
-            </a:fld>
-            <a:endParaRPr lang="LID4096"/>
-          </a:p>
-        </p:txBody>
-      </p:sp>
-    </p:spTree>
-    <p:extLst>
-      <p:ext uri="{BB962C8B-B14F-4D97-AF65-F5344CB8AC3E}">
-        <p14:creationId xmlns:p14="http://schemas.microsoft.com/office/powerpoint/2010/main" val="2488509471"/>
-      </p:ext>
-    </p:extLst>
-  </p:cSld>
-  <p:clrMapOvr>
-    <a:masterClrMapping/>
-  </p:clrMapOvr>
-</p:sld>
-</file>
-
-<file path=ppt/slides/slide30.xml><?xml version="1.0" encoding="utf-8"?>
+<file path=ppt/slides/slide29.xml><?xml version="1.0" encoding="utf-8"?>
 <p:sld xmlns:a="http://schemas.openxmlformats.org/drawingml/2006/main" xmlns:r="http://schemas.openxmlformats.org/officeDocument/2006/relationships" xmlns:p="http://schemas.openxmlformats.org/presentationml/2006/main">
   <p:cSld>
     <p:spTree>
@@ -22699,7 +22334,7 @@
           <a:p>
             <a:fld id="{9C7CE217-4467-4B8D-A735-B008FA7C4816}" type="slidenum">
               <a:rPr lang="LID4096" smtClean="0"/>
-              <a:t>30</a:t>
+              <a:t>29</a:t>
             </a:fld>
             <a:endParaRPr lang="LID4096"/>
           </a:p>
@@ -22902,7 +22537,102 @@
 </p:sld>
 </file>
 
-<file path=ppt/slides/slide31.xml><?xml version="1.0" encoding="utf-8"?>
+<file path=ppt/slides/slide3.xml><?xml version="1.0" encoding="utf-8"?>
+<p:sld xmlns:a="http://schemas.openxmlformats.org/drawingml/2006/main" xmlns:r="http://schemas.openxmlformats.org/officeDocument/2006/relationships" xmlns:p="http://schemas.openxmlformats.org/presentationml/2006/main">
+  <p:cSld>
+    <p:spTree>
+      <p:nvGrpSpPr>
+        <p:cNvPr id="1" name=""/>
+        <p:cNvGrpSpPr/>
+        <p:nvPr/>
+      </p:nvGrpSpPr>
+      <p:grpSpPr>
+        <a:xfrm>
+          <a:off x="0" y="0"/>
+          <a:ext cx="0" cy="0"/>
+          <a:chOff x="0" y="0"/>
+          <a:chExt cx="0" cy="0"/>
+        </a:xfrm>
+      </p:grpSpPr>
+      <p:pic>
+        <p:nvPicPr>
+          <p:cNvPr id="3" name="Picture 2" descr="Qr code&#10;&#10;Description automatically generated">
+            <a:extLst>
+              <a:ext uri="{FF2B5EF4-FFF2-40B4-BE49-F238E27FC236}">
+                <a16:creationId xmlns:a16="http://schemas.microsoft.com/office/drawing/2014/main" id="{73A4FCC5-DC3D-4500-9780-EECF84D9A9C9}"/>
+              </a:ext>
+            </a:extLst>
+          </p:cNvPr>
+          <p:cNvPicPr>
+            <a:picLocks noChangeAspect="1"/>
+          </p:cNvPicPr>
+          <p:nvPr/>
+        </p:nvPicPr>
+        <p:blipFill>
+          <a:blip r:embed="rId2">
+            <a:extLst>
+              <a:ext uri="{28A0092B-C50C-407E-A947-70E740481C1C}">
+                <a14:useLocalDpi xmlns:a14="http://schemas.microsoft.com/office/drawing/2010/main" val="0"/>
+              </a:ext>
+            </a:extLst>
+          </a:blip>
+          <a:stretch>
+            <a:fillRect/>
+          </a:stretch>
+        </p:blipFill>
+        <p:spPr>
+          <a:xfrm>
+            <a:off x="0" y="0"/>
+            <a:ext cx="12192000" cy="6858000"/>
+          </a:xfrm>
+          <a:prstGeom prst="rect">
+            <a:avLst/>
+          </a:prstGeom>
+        </p:spPr>
+      </p:pic>
+      <p:sp>
+        <p:nvSpPr>
+          <p:cNvPr id="2" name="Slide Number Placeholder 1">
+            <a:extLst>
+              <a:ext uri="{FF2B5EF4-FFF2-40B4-BE49-F238E27FC236}">
+                <a16:creationId xmlns:a16="http://schemas.microsoft.com/office/drawing/2014/main" id="{F570AEBC-58DC-06FC-AE67-813A2E7C9CA8}"/>
+              </a:ext>
+            </a:extLst>
+          </p:cNvPr>
+          <p:cNvSpPr>
+            <a:spLocks noGrp="1"/>
+          </p:cNvSpPr>
+          <p:nvPr>
+            <p:ph type="sldNum" sz="quarter" idx="12"/>
+          </p:nvPr>
+        </p:nvSpPr>
+        <p:spPr/>
+        <p:txBody>
+          <a:bodyPr/>
+          <a:lstStyle/>
+          <a:p>
+            <a:fld id="{9C7CE217-4467-4B8D-A735-B008FA7C4816}" type="slidenum">
+              <a:rPr lang="LID4096" smtClean="0"/>
+              <a:t>3</a:t>
+            </a:fld>
+            <a:endParaRPr lang="LID4096"/>
+          </a:p>
+        </p:txBody>
+      </p:sp>
+    </p:spTree>
+    <p:extLst>
+      <p:ext uri="{BB962C8B-B14F-4D97-AF65-F5344CB8AC3E}">
+        <p14:creationId xmlns:p14="http://schemas.microsoft.com/office/powerpoint/2010/main" val="2488509471"/>
+      </p:ext>
+    </p:extLst>
+  </p:cSld>
+  <p:clrMapOvr>
+    <a:masterClrMapping/>
+  </p:clrMapOvr>
+</p:sld>
+</file>
+
+<file path=ppt/slides/slide30.xml><?xml version="1.0" encoding="utf-8"?>
 <p:sld xmlns:a="http://schemas.openxmlformats.org/drawingml/2006/main" xmlns:r="http://schemas.openxmlformats.org/officeDocument/2006/relationships" xmlns:p="http://schemas.openxmlformats.org/presentationml/2006/main">
   <p:cSld>
     <p:spTree>
@@ -23733,7 +23463,7 @@
           <a:p>
             <a:fld id="{9C7CE217-4467-4B8D-A735-B008FA7C4816}" type="slidenum">
               <a:rPr lang="LID4096" smtClean="0"/>
-              <a:t>31</a:t>
+              <a:t>30</a:t>
             </a:fld>
             <a:endParaRPr lang="LID4096"/>
           </a:p>
@@ -24166,7 +23896,7 @@
 </p:sld>
 </file>
 
-<file path=ppt/slides/slide32.xml><?xml version="1.0" encoding="utf-8"?>
+<file path=ppt/slides/slide31.xml><?xml version="1.0" encoding="utf-8"?>
 <p:sld xmlns:a="http://schemas.openxmlformats.org/drawingml/2006/main" xmlns:r="http://schemas.openxmlformats.org/officeDocument/2006/relationships" xmlns:p="http://schemas.openxmlformats.org/presentationml/2006/main">
   <p:cSld>
     <p:spTree>
@@ -24682,7 +24412,7 @@
           <a:p>
             <a:fld id="{9C7CE217-4467-4B8D-A735-B008FA7C4816}" type="slidenum">
               <a:rPr lang="LID4096" smtClean="0"/>
-              <a:t>32</a:t>
+              <a:t>31</a:t>
             </a:fld>
             <a:endParaRPr lang="LID4096"/>
           </a:p>
@@ -24701,7 +24431,7 @@
 </p:sld>
 </file>
 
-<file path=ppt/slides/slide33.xml><?xml version="1.0" encoding="utf-8"?>
+<file path=ppt/slides/slide32.xml><?xml version="1.0" encoding="utf-8"?>
 <p:sld xmlns:a="http://schemas.openxmlformats.org/drawingml/2006/main" xmlns:r="http://schemas.openxmlformats.org/officeDocument/2006/relationships" xmlns:p="http://schemas.openxmlformats.org/presentationml/2006/main">
   <p:cSld>
     <p:spTree>
@@ -24863,7 +24593,7 @@
           <a:p>
             <a:fld id="{9C7CE217-4467-4B8D-A735-B008FA7C4816}" type="slidenum">
               <a:rPr lang="LID4096" smtClean="0"/>
-              <a:t>33</a:t>
+              <a:t>32</a:t>
             </a:fld>
             <a:endParaRPr lang="LID4096"/>
           </a:p>
@@ -25284,1335 +25014,7 @@
           <a:p>
             <a:r>
               <a:rPr lang="en-US" dirty="0"/>
-              <a:t>Typographical conventions I</a:t>
-            </a:r>
-            <a:endParaRPr lang="nl-BE" dirty="0"/>
-          </a:p>
-        </p:txBody>
-      </p:sp>
-      <p:sp>
-        <p:nvSpPr>
-          <p:cNvPr id="3" name="Content Placeholder 2"/>
-          <p:cNvSpPr>
-            <a:spLocks noGrp="1"/>
-          </p:cNvSpPr>
-          <p:nvPr>
-            <p:ph idx="1"/>
-          </p:nvPr>
-        </p:nvSpPr>
-        <p:spPr/>
-        <p:txBody>
-          <a:bodyPr/>
-          <a:lstStyle/>
-          <a:p>
-            <a:r>
-              <a:rPr lang="en-US" dirty="0"/>
-              <a:t>Inline code fragments and file names are rendered as, e.g., </a:t>
-            </a:r>
-            <a:r>
-              <a:rPr lang="en-US" dirty="0">
-                <a:latin typeface="Courier New" pitchFamily="49" charset="0"/>
-                <a:cs typeface="Courier New" pitchFamily="49" charset="0"/>
-              </a:rPr>
-              <a:t>hello_world.py</a:t>
-            </a:r>
-          </a:p>
-          <a:p>
-            <a:r>
-              <a:rPr lang="en-US" dirty="0"/>
-              <a:t>Longer code fragments are rendered as</a:t>
-            </a:r>
-          </a:p>
-          <a:p>
-            <a:endParaRPr lang="en-US" dirty="0">
-              <a:solidFill>
-                <a:srgbClr val="FF0000"/>
-              </a:solidFill>
-            </a:endParaRPr>
-          </a:p>
-          <a:p>
-            <a:endParaRPr lang="en-US" dirty="0">
-              <a:solidFill>
-                <a:srgbClr val="FF0000"/>
-              </a:solidFill>
-            </a:endParaRPr>
-          </a:p>
-          <a:p>
-            <a:r>
-              <a:rPr lang="en-US" dirty="0"/>
-              <a:t>Data files are rendered as</a:t>
-            </a:r>
-            <a:endParaRPr lang="nl-BE" dirty="0"/>
-          </a:p>
-          <a:p>
-            <a:endParaRPr lang="nl-BE" dirty="0"/>
-          </a:p>
-        </p:txBody>
-      </p:sp>
-      <p:sp>
-        <p:nvSpPr>
-          <p:cNvPr id="4" name="Slide Number Placeholder 3"/>
-          <p:cNvSpPr>
-            <a:spLocks noGrp="1"/>
-          </p:cNvSpPr>
-          <p:nvPr>
-            <p:ph type="sldNum" sz="quarter" idx="12"/>
-          </p:nvPr>
-        </p:nvSpPr>
-        <p:spPr/>
-        <p:txBody>
-          <a:bodyPr/>
-          <a:lstStyle/>
-          <a:p>
-            <a:pPr marL="0" marR="0" lvl="0" indent="0" algn="r" defTabSz="914400" rtl="0" eaLnBrk="1" fontAlgn="auto" latinLnBrk="0" hangingPunct="1">
-              <a:lnSpc>
-                <a:spcPct val="100000"/>
-              </a:lnSpc>
-              <a:spcBef>
-                <a:spcPts val="0"/>
-              </a:spcBef>
-              <a:spcAft>
-                <a:spcPts val="0"/>
-              </a:spcAft>
-              <a:buClrTx/>
-              <a:buSzTx/>
-              <a:buFontTx/>
-              <a:buNone/>
-              <a:tabLst/>
-              <a:defRPr/>
-            </a:pPr>
-            <a:fld id="{5A209D72-2E9D-49B0-8977-41DCCC66C0BB}" type="slidenum">
-              <a:rPr kumimoji="0" lang="nl-BE" sz="1200" b="0" i="0" u="none" strike="noStrike" kern="1200" cap="none" spc="0" normalizeH="0" baseline="0" noProof="0" smtClean="0">
-                <a:ln>
-                  <a:noFill/>
-                </a:ln>
-                <a:solidFill>
-                  <a:prstClr val="black">
-                    <a:tint val="75000"/>
-                  </a:prstClr>
-                </a:solidFill>
-                <a:effectLst/>
-                <a:uLnTx/>
-                <a:uFillTx/>
-                <a:latin typeface="Calibri" panose="020F0502020204030204"/>
-                <a:ea typeface="+mn-ea"/>
-                <a:cs typeface="+mn-cs"/>
-              </a:rPr>
-              <a:pPr marL="0" marR="0" lvl="0" indent="0" algn="r" defTabSz="914400" rtl="0" eaLnBrk="1" fontAlgn="auto" latinLnBrk="0" hangingPunct="1">
-                <a:lnSpc>
-                  <a:spcPct val="100000"/>
-                </a:lnSpc>
-                <a:spcBef>
-                  <a:spcPts val="0"/>
-                </a:spcBef>
-                <a:spcAft>
-                  <a:spcPts val="0"/>
-                </a:spcAft>
-                <a:buClrTx/>
-                <a:buSzTx/>
-                <a:buFontTx/>
-                <a:buNone/>
-                <a:tabLst/>
-                <a:defRPr/>
-              </a:pPr>
-              <a:t>4</a:t>
-            </a:fld>
-            <a:endParaRPr kumimoji="0" lang="nl-BE" sz="1200" b="0" i="0" u="none" strike="noStrike" kern="1200" cap="none" spc="0" normalizeH="0" baseline="0" noProof="0">
-              <a:ln>
-                <a:noFill/>
-              </a:ln>
-              <a:solidFill>
-                <a:prstClr val="black">
-                  <a:tint val="75000"/>
-                </a:prstClr>
-              </a:solidFill>
-              <a:effectLst/>
-              <a:uLnTx/>
-              <a:uFillTx/>
-              <a:latin typeface="Calibri" panose="020F0502020204030204"/>
-              <a:ea typeface="+mn-ea"/>
-              <a:cs typeface="+mn-cs"/>
-            </a:endParaRPr>
-          </a:p>
-        </p:txBody>
-      </p:sp>
-      <p:sp>
-        <p:nvSpPr>
-          <p:cNvPr id="5" name="TextBox 4"/>
-          <p:cNvSpPr txBox="1"/>
-          <p:nvPr/>
-        </p:nvSpPr>
-        <p:spPr>
-          <a:xfrm>
-            <a:off x="2855641" y="3137030"/>
-            <a:ext cx="5285421" cy="1200329"/>
-          </a:xfrm>
-          <a:prstGeom prst="rect">
-            <a:avLst/>
-          </a:prstGeom>
-          <a:solidFill>
-            <a:schemeClr val="bg1">
-              <a:lumMod val="85000"/>
-            </a:schemeClr>
-          </a:solidFill>
-          <a:ln>
-            <a:solidFill>
-              <a:schemeClr val="tx1"/>
-            </a:solidFill>
-          </a:ln>
-        </p:spPr>
-        <p:txBody>
-          <a:bodyPr wrap="square" rtlCol="0">
-            <a:spAutoFit/>
-          </a:bodyPr>
-          <a:lstStyle/>
-          <a:p>
-            <a:pPr marL="0" marR="0" lvl="0" indent="0" algn="l" defTabSz="914400" rtl="0" eaLnBrk="1" fontAlgn="auto" latinLnBrk="0" hangingPunct="1">
-              <a:lnSpc>
-                <a:spcPct val="100000"/>
-              </a:lnSpc>
-              <a:spcBef>
-                <a:spcPts val="0"/>
-              </a:spcBef>
-              <a:spcAft>
-                <a:spcPts val="0"/>
-              </a:spcAft>
-              <a:buClrTx/>
-              <a:buSzTx/>
-              <a:buFontTx/>
-              <a:buNone/>
-              <a:tabLst/>
-              <a:defRPr/>
-            </a:pPr>
-            <a:r>
-              <a:rPr kumimoji="0" lang="en-US" sz="1800" b="0" i="0" u="none" strike="noStrike" kern="1200" cap="none" spc="0" normalizeH="0" baseline="0" noProof="0" dirty="0">
-                <a:ln>
-                  <a:noFill/>
-                </a:ln>
-                <a:solidFill>
-                  <a:prstClr val="black"/>
-                </a:solidFill>
-                <a:effectLst/>
-                <a:uLnTx/>
-                <a:uFillTx/>
-                <a:latin typeface="Courier New" pitchFamily="49" charset="0"/>
-                <a:ea typeface="+mn-ea"/>
-                <a:cs typeface="Courier New" pitchFamily="49" charset="0"/>
-              </a:rPr>
-              <a:t>#!/</a:t>
-            </a:r>
-            <a:r>
-              <a:rPr kumimoji="0" lang="en-US" sz="1800" b="0" i="0" u="none" strike="noStrike" kern="1200" cap="none" spc="0" normalizeH="0" baseline="0" noProof="0" dirty="0" err="1">
-                <a:ln>
-                  <a:noFill/>
-                </a:ln>
-                <a:solidFill>
-                  <a:prstClr val="black"/>
-                </a:solidFill>
-                <a:effectLst/>
-                <a:uLnTx/>
-                <a:uFillTx/>
-                <a:latin typeface="Courier New" pitchFamily="49" charset="0"/>
-                <a:ea typeface="+mn-ea"/>
-                <a:cs typeface="Courier New" pitchFamily="49" charset="0"/>
-              </a:rPr>
-              <a:t>usr</a:t>
-            </a:r>
-            <a:r>
-              <a:rPr kumimoji="0" lang="en-US" sz="1800" b="0" i="0" u="none" strike="noStrike" kern="1200" cap="none" spc="0" normalizeH="0" baseline="0" noProof="0" dirty="0">
-                <a:ln>
-                  <a:noFill/>
-                </a:ln>
-                <a:solidFill>
-                  <a:prstClr val="black"/>
-                </a:solidFill>
-                <a:effectLst/>
-                <a:uLnTx/>
-                <a:uFillTx/>
-                <a:latin typeface="Courier New" pitchFamily="49" charset="0"/>
-                <a:ea typeface="+mn-ea"/>
-                <a:cs typeface="Courier New" pitchFamily="49" charset="0"/>
-              </a:rPr>
-              <a:t>/bin/</a:t>
-            </a:r>
-            <a:r>
-              <a:rPr kumimoji="0" lang="en-US" sz="1800" b="0" i="0" u="none" strike="noStrike" kern="1200" cap="none" spc="0" normalizeH="0" baseline="0" noProof="0" dirty="0" err="1">
-                <a:ln>
-                  <a:noFill/>
-                </a:ln>
-                <a:solidFill>
-                  <a:prstClr val="black"/>
-                </a:solidFill>
-                <a:effectLst/>
-                <a:uLnTx/>
-                <a:uFillTx/>
-                <a:latin typeface="Courier New" pitchFamily="49" charset="0"/>
-                <a:ea typeface="+mn-ea"/>
-                <a:cs typeface="Courier New" pitchFamily="49" charset="0"/>
-              </a:rPr>
-              <a:t>env</a:t>
-            </a:r>
-            <a:r>
-              <a:rPr kumimoji="0" lang="en-US" sz="1800" b="0" i="0" u="none" strike="noStrike" kern="1200" cap="none" spc="0" normalizeH="0" baseline="0" noProof="0" dirty="0">
-                <a:ln>
-                  <a:noFill/>
-                </a:ln>
-                <a:solidFill>
-                  <a:prstClr val="black"/>
-                </a:solidFill>
-                <a:effectLst/>
-                <a:uLnTx/>
-                <a:uFillTx/>
-                <a:latin typeface="Courier New" pitchFamily="49" charset="0"/>
-                <a:ea typeface="+mn-ea"/>
-                <a:cs typeface="Courier New" pitchFamily="49" charset="0"/>
-              </a:rPr>
-              <a:t> python</a:t>
-            </a:r>
-          </a:p>
-          <a:p>
-            <a:pPr marL="0" marR="0" lvl="0" indent="0" algn="l" defTabSz="914400" rtl="0" eaLnBrk="1" fontAlgn="auto" latinLnBrk="0" hangingPunct="1">
-              <a:lnSpc>
-                <a:spcPct val="100000"/>
-              </a:lnSpc>
-              <a:spcBef>
-                <a:spcPts val="0"/>
-              </a:spcBef>
-              <a:spcAft>
-                <a:spcPts val="0"/>
-              </a:spcAft>
-              <a:buClrTx/>
-              <a:buSzTx/>
-              <a:buFontTx/>
-              <a:buNone/>
-              <a:tabLst/>
-              <a:defRPr/>
-            </a:pPr>
-            <a:r>
-              <a:rPr kumimoji="0" lang="en-US" sz="1800" b="0" i="0" u="none" strike="noStrike" kern="1200" cap="none" spc="0" normalizeH="0" baseline="0" noProof="0" dirty="0">
-                <a:ln>
-                  <a:noFill/>
-                </a:ln>
-                <a:solidFill>
-                  <a:prstClr val="black"/>
-                </a:solidFill>
-                <a:effectLst/>
-                <a:uLnTx/>
-                <a:uFillTx/>
-                <a:latin typeface="Courier New" pitchFamily="49" charset="0"/>
-                <a:ea typeface="+mn-ea"/>
-                <a:cs typeface="Courier New" pitchFamily="49" charset="0"/>
-              </a:rPr>
-              <a:t>…</a:t>
-            </a:r>
-          </a:p>
-          <a:p>
-            <a:pPr marL="0" marR="0" lvl="0" indent="0" algn="l" defTabSz="914400" rtl="0" eaLnBrk="1" fontAlgn="auto" latinLnBrk="0" hangingPunct="1">
-              <a:lnSpc>
-                <a:spcPct val="100000"/>
-              </a:lnSpc>
-              <a:spcBef>
-                <a:spcPts val="0"/>
-              </a:spcBef>
-              <a:spcAft>
-                <a:spcPts val="0"/>
-              </a:spcAft>
-              <a:buClrTx/>
-              <a:buSzTx/>
-              <a:buFontTx/>
-              <a:buNone/>
-              <a:tabLst/>
-              <a:defRPr/>
-            </a:pPr>
-            <a:r>
-              <a:rPr kumimoji="0" lang="en-US" sz="1800" b="0" i="0" u="none" strike="noStrike" kern="1200" cap="none" spc="0" normalizeH="0" baseline="0" noProof="0" dirty="0">
-                <a:ln>
-                  <a:noFill/>
-                </a:ln>
-                <a:solidFill>
-                  <a:prstClr val="black"/>
-                </a:solidFill>
-                <a:effectLst/>
-                <a:uLnTx/>
-                <a:uFillTx/>
-                <a:latin typeface="Courier New" pitchFamily="49" charset="0"/>
-                <a:ea typeface="+mn-ea"/>
-                <a:cs typeface="Courier New" pitchFamily="49" charset="0"/>
-              </a:rPr>
-              <a:t>if __name__ == '__main__':</a:t>
-            </a:r>
-          </a:p>
-          <a:p>
-            <a:pPr marL="0" marR="0" lvl="0" indent="0" algn="l" defTabSz="914400" rtl="0" eaLnBrk="1" fontAlgn="auto" latinLnBrk="0" hangingPunct="1">
-              <a:lnSpc>
-                <a:spcPct val="100000"/>
-              </a:lnSpc>
-              <a:spcBef>
-                <a:spcPts val="0"/>
-              </a:spcBef>
-              <a:spcAft>
-                <a:spcPts val="0"/>
-              </a:spcAft>
-              <a:buClrTx/>
-              <a:buSzTx/>
-              <a:buFontTx/>
-              <a:buNone/>
-              <a:tabLst/>
-              <a:defRPr/>
-            </a:pPr>
-            <a:r>
-              <a:rPr kumimoji="0" lang="en-US" sz="1800" b="0" i="0" u="none" strike="noStrike" kern="1200" cap="none" spc="0" normalizeH="0" baseline="0" noProof="0" dirty="0">
-                <a:ln>
-                  <a:noFill/>
-                </a:ln>
-                <a:solidFill>
-                  <a:prstClr val="black"/>
-                </a:solidFill>
-                <a:effectLst/>
-                <a:uLnTx/>
-                <a:uFillTx/>
-                <a:latin typeface="Courier New" pitchFamily="49" charset="0"/>
-                <a:ea typeface="+mn-ea"/>
-                <a:cs typeface="Courier New" pitchFamily="49" charset="0"/>
-              </a:rPr>
-              <a:t>    print('hello world!')</a:t>
-            </a:r>
-          </a:p>
-        </p:txBody>
-      </p:sp>
-      <p:sp>
-        <p:nvSpPr>
-          <p:cNvPr id="6" name="TextBox 5"/>
-          <p:cNvSpPr txBox="1"/>
-          <p:nvPr/>
-        </p:nvSpPr>
-        <p:spPr>
-          <a:xfrm>
-            <a:off x="2855640" y="4841414"/>
-            <a:ext cx="5285421" cy="1569660"/>
-          </a:xfrm>
-          <a:prstGeom prst="rect">
-            <a:avLst/>
-          </a:prstGeom>
-          <a:solidFill>
-            <a:schemeClr val="accent6">
-              <a:lumMod val="20000"/>
-              <a:lumOff val="80000"/>
-            </a:schemeClr>
-          </a:solidFill>
-          <a:ln>
-            <a:solidFill>
-              <a:schemeClr val="tx1"/>
-            </a:solidFill>
-          </a:ln>
-        </p:spPr>
-        <p:txBody>
-          <a:bodyPr wrap="square" rtlCol="0">
-            <a:spAutoFit/>
-          </a:bodyPr>
-          <a:lstStyle/>
-          <a:p>
-            <a:pPr marL="0" marR="0" lvl="0" indent="0" algn="l" defTabSz="914400" rtl="0" eaLnBrk="1" fontAlgn="auto" latinLnBrk="0" hangingPunct="1">
-              <a:lnSpc>
-                <a:spcPct val="100000"/>
-              </a:lnSpc>
-              <a:spcBef>
-                <a:spcPts val="0"/>
-              </a:spcBef>
-              <a:spcAft>
-                <a:spcPts val="0"/>
-              </a:spcAft>
-              <a:buClrTx/>
-              <a:buSzTx/>
-              <a:buFontTx/>
-              <a:buNone/>
-              <a:tabLst/>
-              <a:defRPr/>
-            </a:pPr>
-            <a:r>
-              <a:rPr kumimoji="0" lang="en-US" sz="1600" b="0" i="0" u="none" strike="noStrike" kern="1200" cap="none" spc="0" normalizeH="0" baseline="0" noProof="0" dirty="0">
-                <a:ln>
-                  <a:noFill/>
-                </a:ln>
-                <a:solidFill>
-                  <a:prstClr val="black"/>
-                </a:solidFill>
-                <a:effectLst/>
-                <a:uLnTx/>
-                <a:uFillTx/>
-                <a:latin typeface="Courier New" pitchFamily="49" charset="0"/>
-                <a:ea typeface="+mn-ea"/>
-                <a:cs typeface="Courier New" pitchFamily="49" charset="0"/>
-              </a:rPr>
-              <a:t>case dim temp</a:t>
-            </a:r>
-          </a:p>
-          <a:p>
-            <a:pPr marL="0" marR="0" lvl="0" indent="0" algn="l" defTabSz="914400" rtl="0" eaLnBrk="1" fontAlgn="auto" latinLnBrk="0" hangingPunct="1">
-              <a:lnSpc>
-                <a:spcPct val="100000"/>
-              </a:lnSpc>
-              <a:spcBef>
-                <a:spcPts val="0"/>
-              </a:spcBef>
-              <a:spcAft>
-                <a:spcPts val="0"/>
-              </a:spcAft>
-              <a:buClrTx/>
-              <a:buSzTx/>
-              <a:buFontTx/>
-              <a:buNone/>
-              <a:tabLst/>
-              <a:defRPr/>
-            </a:pPr>
-            <a:r>
-              <a:rPr kumimoji="0" lang="en-US" sz="1600" b="0" i="0" u="none" strike="noStrike" kern="1200" cap="none" spc="0" normalizeH="0" baseline="0" noProof="0" dirty="0">
-                <a:ln>
-                  <a:noFill/>
-                </a:ln>
-                <a:solidFill>
-                  <a:prstClr val="black"/>
-                </a:solidFill>
-                <a:effectLst/>
-                <a:uLnTx/>
-                <a:uFillTx/>
-                <a:latin typeface="Courier New" pitchFamily="49" charset="0"/>
-                <a:ea typeface="+mn-ea"/>
-                <a:cs typeface="Courier New" pitchFamily="49" charset="0"/>
-              </a:rPr>
-              <a:t>1 1 -0.5</a:t>
-            </a:r>
-          </a:p>
-          <a:p>
-            <a:pPr marL="0" marR="0" lvl="0" indent="0" algn="l" defTabSz="914400" rtl="0" eaLnBrk="1" fontAlgn="auto" latinLnBrk="0" hangingPunct="1">
-              <a:lnSpc>
-                <a:spcPct val="100000"/>
-              </a:lnSpc>
-              <a:spcBef>
-                <a:spcPts val="0"/>
-              </a:spcBef>
-              <a:spcAft>
-                <a:spcPts val="0"/>
-              </a:spcAft>
-              <a:buClrTx/>
-              <a:buSzTx/>
-              <a:buFontTx/>
-              <a:buNone/>
-              <a:tabLst/>
-              <a:defRPr/>
-            </a:pPr>
-            <a:r>
-              <a:rPr kumimoji="0" lang="en-US" sz="1600" b="0" i="0" u="none" strike="noStrike" kern="1200" cap="none" spc="0" normalizeH="0" baseline="0" noProof="0" dirty="0">
-                <a:ln>
-                  <a:noFill/>
-                </a:ln>
-                <a:solidFill>
-                  <a:prstClr val="black"/>
-                </a:solidFill>
-                <a:effectLst/>
-                <a:uLnTx/>
-                <a:uFillTx/>
-                <a:latin typeface="Courier New" pitchFamily="49" charset="0"/>
-                <a:ea typeface="+mn-ea"/>
-                <a:cs typeface="Courier New" pitchFamily="49" charset="0"/>
-              </a:rPr>
-              <a:t>2 1 0.0</a:t>
-            </a:r>
-          </a:p>
-          <a:p>
-            <a:pPr marL="0" marR="0" lvl="0" indent="0" algn="l" defTabSz="914400" rtl="0" eaLnBrk="1" fontAlgn="auto" latinLnBrk="0" hangingPunct="1">
-              <a:lnSpc>
-                <a:spcPct val="100000"/>
-              </a:lnSpc>
-              <a:spcBef>
-                <a:spcPts val="0"/>
-              </a:spcBef>
-              <a:spcAft>
-                <a:spcPts val="0"/>
-              </a:spcAft>
-              <a:buClrTx/>
-              <a:buSzTx/>
-              <a:buFontTx/>
-              <a:buNone/>
-              <a:tabLst/>
-              <a:defRPr/>
-            </a:pPr>
-            <a:r>
-              <a:rPr kumimoji="0" lang="en-US" sz="1600" b="0" i="0" u="none" strike="noStrike" kern="1200" cap="none" spc="0" normalizeH="0" baseline="0" noProof="0" dirty="0">
-                <a:ln>
-                  <a:noFill/>
-                </a:ln>
-                <a:solidFill>
-                  <a:prstClr val="black"/>
-                </a:solidFill>
-                <a:effectLst/>
-                <a:uLnTx/>
-                <a:uFillTx/>
-                <a:latin typeface="Courier New" pitchFamily="49" charset="0"/>
-                <a:ea typeface="+mn-ea"/>
-                <a:cs typeface="Courier New" pitchFamily="49" charset="0"/>
-              </a:rPr>
-              <a:t>3 1 0.5</a:t>
-            </a:r>
-          </a:p>
-          <a:p>
-            <a:pPr marL="0" marR="0" lvl="0" indent="0" algn="l" defTabSz="914400" rtl="0" eaLnBrk="1" fontAlgn="auto" latinLnBrk="0" hangingPunct="1">
-              <a:lnSpc>
-                <a:spcPct val="100000"/>
-              </a:lnSpc>
-              <a:spcBef>
-                <a:spcPts val="0"/>
-              </a:spcBef>
-              <a:spcAft>
-                <a:spcPts val="0"/>
-              </a:spcAft>
-              <a:buClrTx/>
-              <a:buSzTx/>
-              <a:buFontTx/>
-              <a:buNone/>
-              <a:tabLst/>
-              <a:defRPr/>
-            </a:pPr>
-            <a:r>
-              <a:rPr kumimoji="0" lang="en-US" sz="1600" b="0" i="0" u="none" strike="noStrike" kern="1200" cap="none" spc="0" normalizeH="0" baseline="0" noProof="0" dirty="0">
-                <a:ln>
-                  <a:noFill/>
-                </a:ln>
-                <a:solidFill>
-                  <a:prstClr val="black"/>
-                </a:solidFill>
-                <a:effectLst/>
-                <a:uLnTx/>
-                <a:uFillTx/>
-                <a:latin typeface="Courier New" pitchFamily="49" charset="0"/>
-                <a:ea typeface="+mn-ea"/>
-                <a:cs typeface="Courier New" pitchFamily="49" charset="0"/>
-              </a:rPr>
-              <a:t>4 2 -0.5</a:t>
-            </a:r>
-          </a:p>
-          <a:p>
-            <a:pPr marL="0" marR="0" lvl="0" indent="0" algn="l" defTabSz="914400" rtl="0" eaLnBrk="1" fontAlgn="auto" latinLnBrk="0" hangingPunct="1">
-              <a:lnSpc>
-                <a:spcPct val="100000"/>
-              </a:lnSpc>
-              <a:spcBef>
-                <a:spcPts val="0"/>
-              </a:spcBef>
-              <a:spcAft>
-                <a:spcPts val="0"/>
-              </a:spcAft>
-              <a:buClrTx/>
-              <a:buSzTx/>
-              <a:buFontTx/>
-              <a:buNone/>
-              <a:tabLst/>
-              <a:defRPr/>
-            </a:pPr>
-            <a:r>
-              <a:rPr kumimoji="0" lang="en-US" sz="1600" b="0" i="0" u="none" strike="noStrike" kern="1200" cap="none" spc="0" normalizeH="0" baseline="0" noProof="0" dirty="0">
-                <a:ln>
-                  <a:noFill/>
-                </a:ln>
-                <a:solidFill>
-                  <a:prstClr val="black"/>
-                </a:solidFill>
-                <a:effectLst/>
-                <a:uLnTx/>
-                <a:uFillTx/>
-                <a:latin typeface="Courier New" pitchFamily="49" charset="0"/>
-                <a:ea typeface="+mn-ea"/>
-                <a:cs typeface="Courier New" pitchFamily="49" charset="0"/>
-              </a:rPr>
-              <a:t>…</a:t>
-            </a:r>
-          </a:p>
-        </p:txBody>
-      </p:sp>
-      <p:grpSp>
-        <p:nvGrpSpPr>
-          <p:cNvPr id="14" name="Group 13"/>
-          <p:cNvGrpSpPr/>
-          <p:nvPr/>
-        </p:nvGrpSpPr>
-        <p:grpSpPr>
-          <a:xfrm>
-            <a:off x="2845250" y="3484460"/>
-            <a:ext cx="3603014" cy="2926615"/>
-            <a:chOff x="1321249" y="3584213"/>
-            <a:chExt cx="3603014" cy="2926615"/>
-          </a:xfrm>
-        </p:grpSpPr>
-        <p:sp>
-          <p:nvSpPr>
-            <p:cNvPr id="7" name="Oval 6"/>
-            <p:cNvSpPr/>
-            <p:nvPr/>
-          </p:nvSpPr>
-          <p:spPr>
-            <a:xfrm>
-              <a:off x="1331639" y="6237312"/>
-              <a:ext cx="360041" cy="273516"/>
-            </a:xfrm>
-            <a:prstGeom prst="ellipse">
-              <a:avLst/>
-            </a:prstGeom>
-            <a:noFill/>
-            <a:ln>
-              <a:solidFill>
-                <a:srgbClr val="C00000"/>
-              </a:solidFill>
-            </a:ln>
-          </p:spPr>
-          <p:style>
-            <a:lnRef idx="2">
-              <a:schemeClr val="accent1">
-                <a:shade val="50000"/>
-              </a:schemeClr>
-            </a:lnRef>
-            <a:fillRef idx="1">
-              <a:schemeClr val="accent1"/>
-            </a:fillRef>
-            <a:effectRef idx="0">
-              <a:schemeClr val="accent1"/>
-            </a:effectRef>
-            <a:fontRef idx="minor">
-              <a:schemeClr val="lt1"/>
-            </a:fontRef>
-          </p:style>
-          <p:txBody>
-            <a:bodyPr rtlCol="0" anchor="ctr"/>
-            <a:lstStyle/>
-            <a:p>
-              <a:pPr marL="0" marR="0" lvl="0" indent="0" algn="ctr" defTabSz="914400" rtl="0" eaLnBrk="1" fontAlgn="auto" latinLnBrk="0" hangingPunct="1">
-                <a:lnSpc>
-                  <a:spcPct val="100000"/>
-                </a:lnSpc>
-                <a:spcBef>
-                  <a:spcPts val="0"/>
-                </a:spcBef>
-                <a:spcAft>
-                  <a:spcPts val="0"/>
-                </a:spcAft>
-                <a:buClrTx/>
-                <a:buSzTx/>
-                <a:buFontTx/>
-                <a:buNone/>
-                <a:tabLst/>
-                <a:defRPr/>
-              </a:pPr>
-              <a:endParaRPr kumimoji="0" lang="nl-BE" sz="1800" b="0" i="0" u="none" strike="noStrike" kern="1200" cap="none" spc="0" normalizeH="0" baseline="0" noProof="0">
-                <a:ln>
-                  <a:noFill/>
-                </a:ln>
-                <a:solidFill>
-                  <a:prstClr val="white"/>
-                </a:solidFill>
-                <a:effectLst/>
-                <a:uLnTx/>
-                <a:uFillTx/>
-                <a:latin typeface="Calibri" panose="020F0502020204030204"/>
-                <a:ea typeface="+mn-ea"/>
-                <a:cs typeface="+mn-cs"/>
-              </a:endParaRPr>
-            </a:p>
-          </p:txBody>
-        </p:sp>
-        <p:cxnSp>
-          <p:nvCxnSpPr>
-            <p:cNvPr id="9" name="Straight Arrow Connector 8"/>
-            <p:cNvCxnSpPr>
-              <a:stCxn id="10" idx="1"/>
-              <a:endCxn id="7" idx="6"/>
-            </p:cNvCxnSpPr>
-            <p:nvPr/>
-          </p:nvCxnSpPr>
-          <p:spPr>
-            <a:xfrm flipH="1">
-              <a:off x="1691680" y="5858572"/>
-              <a:ext cx="2016224" cy="515498"/>
-            </a:xfrm>
-            <a:prstGeom prst="straightConnector1">
-              <a:avLst/>
-            </a:prstGeom>
-            <a:ln w="28575">
-              <a:solidFill>
-                <a:srgbClr val="C00000"/>
-              </a:solidFill>
-              <a:tailEnd type="stealth" w="lg" len="lg"/>
-            </a:ln>
-          </p:spPr>
-          <p:style>
-            <a:lnRef idx="1">
-              <a:schemeClr val="accent1"/>
-            </a:lnRef>
-            <a:fillRef idx="0">
-              <a:schemeClr val="accent1"/>
-            </a:fillRef>
-            <a:effectRef idx="0">
-              <a:schemeClr val="accent1"/>
-            </a:effectRef>
-            <a:fontRef idx="minor">
-              <a:schemeClr val="tx1"/>
-            </a:fontRef>
-          </p:style>
-        </p:cxnSp>
-        <p:sp>
-          <p:nvSpPr>
-            <p:cNvPr id="10" name="TextBox 9"/>
-            <p:cNvSpPr txBox="1"/>
-            <p:nvPr/>
-          </p:nvSpPr>
-          <p:spPr>
-            <a:xfrm>
-              <a:off x="3707904" y="5535406"/>
-              <a:ext cx="1216359" cy="646331"/>
-            </a:xfrm>
-            <a:prstGeom prst="rect">
-              <a:avLst/>
-            </a:prstGeom>
-            <a:solidFill>
-              <a:schemeClr val="bg1"/>
-            </a:solidFill>
-            <a:ln w="19050">
-              <a:solidFill>
-                <a:srgbClr val="C00000"/>
-              </a:solidFill>
-            </a:ln>
-          </p:spPr>
-          <p:txBody>
-            <a:bodyPr wrap="none" rtlCol="0">
-              <a:spAutoFit/>
-            </a:bodyPr>
-            <a:lstStyle/>
-            <a:p>
-              <a:pPr marL="0" marR="0" lvl="0" indent="0" algn="l" defTabSz="914400" rtl="0" eaLnBrk="1" fontAlgn="auto" latinLnBrk="0" hangingPunct="1">
-                <a:lnSpc>
-                  <a:spcPct val="100000"/>
-                </a:lnSpc>
-                <a:spcBef>
-                  <a:spcPts val="0"/>
-                </a:spcBef>
-                <a:spcAft>
-                  <a:spcPts val="0"/>
-                </a:spcAft>
-                <a:buClrTx/>
-                <a:buSzTx/>
-                <a:buFontTx/>
-                <a:buNone/>
-                <a:tabLst/>
-                <a:defRPr/>
-              </a:pPr>
-              <a:r>
-                <a:rPr kumimoji="0" lang="en-US" sz="1800" b="0" i="0" u="none" strike="noStrike" kern="1200" cap="none" spc="0" normalizeH="0" baseline="0" noProof="0" dirty="0">
-                  <a:ln>
-                    <a:noFill/>
-                  </a:ln>
-                  <a:solidFill>
-                    <a:prstClr val="black"/>
-                  </a:solidFill>
-                  <a:effectLst/>
-                  <a:uLnTx/>
-                  <a:uFillTx/>
-                  <a:ea typeface="+mn-ea"/>
-                  <a:cs typeface="+mn-cs"/>
-                </a:rPr>
-                <a:t>fragment</a:t>
-              </a:r>
-              <a:br>
-                <a:rPr kumimoji="0" lang="en-US" sz="1800" b="0" i="0" u="none" strike="noStrike" kern="1200" cap="none" spc="0" normalizeH="0" baseline="0" noProof="0" dirty="0">
-                  <a:ln>
-                    <a:noFill/>
-                  </a:ln>
-                  <a:solidFill>
-                    <a:prstClr val="black"/>
-                  </a:solidFill>
-                  <a:effectLst/>
-                  <a:uLnTx/>
-                  <a:uFillTx/>
-                  <a:ea typeface="+mn-ea"/>
-                  <a:cs typeface="+mn-cs"/>
-                </a:rPr>
-              </a:br>
-              <a:r>
-                <a:rPr kumimoji="0" lang="en-US" sz="1800" b="0" i="0" u="none" strike="noStrike" kern="1200" cap="none" spc="0" normalizeH="0" baseline="0" noProof="0" dirty="0">
-                  <a:ln>
-                    <a:noFill/>
-                  </a:ln>
-                  <a:solidFill>
-                    <a:prstClr val="black"/>
-                  </a:solidFill>
-                  <a:effectLst/>
-                  <a:uLnTx/>
-                  <a:uFillTx/>
-                  <a:ea typeface="+mn-ea"/>
-                  <a:cs typeface="+mn-cs"/>
-                </a:rPr>
-                <a:t>not shown</a:t>
-              </a:r>
-              <a:endParaRPr kumimoji="0" lang="nl-BE" sz="1800" b="0" i="0" u="none" strike="noStrike" kern="1200" cap="none" spc="0" normalizeH="0" baseline="0" noProof="0" dirty="0">
-                <a:ln>
-                  <a:noFill/>
-                </a:ln>
-                <a:solidFill>
-                  <a:prstClr val="black"/>
-                </a:solidFill>
-                <a:effectLst/>
-                <a:uLnTx/>
-                <a:uFillTx/>
-                <a:ea typeface="+mn-ea"/>
-                <a:cs typeface="+mn-cs"/>
-              </a:endParaRPr>
-            </a:p>
-          </p:txBody>
-        </p:sp>
-        <p:sp>
-          <p:nvSpPr>
-            <p:cNvPr id="11" name="Oval 10"/>
-            <p:cNvSpPr/>
-            <p:nvPr/>
-          </p:nvSpPr>
-          <p:spPr>
-            <a:xfrm>
-              <a:off x="1321249" y="3584213"/>
-              <a:ext cx="360041" cy="273516"/>
-            </a:xfrm>
-            <a:prstGeom prst="ellipse">
-              <a:avLst/>
-            </a:prstGeom>
-            <a:noFill/>
-            <a:ln>
-              <a:solidFill>
-                <a:srgbClr val="C00000"/>
-              </a:solidFill>
-            </a:ln>
-          </p:spPr>
-          <p:style>
-            <a:lnRef idx="2">
-              <a:schemeClr val="accent1">
-                <a:shade val="50000"/>
-              </a:schemeClr>
-            </a:lnRef>
-            <a:fillRef idx="1">
-              <a:schemeClr val="accent1"/>
-            </a:fillRef>
-            <a:effectRef idx="0">
-              <a:schemeClr val="accent1"/>
-            </a:effectRef>
-            <a:fontRef idx="minor">
-              <a:schemeClr val="lt1"/>
-            </a:fontRef>
-          </p:style>
-          <p:txBody>
-            <a:bodyPr rtlCol="0" anchor="ctr"/>
-            <a:lstStyle/>
-            <a:p>
-              <a:pPr marL="0" marR="0" lvl="0" indent="0" algn="ctr" defTabSz="914400" rtl="0" eaLnBrk="1" fontAlgn="auto" latinLnBrk="0" hangingPunct="1">
-                <a:lnSpc>
-                  <a:spcPct val="100000"/>
-                </a:lnSpc>
-                <a:spcBef>
-                  <a:spcPts val="0"/>
-                </a:spcBef>
-                <a:spcAft>
-                  <a:spcPts val="0"/>
-                </a:spcAft>
-                <a:buClrTx/>
-                <a:buSzTx/>
-                <a:buFontTx/>
-                <a:buNone/>
-                <a:tabLst/>
-                <a:defRPr/>
-              </a:pPr>
-              <a:endParaRPr kumimoji="0" lang="nl-BE" sz="1800" b="0" i="0" u="none" strike="noStrike" kern="1200" cap="none" spc="0" normalizeH="0" baseline="0" noProof="0">
-                <a:ln>
-                  <a:noFill/>
-                </a:ln>
-                <a:solidFill>
-                  <a:prstClr val="white"/>
-                </a:solidFill>
-                <a:effectLst/>
-                <a:uLnTx/>
-                <a:uFillTx/>
-                <a:latin typeface="Calibri" panose="020F0502020204030204"/>
-                <a:ea typeface="+mn-ea"/>
-                <a:cs typeface="+mn-cs"/>
-              </a:endParaRPr>
-            </a:p>
-          </p:txBody>
-        </p:sp>
-        <p:cxnSp>
-          <p:nvCxnSpPr>
-            <p:cNvPr id="12" name="Straight Arrow Connector 11"/>
-            <p:cNvCxnSpPr>
-              <a:stCxn id="10" idx="1"/>
-              <a:endCxn id="11" idx="6"/>
-            </p:cNvCxnSpPr>
-            <p:nvPr/>
-          </p:nvCxnSpPr>
-          <p:spPr>
-            <a:xfrm flipH="1" flipV="1">
-              <a:off x="1681290" y="3720971"/>
-              <a:ext cx="2026614" cy="2137601"/>
-            </a:xfrm>
-            <a:prstGeom prst="straightConnector1">
-              <a:avLst/>
-            </a:prstGeom>
-            <a:ln w="28575">
-              <a:solidFill>
-                <a:srgbClr val="C00000"/>
-              </a:solidFill>
-              <a:tailEnd type="stealth" w="lg" len="lg"/>
-            </a:ln>
-          </p:spPr>
-          <p:style>
-            <a:lnRef idx="1">
-              <a:schemeClr val="accent1"/>
-            </a:lnRef>
-            <a:fillRef idx="0">
-              <a:schemeClr val="accent1"/>
-            </a:fillRef>
-            <a:effectRef idx="0">
-              <a:schemeClr val="accent1"/>
-            </a:effectRef>
-            <a:fontRef idx="minor">
-              <a:schemeClr val="tx1"/>
-            </a:fontRef>
-          </p:style>
-        </p:cxnSp>
-      </p:grpSp>
-    </p:spTree>
-    <p:extLst>
-      <p:ext uri="{BB962C8B-B14F-4D97-AF65-F5344CB8AC3E}">
-        <p14:creationId xmlns:p14="http://schemas.microsoft.com/office/powerpoint/2010/main" val="1464286054"/>
-      </p:ext>
-    </p:extLst>
-  </p:cSld>
-  <p:clrMapOvr>
-    <a:masterClrMapping/>
-  </p:clrMapOvr>
-  <p:timing>
-    <p:tnLst>
-      <p:par>
-        <p:cTn id="1" dur="indefinite" restart="never" nodeType="tmRoot">
-          <p:childTnLst>
-            <p:seq concurrent="1" nextAc="seek">
-              <p:cTn id="2" dur="indefinite" nodeType="mainSeq">
-                <p:childTnLst>
-                  <p:par>
-                    <p:cTn id="3" fill="hold">
-                      <p:stCondLst>
-                        <p:cond delay="indefinite"/>
-                        <p:cond evt="onBegin" delay="0">
-                          <p:tn val="2"/>
-                        </p:cond>
-                      </p:stCondLst>
-                      <p:childTnLst>
-                        <p:par>
-                          <p:cTn id="4" fill="hold">
-                            <p:stCondLst>
-                              <p:cond delay="0"/>
-                            </p:stCondLst>
-                            <p:childTnLst>
-                              <p:par>
-                                <p:cTn id="5" presetID="1" presetClass="entr" presetSubtype="0" fill="hold" grpId="0" nodeType="withEffect">
-                                  <p:stCondLst>
-                                    <p:cond delay="0"/>
-                                  </p:stCondLst>
-                                  <p:childTnLst>
-                                    <p:set>
-                                      <p:cBhvr>
-                                        <p:cTn id="6" dur="1" fill="hold">
-                                          <p:stCondLst>
-                                            <p:cond delay="0"/>
-                                          </p:stCondLst>
-                                        </p:cTn>
-                                        <p:tgtEl>
-                                          <p:spTgt spid="3">
-                                            <p:txEl>
-                                              <p:pRg st="0" end="0"/>
-                                            </p:txEl>
-                                          </p:spTgt>
-                                        </p:tgtEl>
-                                        <p:attrNameLst>
-                                          <p:attrName>style.visibility</p:attrName>
-                                        </p:attrNameLst>
-                                      </p:cBhvr>
-                                      <p:to>
-                                        <p:strVal val="visible"/>
-                                      </p:to>
-                                    </p:set>
-                                  </p:childTnLst>
-                                </p:cTn>
-                              </p:par>
-                            </p:childTnLst>
-                          </p:cTn>
-                        </p:par>
-                      </p:childTnLst>
-                    </p:cTn>
-                  </p:par>
-                  <p:par>
-                    <p:cTn id="7" fill="hold">
-                      <p:stCondLst>
-                        <p:cond delay="indefinite"/>
-                      </p:stCondLst>
-                      <p:childTnLst>
-                        <p:par>
-                          <p:cTn id="8" fill="hold">
-                            <p:stCondLst>
-                              <p:cond delay="0"/>
-                            </p:stCondLst>
-                            <p:childTnLst>
-                              <p:par>
-                                <p:cTn id="9" presetID="1" presetClass="entr" presetSubtype="0" fill="hold" grpId="0" nodeType="clickEffect">
-                                  <p:stCondLst>
-                                    <p:cond delay="0"/>
-                                  </p:stCondLst>
-                                  <p:childTnLst>
-                                    <p:set>
-                                      <p:cBhvr>
-                                        <p:cTn id="10" dur="1" fill="hold">
-                                          <p:stCondLst>
-                                            <p:cond delay="0"/>
-                                          </p:stCondLst>
-                                        </p:cTn>
-                                        <p:tgtEl>
-                                          <p:spTgt spid="3">
-                                            <p:txEl>
-                                              <p:pRg st="1" end="1"/>
-                                            </p:txEl>
-                                          </p:spTgt>
-                                        </p:tgtEl>
-                                        <p:attrNameLst>
-                                          <p:attrName>style.visibility</p:attrName>
-                                        </p:attrNameLst>
-                                      </p:cBhvr>
-                                      <p:to>
-                                        <p:strVal val="visible"/>
-                                      </p:to>
-                                    </p:set>
-                                  </p:childTnLst>
-                                </p:cTn>
-                              </p:par>
-                              <p:par>
-                                <p:cTn id="11" presetID="1" presetClass="entr" presetSubtype="0" fill="hold" grpId="0" nodeType="withEffect">
-                                  <p:stCondLst>
-                                    <p:cond delay="0"/>
-                                  </p:stCondLst>
-                                  <p:childTnLst>
-                                    <p:set>
-                                      <p:cBhvr>
-                                        <p:cTn id="12" dur="1" fill="hold">
-                                          <p:stCondLst>
-                                            <p:cond delay="0"/>
-                                          </p:stCondLst>
-                                        </p:cTn>
-                                        <p:tgtEl>
-                                          <p:spTgt spid="5"/>
-                                        </p:tgtEl>
-                                        <p:attrNameLst>
-                                          <p:attrName>style.visibility</p:attrName>
-                                        </p:attrNameLst>
-                                      </p:cBhvr>
-                                      <p:to>
-                                        <p:strVal val="visible"/>
-                                      </p:to>
-                                    </p:set>
-                                  </p:childTnLst>
-                                </p:cTn>
-                              </p:par>
-                            </p:childTnLst>
-                          </p:cTn>
-                        </p:par>
-                      </p:childTnLst>
-                    </p:cTn>
-                  </p:par>
-                  <p:par>
-                    <p:cTn id="13" fill="hold">
-                      <p:stCondLst>
-                        <p:cond delay="indefinite"/>
-                      </p:stCondLst>
-                      <p:childTnLst>
-                        <p:par>
-                          <p:cTn id="14" fill="hold">
-                            <p:stCondLst>
-                              <p:cond delay="0"/>
-                            </p:stCondLst>
-                            <p:childTnLst>
-                              <p:par>
-                                <p:cTn id="15" presetID="1" presetClass="entr" presetSubtype="0" fill="hold" grpId="0" nodeType="clickEffect">
-                                  <p:stCondLst>
-                                    <p:cond delay="0"/>
-                                  </p:stCondLst>
-                                  <p:childTnLst>
-                                    <p:set>
-                                      <p:cBhvr>
-                                        <p:cTn id="16" dur="1" fill="hold">
-                                          <p:stCondLst>
-                                            <p:cond delay="0"/>
-                                          </p:stCondLst>
-                                        </p:cTn>
-                                        <p:tgtEl>
-                                          <p:spTgt spid="3">
-                                            <p:txEl>
-                                              <p:pRg st="4" end="4"/>
-                                            </p:txEl>
-                                          </p:spTgt>
-                                        </p:tgtEl>
-                                        <p:attrNameLst>
-                                          <p:attrName>style.visibility</p:attrName>
-                                        </p:attrNameLst>
-                                      </p:cBhvr>
-                                      <p:to>
-                                        <p:strVal val="visible"/>
-                                      </p:to>
-                                    </p:set>
-                                  </p:childTnLst>
-                                </p:cTn>
-                              </p:par>
-                              <p:par>
-                                <p:cTn id="17" presetID="1" presetClass="entr" presetSubtype="0" fill="hold" grpId="0" nodeType="withEffect">
-                                  <p:stCondLst>
-                                    <p:cond delay="0"/>
-                                  </p:stCondLst>
-                                  <p:childTnLst>
-                                    <p:set>
-                                      <p:cBhvr>
-                                        <p:cTn id="18" dur="1" fill="hold">
-                                          <p:stCondLst>
-                                            <p:cond delay="0"/>
-                                          </p:stCondLst>
-                                        </p:cTn>
-                                        <p:tgtEl>
-                                          <p:spTgt spid="6"/>
-                                        </p:tgtEl>
-                                        <p:attrNameLst>
-                                          <p:attrName>style.visibility</p:attrName>
-                                        </p:attrNameLst>
-                                      </p:cBhvr>
-                                      <p:to>
-                                        <p:strVal val="visible"/>
-                                      </p:to>
-                                    </p:set>
-                                  </p:childTnLst>
-                                </p:cTn>
-                              </p:par>
-                            </p:childTnLst>
-                          </p:cTn>
-                        </p:par>
-                      </p:childTnLst>
-                    </p:cTn>
-                  </p:par>
-                  <p:par>
-                    <p:cTn id="19" fill="hold">
-                      <p:stCondLst>
-                        <p:cond delay="indefinite"/>
-                      </p:stCondLst>
-                      <p:childTnLst>
-                        <p:par>
-                          <p:cTn id="20" fill="hold">
-                            <p:stCondLst>
-                              <p:cond delay="0"/>
-                            </p:stCondLst>
-                            <p:childTnLst>
-                              <p:par>
-                                <p:cTn id="21" presetID="1" presetClass="entr" presetSubtype="0" fill="hold" nodeType="clickEffect">
-                                  <p:stCondLst>
-                                    <p:cond delay="0"/>
-                                  </p:stCondLst>
-                                  <p:childTnLst>
-                                    <p:set>
-                                      <p:cBhvr>
-                                        <p:cTn id="22" dur="1" fill="hold">
-                                          <p:stCondLst>
-                                            <p:cond delay="0"/>
-                                          </p:stCondLst>
-                                        </p:cTn>
-                                        <p:tgtEl>
-                                          <p:spTgt spid="14"/>
-                                        </p:tgtEl>
-                                        <p:attrNameLst>
-                                          <p:attrName>style.visibility</p:attrName>
-                                        </p:attrNameLst>
-                                      </p:cBhvr>
-                                      <p:to>
-                                        <p:strVal val="visible"/>
-                                      </p:to>
-                                    </p:set>
-                                  </p:childTnLst>
-                                </p:cTn>
-                              </p:par>
-                            </p:childTnLst>
-                          </p:cTn>
-                        </p:par>
-                      </p:childTnLst>
-                    </p:cTn>
-                  </p:par>
-                </p:childTnLst>
-              </p:cTn>
-              <p:prevCondLst>
-                <p:cond evt="onPrev" delay="0">
-                  <p:tgtEl>
-                    <p:sldTgt/>
-                  </p:tgtEl>
-                </p:cond>
-              </p:prevCondLst>
-              <p:nextCondLst>
-                <p:cond evt="onNext" delay="0">
-                  <p:tgtEl>
-                    <p:sldTgt/>
-                  </p:tgtEl>
-                </p:cond>
-              </p:nextCondLst>
-            </p:seq>
-          </p:childTnLst>
-        </p:cTn>
-      </p:par>
-    </p:tnLst>
-    <p:bldLst>
-      <p:bldP spid="3" grpId="0" uiExpand="1" build="p"/>
-      <p:bldP spid="5" grpId="0" animBg="1"/>
-      <p:bldP spid="6" grpId="0" animBg="1"/>
-    </p:bldLst>
-  </p:timing>
-</p:sld>
-</file>
-
-<file path=ppt/slides/slide5.xml><?xml version="1.0" encoding="utf-8"?>
-<p:sld xmlns:a="http://schemas.openxmlformats.org/drawingml/2006/main" xmlns:r="http://schemas.openxmlformats.org/officeDocument/2006/relationships" xmlns:p="http://schemas.openxmlformats.org/presentationml/2006/main">
-  <p:cSld>
-    <p:spTree>
-      <p:nvGrpSpPr>
-        <p:cNvPr id="1" name=""/>
-        <p:cNvGrpSpPr/>
-        <p:nvPr/>
-      </p:nvGrpSpPr>
-      <p:grpSpPr>
-        <a:xfrm>
-          <a:off x="0" y="0"/>
-          <a:ext cx="0" cy="0"/>
-          <a:chOff x="0" y="0"/>
-          <a:chExt cx="0" cy="0"/>
-        </a:xfrm>
-      </p:grpSpPr>
-      <p:sp>
-        <p:nvSpPr>
-          <p:cNvPr id="2" name="Title 1"/>
-          <p:cNvSpPr>
-            <a:spLocks noGrp="1"/>
-          </p:cNvSpPr>
-          <p:nvPr>
-            <p:ph type="title"/>
-          </p:nvPr>
-        </p:nvSpPr>
-        <p:spPr/>
-        <p:txBody>
-          <a:bodyPr/>
-          <a:lstStyle/>
-          <a:p>
-            <a:r>
-              <a:rPr lang="en-US" dirty="0"/>
-              <a:t>Typographical conventions II</a:t>
+              <a:t>Typographical conventions</a:t>
             </a:r>
             <a:endParaRPr lang="nl-BE" dirty="0"/>
           </a:p>
@@ -26631,50 +25033,12 @@
         <p:spPr/>
         <p:txBody>
           <a:bodyPr>
-            <a:normAutofit fontScale="92500" lnSpcReduction="10000"/>
+            <a:normAutofit/>
           </a:bodyPr>
           <a:lstStyle/>
           <a:p>
             <a:r>
               <a:rPr lang="en-US" dirty="0"/>
-              <a:t>Shell commands are rendered as</a:t>
-            </a:r>
-          </a:p>
-          <a:p>
-            <a:endParaRPr lang="en-US" dirty="0"/>
-          </a:p>
-          <a:p>
-            <a:pPr lvl="1"/>
-            <a:r>
-              <a:rPr lang="en-US" dirty="0"/>
-              <a:t>Do </a:t>
-            </a:r>
-            <a:r>
-              <a:rPr lang="en-US" i="1" dirty="0"/>
-              <a:t>not</a:t>
-            </a:r>
-            <a:r>
-              <a:rPr lang="en-US" dirty="0"/>
-              <a:t> type </a:t>
-            </a:r>
-            <a:r>
-              <a:rPr lang="en-US" dirty="0">
-                <a:latin typeface="Courier New" pitchFamily="49" charset="0"/>
-                <a:cs typeface="Courier New" pitchFamily="49" charset="0"/>
-              </a:rPr>
-              <a:t>$</a:t>
-            </a:r>
-            <a:r>
-              <a:rPr lang="en-US" dirty="0"/>
-              <a:t>, it represents your shell prompt!</a:t>
-            </a:r>
-          </a:p>
-          <a:p>
-            <a:endParaRPr lang="en-US" dirty="0"/>
-          </a:p>
-          <a:p>
-            <a:r>
-              <a:rPr lang="en-US" dirty="0"/>
               <a:t>Good practice:</a:t>
             </a:r>
           </a:p>
@@ -26710,75 +25074,6 @@
           </a:p>
           <a:p>
             <a:endParaRPr lang="en-US" dirty="0"/>
-          </a:p>
-        </p:txBody>
-      </p:sp>
-      <p:sp>
-        <p:nvSpPr>
-          <p:cNvPr id="4" name="TextBox 3"/>
-          <p:cNvSpPr txBox="1"/>
-          <p:nvPr/>
-        </p:nvSpPr>
-        <p:spPr>
-          <a:xfrm>
-            <a:off x="2855641" y="2321241"/>
-            <a:ext cx="5423280" cy="369332"/>
-          </a:xfrm>
-          <a:prstGeom prst="rect">
-            <a:avLst/>
-          </a:prstGeom>
-          <a:solidFill>
-            <a:schemeClr val="tx1"/>
-          </a:solidFill>
-          <a:ln>
-            <a:solidFill>
-              <a:schemeClr val="tx1"/>
-            </a:solidFill>
-          </a:ln>
-        </p:spPr>
-        <p:txBody>
-          <a:bodyPr wrap="none" rtlCol="0">
-            <a:spAutoFit/>
-          </a:bodyPr>
-          <a:lstStyle/>
-          <a:p>
-            <a:r>
-              <a:rPr lang="en-US" b="1" dirty="0">
-                <a:solidFill>
-                  <a:schemeClr val="bg1"/>
-                </a:solidFill>
-                <a:latin typeface="Courier New" pitchFamily="49" charset="0"/>
-                <a:cs typeface="Courier New" pitchFamily="49" charset="0"/>
-              </a:rPr>
-              <a:t>$  python  –m </a:t>
-            </a:r>
-            <a:r>
-              <a:rPr lang="en-US" b="1" dirty="0" err="1">
-                <a:solidFill>
-                  <a:schemeClr val="bg1"/>
-                </a:solidFill>
-                <a:latin typeface="Courier New" pitchFamily="49" charset="0"/>
-                <a:cs typeface="Courier New" pitchFamily="49" charset="0"/>
-              </a:rPr>
-              <a:t>doctest</a:t>
-            </a:r>
-            <a:r>
-              <a:rPr lang="en-US" b="1" dirty="0">
-                <a:solidFill>
-                  <a:schemeClr val="bg1"/>
-                </a:solidFill>
-                <a:latin typeface="Courier New" pitchFamily="49" charset="0"/>
-                <a:cs typeface="Courier New" pitchFamily="49" charset="0"/>
-              </a:rPr>
-              <a:t>  data_parsing.py</a:t>
-            </a:r>
-            <a:endParaRPr lang="nl-BE" b="1" dirty="0">
-              <a:solidFill>
-                <a:schemeClr val="bg1"/>
-              </a:solidFill>
-              <a:latin typeface="Courier New" pitchFamily="49" charset="0"/>
-              <a:cs typeface="Courier New" pitchFamily="49" charset="0"/>
-            </a:endParaRPr>
           </a:p>
         </p:txBody>
       </p:sp>
@@ -26799,7 +25094,7 @@
           <a:p>
             <a:fld id="{BB52A05A-A776-4391-ACD7-D6BC34D3145C}" type="slidenum">
               <a:rPr lang="nl-BE" smtClean="0"/>
-              <a:t>5</a:t>
+              <a:t>4</a:t>
             </a:fld>
             <a:endParaRPr lang="nl-BE"/>
           </a:p>
@@ -26834,7 +25129,7 @@
         </p:blipFill>
         <p:spPr bwMode="auto">
           <a:xfrm>
-            <a:off x="4895792" y="4166971"/>
+            <a:off x="5566709" y="2848092"/>
             <a:ext cx="566151" cy="580908"/>
           </a:xfrm>
           <a:prstGeom prst="rect">
@@ -26881,7 +25176,7 @@
         </p:blipFill>
         <p:spPr bwMode="auto">
           <a:xfrm>
-            <a:off x="3979421" y="4559009"/>
+            <a:off x="4235303" y="3289451"/>
             <a:ext cx="724200" cy="724200"/>
           </a:xfrm>
           <a:prstGeom prst="rect">
@@ -26927,7 +25222,7 @@
         </p:blipFill>
         <p:spPr>
           <a:xfrm>
-            <a:off x="2531605" y="5528891"/>
+            <a:off x="2687197" y="4365888"/>
             <a:ext cx="648072" cy="648072"/>
           </a:xfrm>
           <a:prstGeom prst="rect">
@@ -26963,7 +25258,7 @@
         </p:blipFill>
         <p:spPr>
           <a:xfrm>
-            <a:off x="3502806" y="3268361"/>
+            <a:off x="3660247" y="1646238"/>
             <a:ext cx="724200" cy="724200"/>
           </a:xfrm>
           <a:prstGeom prst="rect">
@@ -26999,7 +25294,7 @@
         </p:blipFill>
         <p:spPr>
           <a:xfrm>
-            <a:off x="3502805" y="3834809"/>
+            <a:off x="3660246" y="2305252"/>
             <a:ext cx="724201" cy="724201"/>
           </a:xfrm>
           <a:prstGeom prst="rect">
@@ -27035,7 +25330,7 @@
         </p:blipFill>
         <p:spPr>
           <a:xfrm>
-            <a:off x="4058446" y="5136797"/>
+            <a:off x="4235303" y="3951218"/>
             <a:ext cx="566151" cy="566151"/>
           </a:xfrm>
           <a:prstGeom prst="rect">
@@ -27108,7 +25403,7 @@
                                 </p:cTn>
                               </p:par>
                               <p:par>
-                                <p:cTn id="7" presetID="1" presetClass="entr" presetSubtype="0" fill="hold" grpId="0" nodeType="withEffect">
+                                <p:cTn id="7" presetID="1" presetClass="entr" presetSubtype="0" fill="hold" nodeType="withEffect">
                                   <p:stCondLst>
                                     <p:cond delay="0"/>
                                   </p:stCondLst>
@@ -27116,113 +25411,6 @@
                                     <p:set>
                                       <p:cBhvr>
                                         <p:cTn id="8" dur="1" fill="hold">
-                                          <p:stCondLst>
-                                            <p:cond delay="0"/>
-                                          </p:stCondLst>
-                                        </p:cTn>
-                                        <p:tgtEl>
-                                          <p:spTgt spid="4"/>
-                                        </p:tgtEl>
-                                        <p:attrNameLst>
-                                          <p:attrName>style.visibility</p:attrName>
-                                        </p:attrNameLst>
-                                      </p:cBhvr>
-                                      <p:to>
-                                        <p:strVal val="visible"/>
-                                      </p:to>
-                                    </p:set>
-                                  </p:childTnLst>
-                                </p:cTn>
-                              </p:par>
-                              <p:par>
-                                <p:cTn id="9" presetID="1" presetClass="entr" presetSubtype="0" fill="hold" grpId="0" nodeType="withEffect">
-                                  <p:stCondLst>
-                                    <p:cond delay="0"/>
-                                  </p:stCondLst>
-                                  <p:childTnLst>
-                                    <p:set>
-                                      <p:cBhvr>
-                                        <p:cTn id="10" dur="1" fill="hold">
-                                          <p:stCondLst>
-                                            <p:cond delay="0"/>
-                                          </p:stCondLst>
-                                        </p:cTn>
-                                        <p:tgtEl>
-                                          <p:spTgt spid="3">
-                                            <p:txEl>
-                                              <p:pRg st="2" end="2"/>
-                                            </p:txEl>
-                                          </p:spTgt>
-                                        </p:tgtEl>
-                                        <p:attrNameLst>
-                                          <p:attrName>style.visibility</p:attrName>
-                                        </p:attrNameLst>
-                                      </p:cBhvr>
-                                      <p:to>
-                                        <p:strVal val="visible"/>
-                                      </p:to>
-                                    </p:set>
-                                  </p:childTnLst>
-                                </p:cTn>
-                              </p:par>
-                            </p:childTnLst>
-                          </p:cTn>
-                        </p:par>
-                      </p:childTnLst>
-                    </p:cTn>
-                  </p:par>
-                  <p:par>
-                    <p:cTn id="11" fill="hold">
-                      <p:stCondLst>
-                        <p:cond delay="indefinite"/>
-                      </p:stCondLst>
-                      <p:childTnLst>
-                        <p:par>
-                          <p:cTn id="12" fill="hold">
-                            <p:stCondLst>
-                              <p:cond delay="0"/>
-                            </p:stCondLst>
-                            <p:childTnLst>
-                              <p:par>
-                                <p:cTn id="13" presetID="1" presetClass="entr" presetSubtype="0" fill="hold" grpId="0" nodeType="clickEffect">
-                                  <p:stCondLst>
-                                    <p:cond delay="0"/>
-                                  </p:stCondLst>
-                                  <p:childTnLst>
-                                    <p:set>
-                                      <p:cBhvr>
-                                        <p:cTn id="14" dur="1" fill="hold">
-                                          <p:stCondLst>
-                                            <p:cond delay="0"/>
-                                          </p:stCondLst>
-                                        </p:cTn>
-                                        <p:tgtEl>
-                                          <p:spTgt spid="3">
-                                            <p:txEl>
-                                              <p:pRg st="4" end="4"/>
-                                            </p:txEl>
-                                          </p:spTgt>
-                                        </p:tgtEl>
-                                        <p:attrNameLst>
-                                          <p:attrName>style.visibility</p:attrName>
-                                        </p:attrNameLst>
-                                      </p:cBhvr>
-                                      <p:to>
-                                        <p:strVal val="visible"/>
-                                      </p:to>
-                                    </p:set>
-                                  </p:childTnLst>
-                                </p:cTn>
-                              </p:par>
-                              <p:par>
-                                <p:cTn id="15" presetID="1" presetClass="entr" presetSubtype="0" fill="hold" nodeType="withEffect">
-                                  <p:stCondLst>
-                                    <p:cond delay="0"/>
-                                  </p:stCondLst>
-                                  <p:childTnLst>
-                                    <p:set>
-                                      <p:cBhvr>
-                                        <p:cTn id="16" dur="1" fill="hold">
                                           <p:stCondLst>
                                             <p:cond delay="0"/>
                                           </p:stCondLst>
@@ -27248,26 +25436,26 @@
                     </p:cTn>
                   </p:par>
                   <p:par>
-                    <p:cTn id="17" fill="hold">
+                    <p:cTn id="9" fill="hold">
                       <p:stCondLst>
                         <p:cond delay="indefinite"/>
                       </p:stCondLst>
                       <p:childTnLst>
                         <p:par>
-                          <p:cTn id="18" fill="hold">
+                          <p:cTn id="10" fill="hold">
                             <p:stCondLst>
                               <p:cond delay="0"/>
                             </p:stCondLst>
                             <p:childTnLst>
                               <p:par>
-                                <p:cTn id="19" presetID="1" presetClass="entr" presetSubtype="0" fill="hold" grpId="0" nodeType="clickEffect">
+                                <p:cTn id="11" presetID="1" presetClass="entr" presetSubtype="0" fill="hold" grpId="0" nodeType="clickEffect">
                                   <p:stCondLst>
                                     <p:cond delay="0"/>
                                   </p:stCondLst>
                                   <p:childTnLst>
                                     <p:set>
                                       <p:cBhvr>
-                                        <p:cTn id="20" dur="1" fill="hold">
+                                        <p:cTn id="12" dur="1" fill="hold">
                                           <p:stCondLst>
                                             <p:cond delay="0"/>
                                           </p:stCondLst>
@@ -27275,7 +25463,7 @@
                                         <p:tgtEl>
                                           <p:spTgt spid="3">
                                             <p:txEl>
-                                              <p:pRg st="5" end="5"/>
+                                              <p:pRg st="1" end="1"/>
                                             </p:txEl>
                                           </p:spTgt>
                                         </p:tgtEl>
@@ -27291,14 +25479,14 @@
                                 </p:cTn>
                               </p:par>
                               <p:par>
-                                <p:cTn id="21" presetID="1" presetClass="entr" presetSubtype="0" fill="hold" nodeType="withEffect">
+                                <p:cTn id="13" presetID="1" presetClass="entr" presetSubtype="0" fill="hold" nodeType="withEffect">
                                   <p:stCondLst>
                                     <p:cond delay="0"/>
                                   </p:stCondLst>
                                   <p:childTnLst>
                                     <p:set>
                                       <p:cBhvr>
-                                        <p:cTn id="22" dur="1" fill="hold">
+                                        <p:cTn id="14" dur="1" fill="hold">
                                           <p:stCondLst>
                                             <p:cond delay="0"/>
                                           </p:stCondLst>
@@ -27324,26 +25512,26 @@
                     </p:cTn>
                   </p:par>
                   <p:par>
-                    <p:cTn id="23" fill="hold">
+                    <p:cTn id="15" fill="hold">
                       <p:stCondLst>
                         <p:cond delay="indefinite"/>
                       </p:stCondLst>
                       <p:childTnLst>
                         <p:par>
-                          <p:cTn id="24" fill="hold">
+                          <p:cTn id="16" fill="hold">
                             <p:stCondLst>
                               <p:cond delay="0"/>
                             </p:stCondLst>
                             <p:childTnLst>
                               <p:par>
-                                <p:cTn id="25" presetID="1" presetClass="entr" presetSubtype="0" fill="hold" grpId="0" nodeType="clickEffect">
+                                <p:cTn id="17" presetID="1" presetClass="entr" presetSubtype="0" fill="hold" grpId="0" nodeType="clickEffect">
                                   <p:stCondLst>
                                     <p:cond delay="0"/>
                                   </p:stCondLst>
                                   <p:childTnLst>
                                     <p:set>
                                       <p:cBhvr>
-                                        <p:cTn id="26" dur="1" fill="hold">
+                                        <p:cTn id="18" dur="1" fill="hold">
                                           <p:stCondLst>
                                             <p:cond delay="0"/>
                                           </p:stCondLst>
@@ -27351,7 +25539,7 @@
                                         <p:tgtEl>
                                           <p:spTgt spid="3">
                                             <p:txEl>
-                                              <p:pRg st="6" end="6"/>
+                                              <p:pRg st="2" end="2"/>
                                             </p:txEl>
                                           </p:spTgt>
                                         </p:tgtEl>
@@ -27367,14 +25555,14 @@
                                 </p:cTn>
                               </p:par>
                               <p:par>
-                                <p:cTn id="27" presetID="1" presetClass="entr" presetSubtype="0" fill="hold" nodeType="withEffect">
+                                <p:cTn id="19" presetID="1" presetClass="entr" presetSubtype="0" fill="hold" nodeType="withEffect">
                                   <p:stCondLst>
                                     <p:cond delay="0"/>
                                   </p:stCondLst>
                                   <p:childTnLst>
                                     <p:set>
                                       <p:cBhvr>
-                                        <p:cTn id="28" dur="1" fill="hold">
+                                        <p:cTn id="20" dur="1" fill="hold">
                                           <p:stCondLst>
                                             <p:cond delay="0"/>
                                           </p:stCondLst>
@@ -27400,19 +25588,126 @@
                     </p:cTn>
                   </p:par>
                   <p:par>
-                    <p:cTn id="29" fill="hold">
+                    <p:cTn id="21" fill="hold">
                       <p:stCondLst>
                         <p:cond delay="indefinite"/>
                       </p:stCondLst>
                       <p:childTnLst>
                         <p:par>
-                          <p:cTn id="30" fill="hold">
+                          <p:cTn id="22" fill="hold">
                             <p:stCondLst>
                               <p:cond delay="0"/>
                             </p:stCondLst>
                             <p:childTnLst>
                               <p:par>
-                                <p:cTn id="31" presetID="1" presetClass="entr" presetSubtype="0" fill="hold" grpId="0" nodeType="clickEffect">
+                                <p:cTn id="23" presetID="1" presetClass="entr" presetSubtype="0" fill="hold" grpId="0" nodeType="clickEffect">
+                                  <p:stCondLst>
+                                    <p:cond delay="0"/>
+                                  </p:stCondLst>
+                                  <p:childTnLst>
+                                    <p:set>
+                                      <p:cBhvr>
+                                        <p:cTn id="24" dur="1" fill="hold">
+                                          <p:stCondLst>
+                                            <p:cond delay="0"/>
+                                          </p:stCondLst>
+                                        </p:cTn>
+                                        <p:tgtEl>
+                                          <p:spTgt spid="3">
+                                            <p:txEl>
+                                              <p:pRg st="3" end="3"/>
+                                            </p:txEl>
+                                          </p:spTgt>
+                                        </p:tgtEl>
+                                        <p:attrNameLst>
+                                          <p:attrName>style.visibility</p:attrName>
+                                        </p:attrNameLst>
+                                      </p:cBhvr>
+                                      <p:to>
+                                        <p:strVal val="visible"/>
+                                      </p:to>
+                                    </p:set>
+                                  </p:childTnLst>
+                                </p:cTn>
+                              </p:par>
+                            </p:childTnLst>
+                          </p:cTn>
+                        </p:par>
+                      </p:childTnLst>
+                    </p:cTn>
+                  </p:par>
+                  <p:par>
+                    <p:cTn id="25" fill="hold">
+                      <p:stCondLst>
+                        <p:cond delay="indefinite"/>
+                      </p:stCondLst>
+                      <p:childTnLst>
+                        <p:par>
+                          <p:cTn id="26" fill="hold">
+                            <p:stCondLst>
+                              <p:cond delay="0"/>
+                            </p:stCondLst>
+                            <p:childTnLst>
+                              <p:par>
+                                <p:cTn id="27" presetID="1" presetClass="entr" presetSubtype="0" fill="hold" nodeType="clickEffect">
+                                  <p:stCondLst>
+                                    <p:cond delay="0"/>
+                                  </p:stCondLst>
+                                  <p:childTnLst>
+                                    <p:set>
+                                      <p:cBhvr>
+                                        <p:cTn id="28" dur="1" fill="hold">
+                                          <p:stCondLst>
+                                            <p:cond delay="0"/>
+                                          </p:stCondLst>
+                                        </p:cTn>
+                                        <p:tgtEl>
+                                          <p:spTgt spid="8"/>
+                                        </p:tgtEl>
+                                        <p:attrNameLst>
+                                          <p:attrName>style.visibility</p:attrName>
+                                        </p:attrNameLst>
+                                      </p:cBhvr>
+                                      <p:to>
+                                        <p:strVal val="visible"/>
+                                      </p:to>
+                                    </p:set>
+                                  </p:childTnLst>
+                                </p:cTn>
+                              </p:par>
+                              <p:par>
+                                <p:cTn id="29" presetID="1" presetClass="entr" presetSubtype="0" fill="hold" grpId="0" nodeType="withEffect">
+                                  <p:stCondLst>
+                                    <p:cond delay="0"/>
+                                  </p:stCondLst>
+                                  <p:childTnLst>
+                                    <p:set>
+                                      <p:cBhvr>
+                                        <p:cTn id="30" dur="1" fill="hold">
+                                          <p:stCondLst>
+                                            <p:cond delay="0"/>
+                                          </p:stCondLst>
+                                        </p:cTn>
+                                        <p:tgtEl>
+                                          <p:spTgt spid="3">
+                                            <p:txEl>
+                                              <p:pRg st="4" end="4"/>
+                                            </p:txEl>
+                                          </p:spTgt>
+                                        </p:tgtEl>
+                                        <p:attrNameLst>
+                                          <p:attrName>style.visibility</p:attrName>
+                                        </p:attrNameLst>
+                                      </p:cBhvr>
+                                      <p:to>
+                                        <p:strVal val="visible"/>
+                                      </p:to>
+                                    </p:set>
+                                  </p:childTnLst>
+                                </p:cTn>
+                              </p:par>
+                              <p:par>
+                                <p:cTn id="31" presetID="1" presetClass="entr" presetSubtype="0" fill="hold" nodeType="withEffect">
                                   <p:stCondLst>
                                     <p:cond delay="0"/>
                                   </p:stCondLst>
@@ -27425,11 +25720,7 @@
                                           </p:stCondLst>
                                         </p:cTn>
                                         <p:tgtEl>
-                                          <p:spTgt spid="3">
-                                            <p:txEl>
-                                              <p:pRg st="7" end="7"/>
-                                            </p:txEl>
-                                          </p:spTgt>
+                                          <p:spTgt spid="10"/>
                                         </p:tgtEl>
                                         <p:attrNameLst>
                                           <p:attrName>style.visibility</p:attrName>
@@ -27461,7 +25752,7 @@
                             </p:stCondLst>
                             <p:childTnLst>
                               <p:par>
-                                <p:cTn id="35" presetID="1" presetClass="entr" presetSubtype="0" fill="hold" nodeType="clickEffect">
+                                <p:cTn id="35" presetID="1" presetClass="entr" presetSubtype="0" fill="hold" grpId="0" nodeType="clickEffect">
                                   <p:stCondLst>
                                     <p:cond delay="0"/>
                                   </p:stCondLst>
@@ -27474,36 +25765,9 @@
                                           </p:stCondLst>
                                         </p:cTn>
                                         <p:tgtEl>
-                                          <p:spTgt spid="8"/>
-                                        </p:tgtEl>
-                                        <p:attrNameLst>
-                                          <p:attrName>style.visibility</p:attrName>
-                                        </p:attrNameLst>
-                                      </p:cBhvr>
-                                      <p:to>
-                                        <p:strVal val="visible"/>
-                                      </p:to>
-                                    </p:set>
-                                  </p:childTnLst>
-                                </p:cTn>
-                              </p:par>
-                              <p:par>
-                                <p:cTn id="37" presetID="1" presetClass="entr" presetSubtype="0" fill="hold" grpId="0" nodeType="withEffect">
-                                  <p:stCondLst>
-                                    <p:cond delay="0"/>
-                                  </p:stCondLst>
-                                  <p:childTnLst>
-                                    <p:set>
-                                      <p:cBhvr>
-                                        <p:cTn id="38" dur="1" fill="hold">
-                                          <p:stCondLst>
-                                            <p:cond delay="0"/>
-                                          </p:stCondLst>
-                                        </p:cTn>
-                                        <p:tgtEl>
                                           <p:spTgt spid="3">
                                             <p:txEl>
-                                              <p:pRg st="8" end="8"/>
+                                              <p:pRg st="5" end="5"/>
                                             </p:txEl>
                                           </p:spTgt>
                                         </p:tgtEl>
@@ -27519,90 +25783,14 @@
                                 </p:cTn>
                               </p:par>
                               <p:par>
-                                <p:cTn id="39" presetID="1" presetClass="entr" presetSubtype="0" fill="hold" nodeType="withEffect">
+                                <p:cTn id="37" presetID="1" presetClass="entr" presetSubtype="0" fill="hold" nodeType="withEffect">
                                   <p:stCondLst>
                                     <p:cond delay="0"/>
                                   </p:stCondLst>
                                   <p:childTnLst>
                                     <p:set>
                                       <p:cBhvr>
-                                        <p:cTn id="40" dur="1" fill="hold">
-                                          <p:stCondLst>
-                                            <p:cond delay="0"/>
-                                          </p:stCondLst>
-                                        </p:cTn>
-                                        <p:tgtEl>
-                                          <p:spTgt spid="10"/>
-                                        </p:tgtEl>
-                                        <p:attrNameLst>
-                                          <p:attrName>style.visibility</p:attrName>
-                                        </p:attrNameLst>
-                                      </p:cBhvr>
-                                      <p:to>
-                                        <p:strVal val="visible"/>
-                                      </p:to>
-                                    </p:set>
-                                  </p:childTnLst>
-                                </p:cTn>
-                              </p:par>
-                            </p:childTnLst>
-                          </p:cTn>
-                        </p:par>
-                      </p:childTnLst>
-                    </p:cTn>
-                  </p:par>
-                  <p:par>
-                    <p:cTn id="41" fill="hold">
-                      <p:stCondLst>
-                        <p:cond delay="indefinite"/>
-                      </p:stCondLst>
-                      <p:childTnLst>
-                        <p:par>
-                          <p:cTn id="42" fill="hold">
-                            <p:stCondLst>
-                              <p:cond delay="0"/>
-                            </p:stCondLst>
-                            <p:childTnLst>
-                              <p:par>
-                                <p:cTn id="43" presetID="1" presetClass="entr" presetSubtype="0" fill="hold" grpId="0" nodeType="clickEffect">
-                                  <p:stCondLst>
-                                    <p:cond delay="0"/>
-                                  </p:stCondLst>
-                                  <p:childTnLst>
-                                    <p:set>
-                                      <p:cBhvr>
-                                        <p:cTn id="44" dur="1" fill="hold">
-                                          <p:stCondLst>
-                                            <p:cond delay="0"/>
-                                          </p:stCondLst>
-                                        </p:cTn>
-                                        <p:tgtEl>
-                                          <p:spTgt spid="3">
-                                            <p:txEl>
-                                              <p:pRg st="9" end="9"/>
-                                            </p:txEl>
-                                          </p:spTgt>
-                                        </p:tgtEl>
-                                        <p:attrNameLst>
-                                          <p:attrName>style.visibility</p:attrName>
-                                        </p:attrNameLst>
-                                      </p:cBhvr>
-                                      <p:to>
-                                        <p:strVal val="visible"/>
-                                      </p:to>
-                                    </p:set>
-                                  </p:childTnLst>
-                                </p:cTn>
-                              </p:par>
-                              <p:par>
-                                <p:cTn id="45" presetID="1" presetClass="entr" presetSubtype="0" fill="hold" nodeType="withEffect">
-                                  <p:stCondLst>
-                                    <p:cond delay="0"/>
-                                  </p:stCondLst>
-                                  <p:childTnLst>
-                                    <p:set>
-                                      <p:cBhvr>
-                                        <p:cTn id="46" dur="1" fill="hold">
+                                        <p:cTn id="38" dur="1" fill="hold">
                                           <p:stCondLst>
                                             <p:cond delay="0"/>
                                           </p:stCondLst>
@@ -27650,13 +25838,12 @@
     </p:tnLst>
     <p:bldLst>
       <p:bldP spid="3" grpId="0" uiExpand="1" build="p"/>
-      <p:bldP spid="4" grpId="0" animBg="1"/>
     </p:bldLst>
   </p:timing>
 </p:sld>
 </file>
 
-<file path=ppt/slides/slide6.xml><?xml version="1.0" encoding="utf-8"?>
+<file path=ppt/slides/slide5.xml><?xml version="1.0" encoding="utf-8"?>
 <p:sld xmlns:a="http://schemas.openxmlformats.org/drawingml/2006/main" xmlns:r="http://schemas.openxmlformats.org/officeDocument/2006/relationships" xmlns:p="http://schemas.openxmlformats.org/presentationml/2006/main">
   <p:cSld>
     <p:spTree>
@@ -27750,7 +25937,7 @@
           <a:p>
             <a:fld id="{9C7CE217-4467-4B8D-A735-B008FA7C4816}" type="slidenum">
               <a:rPr lang="LID4096" smtClean="0"/>
-              <a:t>6</a:t>
+              <a:t>5</a:t>
             </a:fld>
             <a:endParaRPr lang="LID4096"/>
           </a:p>
@@ -27769,7 +25956,7 @@
 </p:sld>
 </file>
 
-<file path=ppt/slides/slide7.xml><?xml version="1.0" encoding="utf-8"?>
+<file path=ppt/slides/slide6.xml><?xml version="1.0" encoding="utf-8"?>
 <p:sld xmlns:a="http://schemas.openxmlformats.org/drawingml/2006/main" xmlns:r="http://schemas.openxmlformats.org/officeDocument/2006/relationships" xmlns:p="http://schemas.openxmlformats.org/presentationml/2006/main">
   <p:cSld>
     <p:spTree>
@@ -27919,7 +26106,7 @@
           <a:p>
             <a:fld id="{9C7CE217-4467-4B8D-A735-B008FA7C4816}" type="slidenum">
               <a:rPr lang="LID4096" smtClean="0"/>
-              <a:t>7</a:t>
+              <a:t>6</a:t>
             </a:fld>
             <a:endParaRPr lang="LID4096"/>
           </a:p>
@@ -28614,7 +26801,7 @@
 </p:sld>
 </file>
 
-<file path=ppt/slides/slide8.xml><?xml version="1.0" encoding="utf-8"?>
+<file path=ppt/slides/slide7.xml><?xml version="1.0" encoding="utf-8"?>
 <p:sld xmlns:a="http://schemas.openxmlformats.org/drawingml/2006/main" xmlns:r="http://schemas.openxmlformats.org/officeDocument/2006/relationships" xmlns:p="http://schemas.openxmlformats.org/presentationml/2006/main">
   <p:cSld>
     <p:spTree>
@@ -28683,7 +26870,7 @@
           <a:p>
             <a:fld id="{9C7CE217-4467-4B8D-A735-B008FA7C4816}" type="slidenum">
               <a:rPr lang="LID4096" smtClean="0"/>
-              <a:t>8</a:t>
+              <a:t>7</a:t>
             </a:fld>
             <a:endParaRPr lang="LID4096"/>
           </a:p>
@@ -30749,7 +28936,7 @@
 </p:sld>
 </file>
 
-<file path=ppt/slides/slide9.xml><?xml version="1.0" encoding="utf-8"?>
+<file path=ppt/slides/slide8.xml><?xml version="1.0" encoding="utf-8"?>
 <p:sld xmlns:a="http://schemas.openxmlformats.org/drawingml/2006/main" xmlns:r="http://schemas.openxmlformats.org/officeDocument/2006/relationships" xmlns:p="http://schemas.openxmlformats.org/presentationml/2006/main">
   <p:cSld>
     <p:spTree>
@@ -30873,7 +29060,7 @@
           <a:p>
             <a:fld id="{9C7CE217-4467-4B8D-A735-B008FA7C4816}" type="slidenum">
               <a:rPr lang="LID4096" smtClean="0"/>
-              <a:t>9</a:t>
+              <a:t>8</a:t>
             </a:fld>
             <a:endParaRPr lang="LID4096"/>
           </a:p>
@@ -31227,6 +29414,275 @@
       <p:bldP spid="5" grpId="0" animBg="1"/>
     </p:bldLst>
   </p:timing>
+</p:sld>
+</file>
+
+<file path=ppt/slides/slide9.xml><?xml version="1.0" encoding="utf-8"?>
+<p:sld xmlns:a="http://schemas.openxmlformats.org/drawingml/2006/main" xmlns:r="http://schemas.openxmlformats.org/officeDocument/2006/relationships" xmlns:p="http://schemas.openxmlformats.org/presentationml/2006/main">
+  <p:cSld>
+    <p:bg>
+      <p:bgPr>
+        <a:solidFill>
+          <a:srgbClr val="000000"/>
+        </a:solidFill>
+        <a:effectLst/>
+      </p:bgPr>
+    </p:bg>
+    <p:spTree>
+      <p:nvGrpSpPr>
+        <p:cNvPr id="1" name=""/>
+        <p:cNvGrpSpPr/>
+        <p:nvPr/>
+      </p:nvGrpSpPr>
+      <p:grpSpPr>
+        <a:xfrm>
+          <a:off x="0" y="0"/>
+          <a:ext cx="0" cy="0"/>
+          <a:chOff x="0" y="0"/>
+          <a:chExt cx="0" cy="0"/>
+        </a:xfrm>
+      </p:grpSpPr>
+      <p:sp>
+        <p:nvSpPr>
+          <p:cNvPr id="12" name="Rectangle 11">
+            <a:extLst>
+              <a:ext uri="{FF2B5EF4-FFF2-40B4-BE49-F238E27FC236}">
+                <a16:creationId xmlns:a16="http://schemas.microsoft.com/office/drawing/2014/main" id="{71B2258F-86CA-4D4D-8270-BC05FCDEBFB3}"/>
+              </a:ext>
+              <a:ext uri="{C183D7F6-B498-43B3-948B-1728B52AA6E4}">
+                <adec:decorative xmlns:adec="http://schemas.microsoft.com/office/drawing/2017/decorative" val="1"/>
+              </a:ext>
+            </a:extLst>
+          </p:cNvPr>
+          <p:cNvSpPr>
+            <a:spLocks noGrp="1" noRot="1" noChangeAspect="1" noMove="1" noResize="1" noEditPoints="1" noAdjustHandles="1" noChangeArrowheads="1" noChangeShapeType="1" noTextEdit="1"/>
+          </p:cNvSpPr>
+          <p:nvPr>
+            <p:extLst>
+              <p:ext uri="{386F3935-93C4-4BCD-93E2-E3B085C9AB24}">
+                <p16:designElem xmlns:p16="http://schemas.microsoft.com/office/powerpoint/2015/main" val="1"/>
+              </p:ext>
+            </p:extLst>
+          </p:nvPr>
+        </p:nvSpPr>
+        <p:spPr>
+          <a:xfrm>
+            <a:off x="0" y="0"/>
+            <a:ext cx="12192000" cy="6857999"/>
+          </a:xfrm>
+          <a:prstGeom prst="rect">
+            <a:avLst/>
+          </a:prstGeom>
+          <a:solidFill>
+            <a:srgbClr val="000000"/>
+          </a:solidFill>
+          <a:ln>
+            <a:noFill/>
+          </a:ln>
+        </p:spPr>
+        <p:style>
+          <a:lnRef idx="2">
+            <a:schemeClr val="accent1">
+              <a:shade val="50000"/>
+            </a:schemeClr>
+          </a:lnRef>
+          <a:fillRef idx="1">
+            <a:schemeClr val="accent1"/>
+          </a:fillRef>
+          <a:effectRef idx="0">
+            <a:schemeClr val="accent1"/>
+          </a:effectRef>
+          <a:fontRef idx="minor">
+            <a:schemeClr val="lt1"/>
+          </a:fontRef>
+        </p:style>
+        <p:txBody>
+          <a:bodyPr rtlCol="0" anchor="ctr"/>
+          <a:lstStyle/>
+          <a:p>
+            <a:pPr algn="ctr"/>
+            <a:endParaRPr lang="en-US"/>
+          </a:p>
+        </p:txBody>
+      </p:sp>
+      <p:pic>
+        <p:nvPicPr>
+          <p:cNvPr id="8" name="Picture 7" descr="Electronic circuit board">
+            <a:extLst>
+              <a:ext uri="{FF2B5EF4-FFF2-40B4-BE49-F238E27FC236}">
+                <a16:creationId xmlns:a16="http://schemas.microsoft.com/office/drawing/2014/main" id="{C29C3DE4-E022-9448-D014-F63D95702C3F}"/>
+              </a:ext>
+            </a:extLst>
+          </p:cNvPr>
+          <p:cNvPicPr>
+            <a:picLocks noChangeAspect="1"/>
+          </p:cNvPicPr>
+          <p:nvPr/>
+        </p:nvPicPr>
+        <p:blipFill>
+          <a:blip r:embed="rId2">
+            <a:alphaModFix amt="50000"/>
+          </a:blip>
+          <a:srcRect t="15730"/>
+          <a:stretch>
+            <a:fillRect/>
+          </a:stretch>
+        </p:blipFill>
+        <p:spPr>
+          <a:xfrm>
+            <a:off x="20" y="1"/>
+            <a:ext cx="12191980" cy="6857999"/>
+          </a:xfrm>
+          <a:prstGeom prst="rect">
+            <a:avLst/>
+          </a:prstGeom>
+        </p:spPr>
+      </p:pic>
+      <p:sp>
+        <p:nvSpPr>
+          <p:cNvPr id="5" name="Title 4">
+            <a:extLst>
+              <a:ext uri="{FF2B5EF4-FFF2-40B4-BE49-F238E27FC236}">
+                <a16:creationId xmlns:a16="http://schemas.microsoft.com/office/drawing/2014/main" id="{714CFB5C-EB10-4A02-3BD2-60706DC9D339}"/>
+              </a:ext>
+            </a:extLst>
+          </p:cNvPr>
+          <p:cNvSpPr>
+            <a:spLocks noGrp="1"/>
+          </p:cNvSpPr>
+          <p:nvPr>
+            <p:ph type="title"/>
+          </p:nvPr>
+        </p:nvSpPr>
+        <p:spPr>
+          <a:xfrm>
+            <a:off x="1524000" y="1122362"/>
+            <a:ext cx="9144000" cy="2900518"/>
+          </a:xfrm>
+        </p:spPr>
+        <p:txBody>
+          <a:bodyPr vert="horz" lIns="91440" tIns="45720" rIns="91440" bIns="45720" rtlCol="0" anchor="b">
+            <a:normAutofit/>
+          </a:bodyPr>
+          <a:lstStyle/>
+          <a:p>
+            <a:pPr algn="ctr"/>
+            <a:r>
+              <a:rPr lang="en-US" dirty="0">
+                <a:solidFill>
+                  <a:srgbClr val="FFFFFF"/>
+                </a:solidFill>
+              </a:rPr>
+              <a:t>GPU hardware</a:t>
+            </a:r>
+          </a:p>
+        </p:txBody>
+      </p:sp>
+      <p:sp>
+        <p:nvSpPr>
+          <p:cNvPr id="6" name="Text Placeholder 5">
+            <a:extLst>
+              <a:ext uri="{FF2B5EF4-FFF2-40B4-BE49-F238E27FC236}">
+                <a16:creationId xmlns:a16="http://schemas.microsoft.com/office/drawing/2014/main" id="{A504F1AE-CC81-FDCF-E4A4-CFBFEEEDA294}"/>
+              </a:ext>
+            </a:extLst>
+          </p:cNvPr>
+          <p:cNvSpPr>
+            <a:spLocks noGrp="1"/>
+          </p:cNvSpPr>
+          <p:nvPr>
+            <p:ph type="body" idx="1"/>
+          </p:nvPr>
+        </p:nvSpPr>
+        <p:spPr>
+          <a:xfrm>
+            <a:off x="1524000" y="4159404"/>
+            <a:ext cx="9144000" cy="1098395"/>
+          </a:xfrm>
+        </p:spPr>
+        <p:txBody>
+          <a:bodyPr vert="horz" lIns="91440" tIns="45720" rIns="91440" bIns="45720" rtlCol="0">
+            <a:normAutofit/>
+          </a:bodyPr>
+          <a:lstStyle/>
+          <a:p>
+            <a:pPr algn="ctr"/>
+            <a:endParaRPr lang="en-US">
+              <a:solidFill>
+                <a:srgbClr val="FFFFFF"/>
+              </a:solidFill>
+            </a:endParaRPr>
+          </a:p>
+        </p:txBody>
+      </p:sp>
+      <p:sp>
+        <p:nvSpPr>
+          <p:cNvPr id="4" name="Slide Number Placeholder 3">
+            <a:extLst>
+              <a:ext uri="{FF2B5EF4-FFF2-40B4-BE49-F238E27FC236}">
+                <a16:creationId xmlns:a16="http://schemas.microsoft.com/office/drawing/2014/main" id="{8657F1CB-18FA-659E-6530-B17C8C4052CD}"/>
+              </a:ext>
+            </a:extLst>
+          </p:cNvPr>
+          <p:cNvSpPr>
+            <a:spLocks noGrp="1"/>
+          </p:cNvSpPr>
+          <p:nvPr>
+            <p:ph type="sldNum" sz="quarter" idx="12"/>
+          </p:nvPr>
+        </p:nvSpPr>
+        <p:spPr>
+          <a:xfrm>
+            <a:off x="8610600" y="6356350"/>
+            <a:ext cx="2743200" cy="365125"/>
+          </a:xfrm>
+        </p:spPr>
+        <p:txBody>
+          <a:bodyPr vert="horz" lIns="91440" tIns="45720" rIns="91440" bIns="45720" rtlCol="0" anchor="ctr">
+            <a:normAutofit/>
+          </a:bodyPr>
+          <a:lstStyle/>
+          <a:p>
+            <a:pPr>
+              <a:spcAft>
+                <a:spcPts val="600"/>
+              </a:spcAft>
+              <a:defRPr/>
+            </a:pPr>
+            <a:fld id="{9C7CE217-4467-4B8D-A735-B008FA7C4816}" type="slidenum">
+              <a:rPr lang="en-US">
+                <a:solidFill>
+                  <a:srgbClr val="FFFFFF"/>
+                </a:solidFill>
+                <a:latin typeface="Calibri" panose="020F0502020204030204"/>
+              </a:rPr>
+              <a:pPr>
+                <a:spcAft>
+                  <a:spcPts val="600"/>
+                </a:spcAft>
+                <a:defRPr/>
+              </a:pPr>
+              <a:t>9</a:t>
+            </a:fld>
+            <a:endParaRPr lang="en-US">
+              <a:solidFill>
+                <a:srgbClr val="FFFFFF"/>
+              </a:solidFill>
+              <a:latin typeface="Calibri" panose="020F0502020204030204"/>
+            </a:endParaRPr>
+          </a:p>
+        </p:txBody>
+      </p:sp>
+    </p:spTree>
+    <p:extLst>
+      <p:ext uri="{BB962C8B-B14F-4D97-AF65-F5344CB8AC3E}">
+        <p14:creationId xmlns:p14="http://schemas.microsoft.com/office/powerpoint/2010/main" val="3856144244"/>
+      </p:ext>
+    </p:extLst>
+  </p:cSld>
+  <p:clrMapOvr>
+    <a:overrideClrMapping bg1="dk1" tx1="lt1" bg2="dk2" tx2="lt2" accent1="accent1" accent2="accent2" accent3="accent3" accent4="accent4" accent5="accent5" accent6="accent6" hlink="hlink" folHlink="folHlink"/>
+  </p:clrMapOvr>
 </p:sld>
 </file>
 

--- a/gpu_programming.pptx
+++ b/gpu_programming.pptx
@@ -273,7 +273,7 @@
           <a:p>
             <a:fld id="{8BC644CB-8FFF-4F59-B04D-9A1D2A5DB720}" type="datetimeFigureOut">
               <a:rPr lang="LID4096" smtClean="0"/>
-              <a:t>05/06/2026</a:t>
+              <a:t>05/29/2026</a:t>
             </a:fld>
             <a:endParaRPr lang="LID4096"/>
           </a:p>
@@ -690,7 +690,7 @@
           <a:p>
             <a:fld id="{29DC7A01-813B-4B59-A1CC-F2D63921E46A}" type="datetime1">
               <a:rPr lang="LID4096" smtClean="0"/>
-              <a:t>05/06/2026</a:t>
+              <a:t>05/29/2026</a:t>
             </a:fld>
             <a:endParaRPr lang="LID4096"/>
           </a:p>
@@ -890,7 +890,7 @@
           <a:p>
             <a:fld id="{6C2A7740-B6F2-4CC5-9AD0-B161B943DB10}" type="datetime1">
               <a:rPr lang="LID4096" smtClean="0"/>
-              <a:t>05/06/2026</a:t>
+              <a:t>05/29/2026</a:t>
             </a:fld>
             <a:endParaRPr lang="LID4096"/>
           </a:p>
@@ -1100,7 +1100,7 @@
           <a:p>
             <a:fld id="{2F94B025-8F26-4EDF-B991-413B82D6446E}" type="datetime1">
               <a:rPr lang="LID4096" smtClean="0"/>
-              <a:t>05/06/2026</a:t>
+              <a:t>05/29/2026</a:t>
             </a:fld>
             <a:endParaRPr lang="LID4096"/>
           </a:p>
@@ -1300,7 +1300,7 @@
           <a:p>
             <a:fld id="{CB5C8B8A-B2CE-4D78-88A4-476B2363B71E}" type="datetime1">
               <a:rPr lang="LID4096" smtClean="0"/>
-              <a:t>05/06/2026</a:t>
+              <a:t>05/29/2026</a:t>
             </a:fld>
             <a:endParaRPr lang="LID4096"/>
           </a:p>
@@ -1576,7 +1576,7 @@
           <a:p>
             <a:fld id="{CDDAB553-EE67-480E-BCE3-F64D7D51D294}" type="datetime1">
               <a:rPr lang="LID4096" smtClean="0"/>
-              <a:t>05/06/2026</a:t>
+              <a:t>05/29/2026</a:t>
             </a:fld>
             <a:endParaRPr lang="LID4096"/>
           </a:p>
@@ -1844,7 +1844,7 @@
           <a:p>
             <a:fld id="{CD270038-A599-4345-BE24-96A4E06BF8E3}" type="datetime1">
               <a:rPr lang="LID4096" smtClean="0"/>
-              <a:t>05/06/2026</a:t>
+              <a:t>05/29/2026</a:t>
             </a:fld>
             <a:endParaRPr lang="LID4096"/>
           </a:p>
@@ -2259,7 +2259,7 @@
           <a:p>
             <a:fld id="{44A719F7-59BE-4FD1-8AC5-F7BFCCA290D7}" type="datetime1">
               <a:rPr lang="LID4096" smtClean="0"/>
-              <a:t>05/06/2026</a:t>
+              <a:t>05/29/2026</a:t>
             </a:fld>
             <a:endParaRPr lang="LID4096"/>
           </a:p>
@@ -2401,7 +2401,7 @@
           <a:p>
             <a:fld id="{B4C93A37-6A61-4F10-A100-9676ACB86039}" type="datetime1">
               <a:rPr lang="LID4096" smtClean="0"/>
-              <a:t>05/06/2026</a:t>
+              <a:t>05/29/2026</a:t>
             </a:fld>
             <a:endParaRPr lang="LID4096"/>
           </a:p>
@@ -2514,7 +2514,7 @@
           <a:p>
             <a:fld id="{9E73F7F9-09CC-4C21-BDB8-90E2F1A013BD}" type="datetime1">
               <a:rPr lang="LID4096" smtClean="0"/>
-              <a:t>05/06/2026</a:t>
+              <a:t>05/29/2026</a:t>
             </a:fld>
             <a:endParaRPr lang="LID4096"/>
           </a:p>
@@ -2827,7 +2827,7 @@
           <a:p>
             <a:fld id="{FD166AE6-E2E5-4774-8434-34F2AD9BDDCE}" type="datetime1">
               <a:rPr lang="LID4096" smtClean="0"/>
-              <a:t>05/06/2026</a:t>
+              <a:t>05/29/2026</a:t>
             </a:fld>
             <a:endParaRPr lang="LID4096"/>
           </a:p>
@@ -3116,7 +3116,7 @@
           <a:p>
             <a:fld id="{895E2CCE-BBFE-4BEC-9002-70F26B158681}" type="datetime1">
               <a:rPr lang="LID4096" smtClean="0"/>
-              <a:t>05/06/2026</a:t>
+              <a:t>05/29/2026</a:t>
             </a:fld>
             <a:endParaRPr lang="LID4096"/>
           </a:p>
@@ -3359,7 +3359,7 @@
           <a:p>
             <a:fld id="{C795C0FD-7BB7-48C9-86F3-9771767F1BC3}" type="datetime1">
               <a:rPr lang="LID4096" smtClean="0"/>
-              <a:t>05/06/2026</a:t>
+              <a:t>05/29/2026</a:t>
             </a:fld>
             <a:endParaRPr lang="LID4096"/>
           </a:p>
@@ -21472,7 +21472,7 @@
             <p:ph idx="1"/>
             <p:extLst>
               <p:ext uri="{D42A27DB-BD31-4B8C-83A1-F6EECF244321}">
-                <p14:modId xmlns:p14="http://schemas.microsoft.com/office/powerpoint/2010/main" val="2985166791"/>
+                <p14:modId xmlns:p14="http://schemas.microsoft.com/office/powerpoint/2010/main" val="349692181"/>
               </p:ext>
             </p:extLst>
           </p:nvPr>
@@ -22203,7 +22203,7 @@
                     <a:p>
                       <a:r>
                         <a:rPr lang="en-US" dirty="0"/>
-                        <a:t>192Mb</a:t>
+                        <a:t>126Mb</a:t>
                       </a:r>
                       <a:endParaRPr lang="LID4096" dirty="0"/>
                     </a:p>
@@ -22694,7 +22694,7 @@
             <p:ph idx="1"/>
             <p:extLst>
               <p:ext uri="{D42A27DB-BD31-4B8C-83A1-F6EECF244321}">
-                <p14:modId xmlns:p14="http://schemas.microsoft.com/office/powerpoint/2010/main" val="2638175548"/>
+                <p14:modId xmlns:p14="http://schemas.microsoft.com/office/powerpoint/2010/main" val="117172028"/>
               </p:ext>
             </p:extLst>
           </p:nvPr>
@@ -23314,7 +23314,7 @@
                     <a:p>
                       <a:r>
                         <a:rPr lang="en-US" dirty="0"/>
-                        <a:t>192</a:t>
+                        <a:t>148</a:t>
                       </a:r>
                       <a:endParaRPr lang="LID4096" dirty="0"/>
                     </a:p>

--- a/gpu_programming.pptx
+++ b/gpu_programming.pptx
@@ -273,7 +273,7 @@
           <a:p>
             <a:fld id="{8BC644CB-8FFF-4F59-B04D-9A1D2A5DB720}" type="datetimeFigureOut">
               <a:rPr lang="LID4096" smtClean="0"/>
-              <a:t>05/29/2026</a:t>
+              <a:t>08/06/2026</a:t>
             </a:fld>
             <a:endParaRPr lang="LID4096"/>
           </a:p>
@@ -690,7 +690,7 @@
           <a:p>
             <a:fld id="{29DC7A01-813B-4B59-A1CC-F2D63921E46A}" type="datetime1">
               <a:rPr lang="LID4096" smtClean="0"/>
-              <a:t>05/29/2026</a:t>
+              <a:t>08/06/2026</a:t>
             </a:fld>
             <a:endParaRPr lang="LID4096"/>
           </a:p>
@@ -890,7 +890,7 @@
           <a:p>
             <a:fld id="{6C2A7740-B6F2-4CC5-9AD0-B161B943DB10}" type="datetime1">
               <a:rPr lang="LID4096" smtClean="0"/>
-              <a:t>05/29/2026</a:t>
+              <a:t>08/06/2026</a:t>
             </a:fld>
             <a:endParaRPr lang="LID4096"/>
           </a:p>
@@ -1100,7 +1100,7 @@
           <a:p>
             <a:fld id="{2F94B025-8F26-4EDF-B991-413B82D6446E}" type="datetime1">
               <a:rPr lang="LID4096" smtClean="0"/>
-              <a:t>05/29/2026</a:t>
+              <a:t>08/06/2026</a:t>
             </a:fld>
             <a:endParaRPr lang="LID4096"/>
           </a:p>
@@ -1300,7 +1300,7 @@
           <a:p>
             <a:fld id="{CB5C8B8A-B2CE-4D78-88A4-476B2363B71E}" type="datetime1">
               <a:rPr lang="LID4096" smtClean="0"/>
-              <a:t>05/29/2026</a:t>
+              <a:t>08/06/2026</a:t>
             </a:fld>
             <a:endParaRPr lang="LID4096"/>
           </a:p>
@@ -1576,7 +1576,7 @@
           <a:p>
             <a:fld id="{CDDAB553-EE67-480E-BCE3-F64D7D51D294}" type="datetime1">
               <a:rPr lang="LID4096" smtClean="0"/>
-              <a:t>05/29/2026</a:t>
+              <a:t>08/06/2026</a:t>
             </a:fld>
             <a:endParaRPr lang="LID4096"/>
           </a:p>
@@ -1844,7 +1844,7 @@
           <a:p>
             <a:fld id="{CD270038-A599-4345-BE24-96A4E06BF8E3}" type="datetime1">
               <a:rPr lang="LID4096" smtClean="0"/>
-              <a:t>05/29/2026</a:t>
+              <a:t>08/06/2026</a:t>
             </a:fld>
             <a:endParaRPr lang="LID4096"/>
           </a:p>
@@ -2259,7 +2259,7 @@
           <a:p>
             <a:fld id="{44A719F7-59BE-4FD1-8AC5-F7BFCCA290D7}" type="datetime1">
               <a:rPr lang="LID4096" smtClean="0"/>
-              <a:t>05/29/2026</a:t>
+              <a:t>08/06/2026</a:t>
             </a:fld>
             <a:endParaRPr lang="LID4096"/>
           </a:p>
@@ -2401,7 +2401,7 @@
           <a:p>
             <a:fld id="{B4C93A37-6A61-4F10-A100-9676ACB86039}" type="datetime1">
               <a:rPr lang="LID4096" smtClean="0"/>
-              <a:t>05/29/2026</a:t>
+              <a:t>08/06/2026</a:t>
             </a:fld>
             <a:endParaRPr lang="LID4096"/>
           </a:p>
@@ -2514,7 +2514,7 @@
           <a:p>
             <a:fld id="{9E73F7F9-09CC-4C21-BDB8-90E2F1A013BD}" type="datetime1">
               <a:rPr lang="LID4096" smtClean="0"/>
-              <a:t>05/29/2026</a:t>
+              <a:t>08/06/2026</a:t>
             </a:fld>
             <a:endParaRPr lang="LID4096"/>
           </a:p>
@@ -2827,7 +2827,7 @@
           <a:p>
             <a:fld id="{FD166AE6-E2E5-4774-8434-34F2AD9BDDCE}" type="datetime1">
               <a:rPr lang="LID4096" smtClean="0"/>
-              <a:t>05/29/2026</a:t>
+              <a:t>08/06/2026</a:t>
             </a:fld>
             <a:endParaRPr lang="LID4096"/>
           </a:p>
@@ -3116,7 +3116,7 @@
           <a:p>
             <a:fld id="{895E2CCE-BBFE-4BEC-9002-70F26B158681}" type="datetime1">
               <a:rPr lang="LID4096" smtClean="0"/>
-              <a:t>05/29/2026</a:t>
+              <a:t>08/06/2026</a:t>
             </a:fld>
             <a:endParaRPr lang="LID4096"/>
           </a:p>
@@ -3359,7 +3359,7 @@
           <a:p>
             <a:fld id="{C795C0FD-7BB7-48C9-86F3-9771767F1BC3}" type="datetime1">
               <a:rPr lang="LID4096" smtClean="0"/>
-              <a:t>05/29/2026</a:t>
+              <a:t>08/06/2026</a:t>
             </a:fld>
             <a:endParaRPr lang="LID4096"/>
           </a:p>
@@ -4966,7 +4966,9 @@
         </p:nvSpPr>
         <p:spPr/>
         <p:txBody>
-          <a:bodyPr/>
+          <a:bodyPr>
+            <a:normAutofit fontScale="92500" lnSpcReduction="10000"/>
+          </a:bodyPr>
           <a:lstStyle/>
           <a:p>
             <a:r>
@@ -5009,13 +5011,41 @@
           <a:p>
             <a:r>
               <a:rPr lang="en-US" dirty="0"/>
-              <a:t>32 threads grouped in warps (NVIDIA)/wavefronts (AMD)</a:t>
-            </a:r>
-          </a:p>
-          <a:p>
+              <a:t>threads grouped in subgroups</a:t>
+            </a:r>
+          </a:p>
+          <a:p>
+            <a:pPr lvl="1"/>
             <a:r>
               <a:rPr lang="en-US" dirty="0"/>
-              <a:t>Threads in warp execute same instruction on different data</a:t>
+              <a:t>NVIDIA: warp = 32 threads</a:t>
+            </a:r>
+          </a:p>
+          <a:p>
+            <a:pPr lvl="1"/>
+            <a:r>
+              <a:rPr lang="en-US" dirty="0"/>
+              <a:t>AMD: wavefront</a:t>
+            </a:r>
+          </a:p>
+          <a:p>
+            <a:pPr lvl="2"/>
+            <a:r>
+              <a:rPr lang="en-US" dirty="0"/>
+              <a:t>Instinct/CDNA = 64 threads</a:t>
+            </a:r>
+          </a:p>
+          <a:p>
+            <a:pPr lvl="2"/>
+            <a:r>
+              <a:rPr lang="en-US" dirty="0"/>
+              <a:t>Radeon/RDNA = 32 threads</a:t>
+            </a:r>
+          </a:p>
+          <a:p>
+            <a:r>
+              <a:rPr lang="en-US" dirty="0"/>
+              <a:t>Threads in subgroup execute same instruction on different data</a:t>
             </a:r>
           </a:p>
           <a:p>
@@ -5185,33 +5215,15 @@
                                   </p:childTnLst>
                                 </p:cTn>
                               </p:par>
-                            </p:childTnLst>
-                          </p:cTn>
-                        </p:par>
-                      </p:childTnLst>
-                    </p:cTn>
-                  </p:par>
-                  <p:par>
-                    <p:cTn id="11" fill="hold">
-                      <p:stCondLst>
-                        <p:cond delay="indefinite"/>
-                      </p:stCondLst>
-                      <p:childTnLst>
-                        <p:par>
-                          <p:cTn id="12" fill="hold">
-                            <p:stCondLst>
-                              <p:cond delay="0"/>
-                            </p:stCondLst>
-                            <p:childTnLst>
                               <p:par>
-                                <p:cTn id="13" presetID="1" presetClass="entr" presetSubtype="0" fill="hold" grpId="0" nodeType="clickEffect">
+                                <p:cTn id="11" presetID="1" presetClass="entr" presetSubtype="0" fill="hold" grpId="0" nodeType="withEffect">
                                   <p:stCondLst>
                                     <p:cond delay="0"/>
                                   </p:stCondLst>
                                   <p:childTnLst>
                                     <p:set>
                                       <p:cBhvr>
-                                        <p:cTn id="14" dur="1" fill="hold">
+                                        <p:cTn id="12" dur="1" fill="hold">
                                           <p:stCondLst>
                                             <p:cond delay="0"/>
                                           </p:stCondLst>
@@ -5234,33 +5246,46 @@
                                   </p:childTnLst>
                                 </p:cTn>
                               </p:par>
-                            </p:childTnLst>
-                          </p:cTn>
-                        </p:par>
-                      </p:childTnLst>
-                    </p:cTn>
-                  </p:par>
-                  <p:par>
-                    <p:cTn id="15" fill="hold">
-                      <p:stCondLst>
-                        <p:cond delay="indefinite"/>
-                      </p:stCondLst>
-                      <p:childTnLst>
-                        <p:par>
-                          <p:cTn id="16" fill="hold">
-                            <p:stCondLst>
-                              <p:cond delay="0"/>
-                            </p:stCondLst>
-                            <p:childTnLst>
                               <p:par>
-                                <p:cTn id="17" presetID="1" presetClass="entr" presetSubtype="0" fill="hold" grpId="0" nodeType="clickEffect">
+                                <p:cTn id="13" presetID="1" presetClass="entr" presetSubtype="0" fill="hold" grpId="0" nodeType="withEffect">
                                   <p:stCondLst>
                                     <p:cond delay="0"/>
                                   </p:stCondLst>
                                   <p:childTnLst>
                                     <p:set>
                                       <p:cBhvr>
-                                        <p:cTn id="18" dur="1" fill="hold">
+                                        <p:cTn id="14" dur="1" fill="hold">
+                                          <p:stCondLst>
+                                            <p:cond delay="0"/>
+                                          </p:stCondLst>
+                                        </p:cTn>
+                                        <p:tgtEl>
+                                          <p:spTgt spid="3">
+                                            <p:txEl>
+                                              <p:pRg st="3" end="3"/>
+                                            </p:txEl>
+                                          </p:spTgt>
+                                        </p:tgtEl>
+                                        <p:attrNameLst>
+                                          <p:attrName>style.visibility</p:attrName>
+                                        </p:attrNameLst>
+                                      </p:cBhvr>
+                                      <p:to>
+                                        <p:strVal val="visible"/>
+                                      </p:to>
+                                    </p:set>
+                                  </p:childTnLst>
+                                </p:cTn>
+                              </p:par>
+                              <p:par>
+                                <p:cTn id="15" presetID="1" presetClass="entr" presetSubtype="0" fill="hold" grpId="0" nodeType="withEffect">
+                                  <p:stCondLst>
+                                    <p:cond delay="0"/>
+                                  </p:stCondLst>
+                                  <p:childTnLst>
+                                    <p:set>
+                                      <p:cBhvr>
+                                        <p:cTn id="16" dur="1" fill="hold">
                                           <p:stCondLst>
                                             <p:cond delay="0"/>
                                           </p:stCondLst>
@@ -5284,14 +5309,14 @@
                                 </p:cTn>
                               </p:par>
                               <p:par>
-                                <p:cTn id="19" presetID="1" presetClass="entr" presetSubtype="0" fill="hold" grpId="0" nodeType="withEffect">
+                                <p:cTn id="17" presetID="1" presetClass="entr" presetSubtype="0" fill="hold" grpId="0" nodeType="withEffect">
                                   <p:stCondLst>
                                     <p:cond delay="0"/>
                                   </p:stCondLst>
                                   <p:childTnLst>
                                     <p:set>
                                       <p:cBhvr>
-                                        <p:cTn id="20" dur="1" fill="hold">
+                                        <p:cTn id="18" dur="1" fill="hold">
                                           <p:stCondLst>
                                             <p:cond delay="0"/>
                                           </p:stCondLst>
@@ -5314,8 +5339,26 @@
                                   </p:childTnLst>
                                 </p:cTn>
                               </p:par>
+                            </p:childTnLst>
+                          </p:cTn>
+                        </p:par>
+                      </p:childTnLst>
+                    </p:cTn>
+                  </p:par>
+                  <p:par>
+                    <p:cTn id="19" fill="hold">
+                      <p:stCondLst>
+                        <p:cond delay="indefinite"/>
+                      </p:stCondLst>
+                      <p:childTnLst>
+                        <p:par>
+                          <p:cTn id="20" fill="hold">
+                            <p:stCondLst>
+                              <p:cond delay="0"/>
+                            </p:stCondLst>
+                            <p:childTnLst>
                               <p:par>
-                                <p:cTn id="21" presetID="1" presetClass="entr" presetSubtype="0" fill="hold" grpId="0" nodeType="withEffect">
+                                <p:cTn id="21" presetID="1" presetClass="entr" presetSubtype="0" fill="hold" grpId="0" nodeType="clickEffect">
                                   <p:stCondLst>
                                     <p:cond delay="0"/>
                                   </p:stCondLst>
@@ -5331,6 +5374,117 @@
                                           <p:spTgt spid="3">
                                             <p:txEl>
                                               <p:pRg st="6" end="6"/>
+                                            </p:txEl>
+                                          </p:spTgt>
+                                        </p:tgtEl>
+                                        <p:attrNameLst>
+                                          <p:attrName>style.visibility</p:attrName>
+                                        </p:attrNameLst>
+                                      </p:cBhvr>
+                                      <p:to>
+                                        <p:strVal val="visible"/>
+                                      </p:to>
+                                    </p:set>
+                                  </p:childTnLst>
+                                </p:cTn>
+                              </p:par>
+                            </p:childTnLst>
+                          </p:cTn>
+                        </p:par>
+                      </p:childTnLst>
+                    </p:cTn>
+                  </p:par>
+                  <p:par>
+                    <p:cTn id="23" fill="hold">
+                      <p:stCondLst>
+                        <p:cond delay="indefinite"/>
+                      </p:stCondLst>
+                      <p:childTnLst>
+                        <p:par>
+                          <p:cTn id="24" fill="hold">
+                            <p:stCondLst>
+                              <p:cond delay="0"/>
+                            </p:stCondLst>
+                            <p:childTnLst>
+                              <p:par>
+                                <p:cTn id="25" presetID="1" presetClass="entr" presetSubtype="0" fill="hold" grpId="0" nodeType="clickEffect">
+                                  <p:stCondLst>
+                                    <p:cond delay="0"/>
+                                  </p:stCondLst>
+                                  <p:childTnLst>
+                                    <p:set>
+                                      <p:cBhvr>
+                                        <p:cTn id="26" dur="1" fill="hold">
+                                          <p:stCondLst>
+                                            <p:cond delay="0"/>
+                                          </p:stCondLst>
+                                        </p:cTn>
+                                        <p:tgtEl>
+                                          <p:spTgt spid="3">
+                                            <p:txEl>
+                                              <p:pRg st="8" end="8"/>
+                                            </p:txEl>
+                                          </p:spTgt>
+                                        </p:tgtEl>
+                                        <p:attrNameLst>
+                                          <p:attrName>style.visibility</p:attrName>
+                                        </p:attrNameLst>
+                                      </p:cBhvr>
+                                      <p:to>
+                                        <p:strVal val="visible"/>
+                                      </p:to>
+                                    </p:set>
+                                  </p:childTnLst>
+                                </p:cTn>
+                              </p:par>
+                              <p:par>
+                                <p:cTn id="27" presetID="1" presetClass="entr" presetSubtype="0" fill="hold" grpId="0" nodeType="withEffect">
+                                  <p:stCondLst>
+                                    <p:cond delay="0"/>
+                                  </p:stCondLst>
+                                  <p:childTnLst>
+                                    <p:set>
+                                      <p:cBhvr>
+                                        <p:cTn id="28" dur="1" fill="hold">
+                                          <p:stCondLst>
+                                            <p:cond delay="0"/>
+                                          </p:stCondLst>
+                                        </p:cTn>
+                                        <p:tgtEl>
+                                          <p:spTgt spid="3">
+                                            <p:txEl>
+                                              <p:pRg st="9" end="9"/>
+                                            </p:txEl>
+                                          </p:spTgt>
+                                        </p:tgtEl>
+                                        <p:attrNameLst>
+                                          <p:attrName>style.visibility</p:attrName>
+                                        </p:attrNameLst>
+                                      </p:cBhvr>
+                                      <p:to>
+                                        <p:strVal val="visible"/>
+                                      </p:to>
+                                    </p:set>
+                                  </p:childTnLst>
+                                </p:cTn>
+                              </p:par>
+                              <p:par>
+                                <p:cTn id="29" presetID="1" presetClass="entr" presetSubtype="0" fill="hold" grpId="0" nodeType="withEffect">
+                                  <p:stCondLst>
+                                    <p:cond delay="0"/>
+                                  </p:stCondLst>
+                                  <p:childTnLst>
+                                    <p:set>
+                                      <p:cBhvr>
+                                        <p:cTn id="30" dur="1" fill="hold">
+                                          <p:stCondLst>
+                                            <p:cond delay="0"/>
+                                          </p:stCondLst>
+                                        </p:cTn>
+                                        <p:tgtEl>
+                                          <p:spTgt spid="3">
+                                            <p:txEl>
+                                              <p:pRg st="10" end="10"/>
                                             </p:txEl>
                                           </p:spTgt>
                                         </p:tgtEl>
@@ -5456,7 +5610,7 @@
                   <a:srgbClr val="FF0000"/>
                 </a:solidFill>
               </a:rPr>
-              <a:t>if threads agree</a:t>
+              <a:t>if threads in subgroup agree</a:t>
             </a:r>
           </a:p>
           <a:p>

--- a/gpu_programming.pptx
+++ b/gpu_programming.pptx
@@ -16892,6 +16892,54 @@
           </a:p>
         </p:txBody>
       </p:sp>
+      <p:sp>
+        <p:nvSpPr>
+          <p:cNvPr id="7" name="TextBox 6">
+            <a:extLst>
+              <a:ext uri="{FF2B5EF4-FFF2-40B4-BE49-F238E27FC236}">
+                <a16:creationId xmlns:a16="http://schemas.microsoft.com/office/drawing/2014/main" id="{2614896B-B657-57EC-27A1-95D7A4CB5E62}"/>
+              </a:ext>
+            </a:extLst>
+          </p:cNvPr>
+          <p:cNvSpPr txBox="1"/>
+          <p:nvPr/>
+        </p:nvSpPr>
+        <p:spPr>
+          <a:xfrm>
+            <a:off x="4834099" y="5525353"/>
+            <a:ext cx="3721981" cy="830997"/>
+          </a:xfrm>
+          <a:prstGeom prst="rect">
+            <a:avLst/>
+          </a:prstGeom>
+          <a:noFill/>
+          <a:ln>
+            <a:solidFill>
+              <a:schemeClr val="tx1"/>
+            </a:solidFill>
+          </a:ln>
+        </p:spPr>
+        <p:txBody>
+          <a:bodyPr wrap="none" rtlCol="0">
+            <a:spAutoFit/>
+          </a:bodyPr>
+          <a:lstStyle/>
+          <a:p>
+            <a:r>
+              <a:rPr lang="en-US" sz="2400" dirty="0"/>
+              <a:t>Numbers for NVIDIA H100,</a:t>
+            </a:r>
+            <a:br>
+              <a:rPr lang="en-US" sz="2400" dirty="0"/>
+            </a:br>
+            <a:r>
+              <a:rPr lang="en-US" sz="2400" dirty="0"/>
+              <a:t>query the device!</a:t>
+            </a:r>
+            <a:endParaRPr lang="LID4096" sz="2400" dirty="0"/>
+          </a:p>
+        </p:txBody>
+      </p:sp>
     </p:spTree>
     <p:extLst>
       <p:ext uri="{BB962C8B-B14F-4D97-AF65-F5344CB8AC3E}">
@@ -17567,6 +17615,54 @@
               <a:t> latency hiding</a:t>
             </a:r>
             <a:endParaRPr lang="LID4096" sz="2800" dirty="0"/>
+          </a:p>
+        </p:txBody>
+      </p:sp>
+      <p:sp>
+        <p:nvSpPr>
+          <p:cNvPr id="7" name="TextBox 6">
+            <a:extLst>
+              <a:ext uri="{FF2B5EF4-FFF2-40B4-BE49-F238E27FC236}">
+                <a16:creationId xmlns:a16="http://schemas.microsoft.com/office/drawing/2014/main" id="{242471BA-612A-2249-05CC-EEA67CEED1CB}"/>
+              </a:ext>
+            </a:extLst>
+          </p:cNvPr>
+          <p:cNvSpPr txBox="1"/>
+          <p:nvPr/>
+        </p:nvSpPr>
+        <p:spPr>
+          <a:xfrm>
+            <a:off x="7842770" y="1870075"/>
+            <a:ext cx="3721981" cy="830997"/>
+          </a:xfrm>
+          <a:prstGeom prst="rect">
+            <a:avLst/>
+          </a:prstGeom>
+          <a:noFill/>
+          <a:ln>
+            <a:solidFill>
+              <a:schemeClr val="tx1"/>
+            </a:solidFill>
+          </a:ln>
+        </p:spPr>
+        <p:txBody>
+          <a:bodyPr wrap="none" rtlCol="0">
+            <a:spAutoFit/>
+          </a:bodyPr>
+          <a:lstStyle/>
+          <a:p>
+            <a:r>
+              <a:rPr lang="en-US" sz="2400" dirty="0"/>
+              <a:t>Numbers for NVIDIA H100,</a:t>
+            </a:r>
+            <a:br>
+              <a:rPr lang="en-US" sz="2400" dirty="0"/>
+            </a:br>
+            <a:r>
+              <a:rPr lang="en-US" sz="2400" dirty="0"/>
+              <a:t>query the device!</a:t>
+            </a:r>
+            <a:endParaRPr lang="LID4096" sz="2400" dirty="0"/>
           </a:p>
         </p:txBody>
       </p:sp>
@@ -18288,7 +18384,17 @@
             <a:pPr lvl="1"/>
             <a:r>
               <a:rPr lang="en-US" dirty="0"/>
-              <a:t>Warp: implicit lockstep</a:t>
+              <a:t>Subgroup: implicit lockstep execution </a:t>
+            </a:r>
+            <a:r>
+              <a:rPr lang="en-US" dirty="0">
+                <a:sym typeface="Symbol" panose="05050102010706020507" pitchFamily="18" charset="2"/>
+              </a:rPr>
+              <a:t></a:t>
+            </a:r>
+            <a:r>
+              <a:rPr lang="en-US" dirty="0"/>
+              <a:t> synchronization</a:t>
             </a:r>
           </a:p>
           <a:p>
@@ -18302,7 +18408,7 @@
             <a:pPr lvl="1"/>
             <a:r>
               <a:rPr lang="en-US" dirty="0"/>
-              <a:t>Cluster (H100+): cluster boundaries</a:t>
+              <a:t>Cluster (NVIDIA H100+): cluster boundaries</a:t>
             </a:r>
           </a:p>
           <a:p>

--- a/gpu_programming.pptx
+++ b/gpu_programming.pptx
@@ -5,7 +5,7 @@
     <p:sldMasterId id="2147483648" r:id="rId1"/>
   </p:sldMasterIdLst>
   <p:notesMasterIdLst>
-    <p:notesMasterId r:id="rId34"/>
+    <p:notesMasterId r:id="rId35"/>
   </p:notesMasterIdLst>
   <p:sldIdLst>
     <p:sldId id="257" r:id="rId2"/>
@@ -40,6 +40,7 @@
     <p:sldId id="370" r:id="rId31"/>
     <p:sldId id="377" r:id="rId32"/>
     <p:sldId id="371" r:id="rId33"/>
+    <p:sldId id="389" r:id="rId34"/>
   </p:sldIdLst>
   <p:sldSz cx="12192000" cy="6858000"/>
   <p:notesSz cx="6858000" cy="9144000"/>
@@ -10209,7 +10210,7 @@
             <a:pPr lvl="2"/>
             <a:r>
               <a:rPr lang="en-US" dirty="0"/>
-              <a:t>50 Gb/s/lane (bi-directional) </a:t>
+              <a:t>50 GB/s/lane (bi-directional) </a:t>
             </a:r>
             <a:r>
               <a:rPr lang="en-US" dirty="0">
@@ -10219,7 +10220,7 @@
             </a:r>
             <a:r>
               <a:rPr lang="en-US" dirty="0"/>
-              <a:t> 200 Gb/s between GPUs</a:t>
+              <a:t> 200 GB/s between GPUs (100 GB/s each way)</a:t>
             </a:r>
           </a:p>
           <a:p>
@@ -10230,6 +10231,10 @@
             </a:r>
           </a:p>
           <a:p>
+            <a:r>
+              <a:rPr lang="en-US" dirty="0"/>
+              <a:t>NVIDIA </a:t>
+            </a:r>
             <a:r>
               <a:rPr lang="en-US" dirty="0" err="1"/>
               <a:t>Infiniband</a:t>
@@ -10676,113 +10681,101 @@
             <p:ph idx="1"/>
           </p:nvPr>
         </p:nvSpPr>
-        <p:spPr/>
+        <p:spPr>
+          <a:xfrm>
+            <a:off x="838199" y="1825625"/>
+            <a:ext cx="4363874" cy="4351338"/>
+          </a:xfrm>
+        </p:spPr>
         <p:txBody>
           <a:bodyPr>
-            <a:normAutofit lnSpcReduction="10000"/>
+            <a:normAutofit/>
           </a:bodyPr>
           <a:lstStyle/>
           <a:p>
             <a:r>
-              <a:rPr lang="en-US" dirty="0"/>
+              <a:rPr lang="en-US" sz="2400" dirty="0"/>
               <a:t>Global GPU memory</a:t>
             </a:r>
             <a:br>
-              <a:rPr lang="en-US" dirty="0"/>
+              <a:rPr lang="en-US" sz="2400" dirty="0"/>
             </a:br>
             <a:r>
-              <a:rPr lang="en-US" dirty="0"/>
+              <a:rPr lang="en-US" sz="2400" dirty="0"/>
               <a:t>    </a:t>
             </a:r>
             <a:r>
-              <a:rPr lang="en-US" dirty="0">
+              <a:rPr lang="en-US" sz="2400" dirty="0">
                 <a:sym typeface="Symbol" panose="05050102010706020507" pitchFamily="18" charset="2"/>
               </a:rPr>
-              <a:t> 2 Tb/s</a:t>
-            </a:r>
-          </a:p>
-          <a:p>
-            <a:r>
-              <a:rPr lang="en-US" dirty="0" err="1">
+              <a:t> 2 TB/s</a:t>
+            </a:r>
+          </a:p>
+          <a:p>
+            <a:r>
+              <a:rPr lang="en-US" sz="2400" dirty="0" err="1">
                 <a:sym typeface="Symbol" panose="05050102010706020507" pitchFamily="18" charset="2"/>
               </a:rPr>
               <a:t>NVLink</a:t>
             </a:r>
-            <a:br>
-              <a:rPr lang="en-US" dirty="0">
+            <a:r>
+              <a:rPr lang="en-US" sz="2400" dirty="0">
                 <a:sym typeface="Symbol" panose="05050102010706020507" pitchFamily="18" charset="2"/>
               </a:rPr>
-            </a:br>
-            <a:r>
-              <a:rPr lang="en-US" dirty="0">
+              <a:t>   100 GB/s each way per GPU pair</a:t>
+            </a:r>
+          </a:p>
+          <a:p>
+            <a:r>
+              <a:rPr lang="en-US" sz="2400" dirty="0"/>
+              <a:t>PCIe </a:t>
+            </a:r>
+            <a:r>
+              <a:rPr lang="en-US" sz="2400" dirty="0">
                 <a:sym typeface="Symbol" panose="05050102010706020507" pitchFamily="18" charset="2"/>
               </a:rPr>
-              <a:t>     200 Gb/s</a:t>
-            </a:r>
-          </a:p>
-          <a:p>
-            <a:r>
-              <a:rPr lang="en-US" dirty="0"/>
-              <a:t>PCIe</a:t>
+              <a:t> 32 GB/s each way</a:t>
+            </a:r>
+          </a:p>
+          <a:p>
+            <a:r>
+              <a:rPr lang="en-US" sz="2400" dirty="0"/>
+              <a:t>Host memory</a:t>
             </a:r>
             <a:br>
-              <a:rPr lang="en-US" dirty="0"/>
+              <a:rPr lang="en-US" sz="2400" dirty="0"/>
             </a:br>
             <a:r>
-              <a:rPr lang="en-US" dirty="0"/>
+              <a:rPr lang="en-US" sz="2400" dirty="0"/>
               <a:t>    </a:t>
             </a:r>
             <a:r>
-              <a:rPr lang="en-US" dirty="0">
+              <a:rPr lang="en-US" sz="2400" dirty="0">
                 <a:sym typeface="Symbol" panose="05050102010706020507" pitchFamily="18" charset="2"/>
               </a:rPr>
-              <a:t> 32 Gb/s</a:t>
-            </a:r>
-          </a:p>
-          <a:p>
-            <a:r>
-              <a:rPr lang="en-US" dirty="0"/>
-              <a:t>Host memory</a:t>
-            </a:r>
-            <a:br>
-              <a:rPr lang="en-US" dirty="0"/>
-            </a:br>
-            <a:r>
-              <a:rPr lang="en-US" dirty="0"/>
-              <a:t>    </a:t>
-            </a:r>
-            <a:r>
-              <a:rPr lang="en-US" dirty="0">
+              <a:t> 300 GB/s</a:t>
+            </a:r>
+          </a:p>
+          <a:p>
+            <a:r>
+              <a:rPr lang="en-US" sz="2400" dirty="0">
                 <a:sym typeface="Symbol" panose="05050102010706020507" pitchFamily="18" charset="2"/>
               </a:rPr>
-              <a:t> 300 Gb/s</a:t>
-            </a:r>
-          </a:p>
-          <a:p>
-            <a:r>
-              <a:rPr lang="en-US" dirty="0" err="1">
+              <a:t>HDR </a:t>
+            </a:r>
+            <a:r>
+              <a:rPr lang="en-US" sz="2400" dirty="0" err="1">
                 <a:sym typeface="Symbol" panose="05050102010706020507" pitchFamily="18" charset="2"/>
               </a:rPr>
               <a:t>Infiniband</a:t>
             </a:r>
             <a:r>
-              <a:rPr lang="en-US" dirty="0">
+              <a:rPr lang="en-US" sz="2400" dirty="0">
                 <a:sym typeface="Symbol" panose="05050102010706020507" pitchFamily="18" charset="2"/>
               </a:rPr>
-              <a:t> (HDR)</a:t>
-            </a:r>
-            <a:br>
-              <a:rPr lang="en-US" dirty="0">
-                <a:sym typeface="Symbol" panose="05050102010706020507" pitchFamily="18" charset="2"/>
-              </a:rPr>
-            </a:br>
-            <a:r>
-              <a:rPr lang="en-US" dirty="0">
-                <a:sym typeface="Symbol" panose="05050102010706020507" pitchFamily="18" charset="2"/>
-              </a:rPr>
-              <a:t>     25 Gb/s</a:t>
-            </a:r>
-            <a:endParaRPr lang="LID4096" dirty="0"/>
+              <a:t>  25 GB/s each way per port</a:t>
+            </a:r>
+            <a:endParaRPr lang="LID4096" sz="2400" dirty="0"/>
           </a:p>
         </p:txBody>
       </p:sp>
@@ -10831,7 +10824,7 @@
         </p:nvCxnSpPr>
         <p:spPr>
           <a:xfrm flipH="1">
-            <a:off x="6299039" y="2845855"/>
+            <a:off x="6492079" y="2845855"/>
             <a:ext cx="3645883" cy="9369"/>
           </a:xfrm>
           <a:prstGeom prst="line">
@@ -10872,7 +10865,7 @@
         </p:nvGrpSpPr>
         <p:grpSpPr>
           <a:xfrm>
-            <a:off x="4782813" y="1624545"/>
+            <a:off x="4975853" y="1624545"/>
             <a:ext cx="3078210" cy="4136243"/>
             <a:chOff x="4782813" y="1624545"/>
             <a:chExt cx="3078210" cy="4136243"/>
@@ -12252,7 +12245,7 @@
         </p:nvGrpSpPr>
         <p:grpSpPr>
           <a:xfrm>
-            <a:off x="8741213" y="1624544"/>
+            <a:off x="8934253" y="1624544"/>
             <a:ext cx="3078210" cy="4136243"/>
             <a:chOff x="8428696" y="1624544"/>
             <a:chExt cx="3078210" cy="4136243"/>
@@ -13632,7 +13625,7 @@
         </p:nvSpPr>
         <p:spPr>
           <a:xfrm>
-            <a:off x="7972533" y="2646370"/>
+            <a:off x="8165573" y="2646370"/>
             <a:ext cx="646331" cy="369332"/>
           </a:xfrm>
           <a:prstGeom prst="rect">
@@ -24222,7 +24215,7 @@
             <p:ph idx="1"/>
             <p:extLst>
               <p:ext uri="{D42A27DB-BD31-4B8C-83A1-F6EECF244321}">
-                <p14:modId xmlns:p14="http://schemas.microsoft.com/office/powerpoint/2010/main" val="4219400718"/>
+                <p14:modId xmlns:p14="http://schemas.microsoft.com/office/powerpoint/2010/main" val="4108829723"/>
               </p:ext>
             </p:extLst>
           </p:nvPr>
@@ -24303,7 +24296,7 @@
                     <a:p>
                       <a:r>
                         <a:rPr lang="en-US" dirty="0"/>
-                        <a:t>GPU-GPU bandwidth (Gb/s)</a:t>
+                        <a:t>GPU-GPU bandwidth (GB/s)</a:t>
                       </a:r>
                       <a:endParaRPr lang="LID4096" dirty="0"/>
                     </a:p>
@@ -24317,7 +24310,7 @@
                     <a:p>
                       <a:r>
                         <a:rPr lang="en-US" dirty="0"/>
-                        <a:t>PCIe bandwidth (Gb/s)</a:t>
+                        <a:t>PCIe bandwidth (GB/s)</a:t>
                       </a:r>
                       <a:endParaRPr lang="LID4096" dirty="0"/>
                     </a:p>
@@ -25237,6 +25230,123 @@
       <p:bldP spid="5" grpId="0" animBg="1"/>
     </p:bldLst>
   </p:timing>
+</p:sld>
+</file>
+
+<file path=ppt/slides/slide33.xml><?xml version="1.0" encoding="utf-8"?>
+<p:sld xmlns:a="http://schemas.openxmlformats.org/drawingml/2006/main" xmlns:r="http://schemas.openxmlformats.org/officeDocument/2006/relationships" xmlns:p="http://schemas.openxmlformats.org/presentationml/2006/main">
+  <p:cSld>
+    <p:spTree>
+      <p:nvGrpSpPr>
+        <p:cNvPr id="1" name=""/>
+        <p:cNvGrpSpPr/>
+        <p:nvPr/>
+      </p:nvGrpSpPr>
+      <p:grpSpPr>
+        <a:xfrm>
+          <a:off x="0" y="0"/>
+          <a:ext cx="0" cy="0"/>
+          <a:chOff x="0" y="0"/>
+          <a:chExt cx="0" cy="0"/>
+        </a:xfrm>
+      </p:grpSpPr>
+      <p:sp>
+        <p:nvSpPr>
+          <p:cNvPr id="2" name="Title 1">
+            <a:extLst>
+              <a:ext uri="{FF2B5EF4-FFF2-40B4-BE49-F238E27FC236}">
+                <a16:creationId xmlns:a16="http://schemas.microsoft.com/office/drawing/2014/main" id="{6B3E72AA-9494-55B0-3590-EA81A3C78027}"/>
+              </a:ext>
+            </a:extLst>
+          </p:cNvPr>
+          <p:cNvSpPr>
+            <a:spLocks noGrp="1"/>
+          </p:cNvSpPr>
+          <p:nvPr>
+            <p:ph type="title"/>
+          </p:nvPr>
+        </p:nvSpPr>
+        <p:spPr/>
+        <p:txBody>
+          <a:bodyPr/>
+          <a:lstStyle/>
+          <a:p>
+            <a:r>
+              <a:rPr lang="en-US" dirty="0"/>
+              <a:t>Unit conventions</a:t>
+            </a:r>
+            <a:endParaRPr lang="LID4096" dirty="0"/>
+          </a:p>
+        </p:txBody>
+      </p:sp>
+      <p:sp>
+        <p:nvSpPr>
+          <p:cNvPr id="3" name="Content Placeholder 2">
+            <a:extLst>
+              <a:ext uri="{FF2B5EF4-FFF2-40B4-BE49-F238E27FC236}">
+                <a16:creationId xmlns:a16="http://schemas.microsoft.com/office/drawing/2014/main" id="{F8E20FC5-F6A4-41FF-41B6-46821BD2845A}"/>
+              </a:ext>
+            </a:extLst>
+          </p:cNvPr>
+          <p:cNvSpPr>
+            <a:spLocks noGrp="1"/>
+          </p:cNvSpPr>
+          <p:nvPr>
+            <p:ph idx="1"/>
+          </p:nvPr>
+        </p:nvSpPr>
+        <p:spPr/>
+        <p:txBody>
+          <a:bodyPr/>
+          <a:lstStyle/>
+          <a:p>
+            <a:r>
+              <a:rPr lang="en-US" dirty="0"/>
+              <a:t>GB = gigabytes</a:t>
+            </a:r>
+            <a:endParaRPr lang="LID4096" dirty="0"/>
+          </a:p>
+        </p:txBody>
+      </p:sp>
+      <p:sp>
+        <p:nvSpPr>
+          <p:cNvPr id="4" name="Slide Number Placeholder 3">
+            <a:extLst>
+              <a:ext uri="{FF2B5EF4-FFF2-40B4-BE49-F238E27FC236}">
+                <a16:creationId xmlns:a16="http://schemas.microsoft.com/office/drawing/2014/main" id="{3C4F75D5-1F21-CD5D-19E2-591551BE4AFD}"/>
+              </a:ext>
+            </a:extLst>
+          </p:cNvPr>
+          <p:cNvSpPr>
+            <a:spLocks noGrp="1"/>
+          </p:cNvSpPr>
+          <p:nvPr>
+            <p:ph type="sldNum" sz="quarter" idx="12"/>
+          </p:nvPr>
+        </p:nvSpPr>
+        <p:spPr/>
+        <p:txBody>
+          <a:bodyPr/>
+          <a:lstStyle/>
+          <a:p>
+            <a:fld id="{9C7CE217-4467-4B8D-A735-B008FA7C4816}" type="slidenum">
+              <a:rPr lang="LID4096" smtClean="0"/>
+              <a:t>33</a:t>
+            </a:fld>
+            <a:endParaRPr lang="LID4096"/>
+          </a:p>
+        </p:txBody>
+      </p:sp>
+    </p:spTree>
+    <p:extLst>
+      <p:ext uri="{BB962C8B-B14F-4D97-AF65-F5344CB8AC3E}">
+        <p14:creationId xmlns:p14="http://schemas.microsoft.com/office/powerpoint/2010/main" val="1327888539"/>
+      </p:ext>
+    </p:extLst>
+  </p:cSld>
+  <p:clrMapOvr>
+    <a:masterClrMapping/>
+  </p:clrMapOvr>
 </p:sld>
 </file>
 

--- a/gpu_programming.pptx
+++ b/gpu_programming.pptx
@@ -8494,7 +8494,7 @@
             <a:pPr lvl="1"/>
             <a:r>
               <a:rPr lang="en-US" dirty="0"/>
-              <a:t>E.g., A100: 108</a:t>
+              <a:t>E.g., NVIDIA A100: 108</a:t>
             </a:r>
           </a:p>
           <a:p>
@@ -8523,7 +8523,14 @@
           <a:p>
             <a:r>
               <a:rPr lang="en-US" dirty="0"/>
-              <a:t>32 threads/warp </a:t>
+              <a:t>NVIDIA A100 peak FP32 throughput:</a:t>
+            </a:r>
+            <a:br>
+              <a:rPr lang="en-US" dirty="0"/>
+            </a:br>
+            <a:r>
+              <a:rPr lang="en-US" dirty="0"/>
+              <a:t>64 FP32 instructions/SM </a:t>
             </a:r>
             <a:r>
               <a:rPr lang="en-US" dirty="0">
@@ -8533,24 +8540,7 @@
             </a:r>
             <a:r>
               <a:rPr lang="en-US" dirty="0"/>
-              <a:t> 4 warp instructions/SM </a:t>
-            </a:r>
-            <a:r>
-              <a:rPr lang="en-US" dirty="0">
-                <a:sym typeface="Symbol" panose="05050102010706020507" pitchFamily="18" charset="2"/>
-              </a:rPr>
-              <a:t></a:t>
-            </a:r>
-            <a:r>
-              <a:rPr lang="en-US" dirty="0"/>
-              <a:t> number SMs</a:t>
-            </a:r>
-            <a:br>
-              <a:rPr lang="en-US" dirty="0"/>
-            </a:br>
-            <a:r>
-              <a:rPr lang="en-US" dirty="0"/>
-              <a:t>for, e.g., A100 = 13,824 instructions/cycle</a:t>
+              <a:t> number SMs = 6,912 FLOP/cycle</a:t>
             </a:r>
           </a:p>
           <a:p>

--- a/gpu_programming.pptx
+++ b/gpu_programming.pptx
@@ -9071,7 +9071,7 @@
             <p:ph idx="1"/>
             <p:extLst>
               <p:ext uri="{D42A27DB-BD31-4B8C-83A1-F6EECF244321}">
-                <p14:modId xmlns:p14="http://schemas.microsoft.com/office/powerpoint/2010/main" val="607015608"/>
+                <p14:modId xmlns:p14="http://schemas.microsoft.com/office/powerpoint/2010/main" val="1569963829"/>
               </p:ext>
             </p:extLst>
           </p:nvPr>
@@ -9265,14 +9265,20 @@
                     <a:lstStyle/>
                     <a:p>
                       <a:r>
-                        <a:rPr lang="en-US" dirty="0"/>
-                        <a:t>256K </a:t>
+                        <a:rPr lang="en-US"/>
+                        <a:t>256 K </a:t>
+                      </a:r>
+                      <a:r>
+                        <a:rPr lang="en-US">
+                          <a:sym typeface="Symbol" panose="05050102010706020507" pitchFamily="18" charset="2"/>
+                        </a:rPr>
+                        <a:t> 4 B </a:t>
                       </a:r>
                       <a:r>
                         <a:rPr lang="en-US" dirty="0">
                           <a:sym typeface="Symbol" panose="05050102010706020507" pitchFamily="18" charset="2"/>
                         </a:rPr>
-                        <a:t> 4b per SM</a:t>
+                        <a:t>per SM</a:t>
                       </a:r>
                       <a:endParaRPr lang="LID4096" dirty="0"/>
                     </a:p>
@@ -9351,25 +9357,13 @@
                     <a:p>
                       <a:r>
                         <a:rPr lang="en-US" dirty="0"/>
-                        <a:t>Up to 164 </a:t>
-                      </a:r>
-                      <a:r>
-                        <a:rPr lang="en-US" dirty="0" err="1"/>
-                        <a:t>Kb</a:t>
-                      </a:r>
-                      <a:r>
-                        <a:rPr lang="en-US" dirty="0"/>
-                        <a:t>,</a:t>
+                        <a:t>Up to 164 KB,</a:t>
                       </a:r>
                     </a:p>
                     <a:p>
                       <a:r>
                         <a:rPr lang="en-US" dirty="0"/>
-                        <a:t>part of 192 </a:t>
-                      </a:r>
-                      <a:r>
-                        <a:rPr lang="en-US" dirty="0" err="1"/>
-                        <a:t>Kb</a:t>
+                        <a:t>part of 192 KB</a:t>
                       </a:r>
                       <a:endParaRPr lang="LID4096" dirty="0"/>
                     </a:p>
@@ -9526,11 +9520,7 @@
                     <a:p>
                       <a:r>
                         <a:rPr lang="en-US" dirty="0"/>
-                        <a:t>8 </a:t>
-                      </a:r>
-                      <a:r>
-                        <a:rPr lang="en-US" dirty="0" err="1"/>
-                        <a:t>Kb</a:t>
+                        <a:t>8 KB</a:t>
                       </a:r>
                       <a:endParaRPr lang="LID4096" dirty="0"/>
                     </a:p>
@@ -9609,7 +9599,7 @@
                     <a:p>
                       <a:r>
                         <a:rPr lang="en-US" dirty="0"/>
-                        <a:t>40 Mb</a:t>
+                        <a:t>40 MB</a:t>
                       </a:r>
                       <a:endParaRPr lang="LID4096" dirty="0"/>
                     </a:p>
@@ -9688,7 +9678,7 @@
                     <a:p>
                       <a:r>
                         <a:rPr lang="en-US" dirty="0"/>
-                        <a:t>40 or 80 Gb</a:t>
+                        <a:t>40 or 80 GB</a:t>
                       </a:r>
                       <a:endParaRPr lang="LID4096" dirty="0"/>
                     </a:p>
@@ -21715,7 +21705,7 @@
             <p:ph idx="1"/>
             <p:extLst>
               <p:ext uri="{D42A27DB-BD31-4B8C-83A1-F6EECF244321}">
-                <p14:modId xmlns:p14="http://schemas.microsoft.com/office/powerpoint/2010/main" val="349692181"/>
+                <p14:modId xmlns:p14="http://schemas.microsoft.com/office/powerpoint/2010/main" val="2286944672"/>
               </p:ext>
             </p:extLst>
           </p:nvPr>
@@ -21887,13 +21877,13 @@
                     <a:p>
                       <a:r>
                         <a:rPr lang="en-US" dirty="0"/>
-                        <a:t>64K </a:t>
+                        <a:t>64 K </a:t>
                       </a:r>
                       <a:r>
                         <a:rPr lang="en-US" dirty="0">
                           <a:sym typeface="Symbol" panose="05050102010706020507" pitchFamily="18" charset="2"/>
                         </a:rPr>
-                        <a:t> 4b</a:t>
+                        <a:t> 4 B</a:t>
                       </a:r>
                       <a:endParaRPr lang="LID4096" dirty="0"/>
                     </a:p>
@@ -21907,13 +21897,13 @@
                     <a:p>
                       <a:r>
                         <a:rPr lang="en-US" dirty="0"/>
-                        <a:t>64K </a:t>
+                        <a:t>64 K </a:t>
                       </a:r>
                       <a:r>
                         <a:rPr lang="en-US" dirty="0">
                           <a:sym typeface="Symbol" panose="05050102010706020507" pitchFamily="18" charset="2"/>
                         </a:rPr>
-                        <a:t> 4b</a:t>
+                        <a:t> 4 B</a:t>
                       </a:r>
                       <a:endParaRPr lang="LID4096" dirty="0"/>
                     </a:p>
@@ -21927,13 +21917,13 @@
                     <a:p>
                       <a:r>
                         <a:rPr lang="en-US" dirty="0"/>
-                        <a:t>256K </a:t>
+                        <a:t>256 K </a:t>
                       </a:r>
                       <a:r>
                         <a:rPr lang="en-US" dirty="0">
                           <a:sym typeface="Symbol" panose="05050102010706020507" pitchFamily="18" charset="2"/>
                         </a:rPr>
-                        <a:t> 4b</a:t>
+                        <a:t> 4 B</a:t>
                       </a:r>
                       <a:endParaRPr lang="LID4096" dirty="0"/>
                     </a:p>
@@ -21964,13 +21954,13 @@
                       </a:pPr>
                       <a:r>
                         <a:rPr lang="en-US" dirty="0"/>
-                        <a:t>256K </a:t>
+                        <a:t>256 K </a:t>
                       </a:r>
                       <a:r>
                         <a:rPr lang="en-US" dirty="0">
                           <a:sym typeface="Symbol" panose="05050102010706020507" pitchFamily="18" charset="2"/>
                         </a:rPr>
-                        <a:t> 4b</a:t>
+                        <a:t> 4 B</a:t>
                       </a:r>
                       <a:endParaRPr lang="LID4096" dirty="0"/>
                     </a:p>
@@ -22001,13 +21991,13 @@
                       </a:pPr>
                       <a:r>
                         <a:rPr lang="en-US" dirty="0"/>
-                        <a:t>256K </a:t>
+                        <a:t>256 K </a:t>
                       </a:r>
                       <a:r>
                         <a:rPr lang="en-US" dirty="0">
                           <a:sym typeface="Symbol" panose="05050102010706020507" pitchFamily="18" charset="2"/>
                         </a:rPr>
-                        <a:t> 4b</a:t>
+                        <a:t> 4 B</a:t>
                       </a:r>
                       <a:endParaRPr lang="LID4096" dirty="0"/>
                     </a:p>
@@ -22042,7 +22032,7 @@
                     <a:p>
                       <a:r>
                         <a:rPr lang="en-US" dirty="0"/>
-                        <a:t>64Kb</a:t>
+                        <a:t>64 KB</a:t>
                       </a:r>
                       <a:endParaRPr lang="LID4096" dirty="0"/>
                     </a:p>
@@ -22056,7 +22046,7 @@
                     <a:p>
                       <a:r>
                         <a:rPr lang="en-US" dirty="0"/>
-                        <a:t>96Kb</a:t>
+                        <a:t>96 KB</a:t>
                       </a:r>
                       <a:endParaRPr lang="LID4096" dirty="0"/>
                     </a:p>
@@ -22070,7 +22060,7 @@
                     <a:p>
                       <a:r>
                         <a:rPr lang="en-US" dirty="0"/>
-                        <a:t>164Kb</a:t>
+                        <a:t>164 KB</a:t>
                       </a:r>
                       <a:endParaRPr lang="LID4096" dirty="0"/>
                     </a:p>
@@ -22084,7 +22074,7 @@
                     <a:p>
                       <a:r>
                         <a:rPr lang="en-US" dirty="0"/>
-                        <a:t>228Kb</a:t>
+                        <a:t>228 KB</a:t>
                       </a:r>
                       <a:endParaRPr lang="LID4096" dirty="0"/>
                     </a:p>
@@ -22098,7 +22088,7 @@
                     <a:p>
                       <a:r>
                         <a:rPr lang="en-US" dirty="0"/>
-                        <a:t>256Kb</a:t>
+                        <a:t>256 KB</a:t>
                       </a:r>
                       <a:endParaRPr lang="LID4096" dirty="0"/>
                     </a:p>
@@ -22155,7 +22145,7 @@
                     <a:bodyPr/>
                     <a:lstStyle/>
                     <a:p>
-                      <a:endParaRPr lang="LID4096"/>
+                      <a:endParaRPr lang="LID4096" dirty="0"/>
                     </a:p>
                   </a:txBody>
                   <a:tcPr/>
@@ -22175,7 +22165,7 @@
                     <a:bodyPr/>
                     <a:lstStyle/>
                     <a:p>
-                      <a:endParaRPr lang="LID4096"/>
+                      <a:endParaRPr lang="LID4096" dirty="0"/>
                     </a:p>
                   </a:txBody>
                   <a:tcPr/>
@@ -22222,7 +22212,7 @@
                     <a:p>
                       <a:r>
                         <a:rPr lang="en-US" dirty="0"/>
-                        <a:t>128Kb</a:t>
+                        <a:t>128 KB</a:t>
                       </a:r>
                       <a:endParaRPr lang="LID4096" dirty="0"/>
                     </a:p>
@@ -22236,7 +22226,7 @@
                     <a:p>
                       <a:r>
                         <a:rPr lang="en-US" dirty="0"/>
-                        <a:t>192Kb</a:t>
+                        <a:t>192 KB</a:t>
                       </a:r>
                       <a:endParaRPr lang="LID4096" dirty="0"/>
                     </a:p>
@@ -22250,7 +22240,7 @@
                     <a:p>
                       <a:r>
                         <a:rPr lang="en-US" dirty="0"/>
-                        <a:t>256Kb</a:t>
+                        <a:t>256 KB</a:t>
                       </a:r>
                       <a:endParaRPr lang="LID4096" dirty="0"/>
                     </a:p>
@@ -22264,7 +22254,7 @@
                     <a:p>
                       <a:r>
                         <a:rPr lang="en-US" dirty="0"/>
-                        <a:t>256-288Kb</a:t>
+                        <a:t>256-288 KB</a:t>
                       </a:r>
                       <a:endParaRPr lang="LID4096" dirty="0"/>
                     </a:p>
@@ -22299,7 +22289,7 @@
                     <a:p>
                       <a:r>
                         <a:rPr lang="en-US" dirty="0"/>
-                        <a:t>8Kb</a:t>
+                        <a:t>8 KB</a:t>
                       </a:r>
                       <a:endParaRPr lang="LID4096" dirty="0"/>
                     </a:p>
@@ -22313,7 +22303,7 @@
                     <a:p>
                       <a:r>
                         <a:rPr lang="en-US" dirty="0"/>
-                        <a:t>8Kb</a:t>
+                        <a:t>8 KB</a:t>
                       </a:r>
                       <a:endParaRPr lang="LID4096" dirty="0"/>
                     </a:p>
@@ -22327,7 +22317,7 @@
                     <a:p>
                       <a:r>
                         <a:rPr lang="en-US" dirty="0"/>
-                        <a:t>8Kb</a:t>
+                        <a:t>8 KB</a:t>
                       </a:r>
                       <a:endParaRPr lang="LID4096" dirty="0"/>
                     </a:p>
@@ -22341,7 +22331,7 @@
                     <a:p>
                       <a:r>
                         <a:rPr lang="en-US" dirty="0"/>
-                        <a:t>8Kb</a:t>
+                        <a:t>8 KB</a:t>
                       </a:r>
                       <a:endParaRPr lang="LID4096" dirty="0"/>
                     </a:p>
@@ -22355,7 +22345,7 @@
                     <a:p>
                       <a:r>
                         <a:rPr lang="en-US" dirty="0"/>
-                        <a:t>8Kb</a:t>
+                        <a:t>8 KB</a:t>
                       </a:r>
                       <a:endParaRPr lang="LID4096" dirty="0"/>
                     </a:p>
@@ -22390,7 +22380,7 @@
                     <a:p>
                       <a:r>
                         <a:rPr lang="en-US" dirty="0"/>
-                        <a:t>4Mb</a:t>
+                        <a:t>4 MB</a:t>
                       </a:r>
                       <a:endParaRPr lang="LID4096" dirty="0"/>
                     </a:p>
@@ -22404,7 +22394,7 @@
                     <a:p>
                       <a:r>
                         <a:rPr lang="en-US" dirty="0"/>
-                        <a:t>6Mb</a:t>
+                        <a:t>6 MB</a:t>
                       </a:r>
                       <a:endParaRPr lang="LID4096" dirty="0"/>
                     </a:p>
@@ -22418,7 +22408,7 @@
                     <a:p>
                       <a:r>
                         <a:rPr lang="en-US" dirty="0"/>
-                        <a:t>40Mb</a:t>
+                        <a:t>40 MB</a:t>
                       </a:r>
                       <a:endParaRPr lang="LID4096" dirty="0"/>
                     </a:p>
@@ -22432,7 +22422,7 @@
                     <a:p>
                       <a:r>
                         <a:rPr lang="en-US" dirty="0"/>
-                        <a:t>50Mb</a:t>
+                        <a:t>50 MB</a:t>
                       </a:r>
                       <a:endParaRPr lang="LID4096" dirty="0"/>
                     </a:p>
@@ -22446,7 +22436,7 @@
                     <a:p>
                       <a:r>
                         <a:rPr lang="en-US" dirty="0"/>
-                        <a:t>126Mb</a:t>
+                        <a:t>126 MB</a:t>
                       </a:r>
                       <a:endParaRPr lang="LID4096" dirty="0"/>
                     </a:p>
@@ -22481,7 +22471,7 @@
                     <a:p>
                       <a:r>
                         <a:rPr lang="en-US" dirty="0"/>
-                        <a:t>16Gb</a:t>
+                        <a:t>16 GB</a:t>
                       </a:r>
                       <a:endParaRPr lang="LID4096" dirty="0"/>
                     </a:p>
@@ -22495,7 +22485,7 @@
                     <a:p>
                       <a:r>
                         <a:rPr lang="en-US" dirty="0"/>
-                        <a:t>32Gb</a:t>
+                        <a:t>32 GB</a:t>
                       </a:r>
                       <a:endParaRPr lang="LID4096" dirty="0"/>
                     </a:p>
@@ -22509,7 +22499,7 @@
                     <a:p>
                       <a:r>
                         <a:rPr lang="en-US" dirty="0"/>
-                        <a:t>80Gb</a:t>
+                        <a:t>80 GB</a:t>
                       </a:r>
                       <a:endParaRPr lang="LID4096" dirty="0"/>
                     </a:p>
@@ -22523,7 +22513,7 @@
                     <a:p>
                       <a:r>
                         <a:rPr lang="en-US" dirty="0"/>
-                        <a:t>80Gb</a:t>
+                        <a:t>80 GB</a:t>
                       </a:r>
                       <a:endParaRPr lang="LID4096" dirty="0"/>
                     </a:p>
@@ -22537,7 +22527,7 @@
                     <a:p>
                       <a:r>
                         <a:rPr lang="en-US" dirty="0"/>
-                        <a:t>180Gb</a:t>
+                        <a:t>180 GB</a:t>
                       </a:r>
                       <a:endParaRPr lang="LID4096" dirty="0"/>
                     </a:p>

--- a/gpu_programming.pptx
+++ b/gpu_programming.pptx
@@ -7940,7 +7940,7 @@
         <p:spPr>
           <a:xfrm>
             <a:off x="6411951" y="2843561"/>
-            <a:ext cx="1491370" cy="369332"/>
+            <a:ext cx="2249590" cy="369332"/>
           </a:xfrm>
           <a:prstGeom prst="rect">
             <a:avLst/>
@@ -7955,7 +7955,7 @@
           <a:p>
             <a:r>
               <a:rPr lang="en-US" dirty="0"/>
-              <a:t>E.g., for A100</a:t>
+              <a:t>E.g., for NVIDIA A100</a:t>
             </a:r>
             <a:endParaRPr lang="LID4096" dirty="0"/>
           </a:p>
@@ -9265,20 +9265,14 @@
                     <a:lstStyle/>
                     <a:p>
                       <a:r>
-                        <a:rPr lang="en-US"/>
+                        <a:rPr lang="en-US" dirty="0"/>
                         <a:t>256 K </a:t>
-                      </a:r>
-                      <a:r>
-                        <a:rPr lang="en-US">
-                          <a:sym typeface="Symbol" panose="05050102010706020507" pitchFamily="18" charset="2"/>
-                        </a:rPr>
-                        <a:t> 4 B </a:t>
                       </a:r>
                       <a:r>
                         <a:rPr lang="en-US" dirty="0">
                           <a:sym typeface="Symbol" panose="05050102010706020507" pitchFamily="18" charset="2"/>
                         </a:rPr>
-                        <a:t>per SM</a:t>
+                        <a:t> 4 B per SM</a:t>
                       </a:r>
                       <a:endParaRPr lang="LID4096" dirty="0"/>
                     </a:p>

--- a/gpu_programming.pptx
+++ b/gpu_programming.pptx
@@ -9071,7 +9071,7 @@
             <p:ph idx="1"/>
             <p:extLst>
               <p:ext uri="{D42A27DB-BD31-4B8C-83A1-F6EECF244321}">
-                <p14:modId xmlns:p14="http://schemas.microsoft.com/office/powerpoint/2010/main" val="1569963829"/>
+                <p14:modId xmlns:p14="http://schemas.microsoft.com/office/powerpoint/2010/main" val="99715657"/>
               </p:ext>
             </p:extLst>
           </p:nvPr>
@@ -9266,7 +9266,7 @@
                     <a:p>
                       <a:r>
                         <a:rPr lang="en-US" dirty="0"/>
-                        <a:t>256 K </a:t>
+                        <a:t>64 K </a:t>
                       </a:r>
                       <a:r>
                         <a:rPr lang="en-US" dirty="0">
@@ -21699,7 +21699,7 @@
             <p:ph idx="1"/>
             <p:extLst>
               <p:ext uri="{D42A27DB-BD31-4B8C-83A1-F6EECF244321}">
-                <p14:modId xmlns:p14="http://schemas.microsoft.com/office/powerpoint/2010/main" val="2286944672"/>
+                <p14:modId xmlns:p14="http://schemas.microsoft.com/office/powerpoint/2010/main" val="1239872096"/>
               </p:ext>
             </p:extLst>
           </p:nvPr>
@@ -21911,7 +21911,7 @@
                     <a:p>
                       <a:r>
                         <a:rPr lang="en-US" dirty="0"/>
-                        <a:t>256 K </a:t>
+                        <a:t>64 K </a:t>
                       </a:r>
                       <a:r>
                         <a:rPr lang="en-US" dirty="0">
@@ -21948,7 +21948,7 @@
                       </a:pPr>
                       <a:r>
                         <a:rPr lang="en-US" dirty="0"/>
-                        <a:t>256 K </a:t>
+                        <a:t>64 K </a:t>
                       </a:r>
                       <a:r>
                         <a:rPr lang="en-US" dirty="0">
@@ -21985,7 +21985,7 @@
                       </a:pPr>
                       <a:r>
                         <a:rPr lang="en-US" dirty="0"/>
-                        <a:t>256 K </a:t>
+                        <a:t>64 K </a:t>
                       </a:r>
                       <a:r>
                         <a:rPr lang="en-US" dirty="0">

--- a/gpu_programming.pptx
+++ b/gpu_programming.pptx
@@ -8530,7 +8530,7 @@
             </a:br>
             <a:r>
               <a:rPr lang="en-US" dirty="0"/>
-              <a:t>64 FP32 instructions/SM </a:t>
+              <a:t>64 FP32 lanes/SM </a:t>
             </a:r>
             <a:r>
               <a:rPr lang="en-US" dirty="0">
@@ -8540,7 +8540,34 @@
             </a:r>
             <a:r>
               <a:rPr lang="en-US" dirty="0"/>
-              <a:t> number SMs = 6,912 FLOP/cycle</a:t>
+              <a:t> 2FLOPS/FMA </a:t>
+            </a:r>
+            <a:r>
+              <a:rPr lang="en-US" dirty="0">
+                <a:sym typeface="Symbol" panose="05050102010706020507" pitchFamily="18" charset="2"/>
+              </a:rPr>
+              <a:t></a:t>
+            </a:r>
+            <a:r>
+              <a:rPr lang="en-US" dirty="0"/>
+              <a:t> number SMs</a:t>
+            </a:r>
+            <a:br>
+              <a:rPr lang="en-US" dirty="0"/>
+            </a:br>
+            <a:r>
+              <a:rPr lang="en-US" dirty="0"/>
+              <a:t>= 13,824 FLOP/cycle </a:t>
+            </a:r>
+            <a:r>
+              <a:rPr lang="en-US" dirty="0">
+                <a:sym typeface="Symbol" panose="05050102010706020507" pitchFamily="18" charset="2"/>
+              </a:rPr>
+              <a:t></a:t>
+            </a:r>
+            <a:r>
+              <a:rPr lang="en-US" dirty="0"/>
+              <a:t> 19.5 TFLOP/s</a:t>
             </a:r>
           </a:p>
           <a:p>
@@ -8591,7 +8618,7 @@
         </p:nvGrpSpPr>
         <p:grpSpPr>
           <a:xfrm>
-            <a:off x="6096000" y="5331337"/>
+            <a:off x="7269941" y="5241644"/>
             <a:ext cx="4083859" cy="935319"/>
             <a:chOff x="4092498" y="4734412"/>
             <a:chExt cx="4083859" cy="935319"/>
@@ -10167,7 +10194,7 @@
             </a:r>
             <a:r>
               <a:rPr lang="en-US" dirty="0"/>
-              <a:t> lanes/GPU </a:t>
+              <a:t> link/GPU </a:t>
             </a:r>
             <a:r>
               <a:rPr lang="en-US" dirty="0">
@@ -10177,14 +10204,14 @@
             </a:r>
             <a:r>
               <a:rPr lang="en-US" dirty="0"/>
-              <a:t> 4 lanes to each GPU</a:t>
+              <a:t> 4 links to each GPU</a:t>
             </a:r>
           </a:p>
           <a:p>
             <a:pPr lvl="2"/>
             <a:r>
               <a:rPr lang="en-US" dirty="0"/>
-              <a:t>50 GB/s/lane (bi-directional) </a:t>
+              <a:t>50 GB/s/link (bi-directional) </a:t>
             </a:r>
             <a:r>
               <a:rPr lang="en-US" dirty="0">
@@ -17397,7 +17424,7 @@
         <p:spPr/>
         <p:txBody>
           <a:bodyPr>
-            <a:normAutofit fontScale="77500" lnSpcReduction="20000"/>
+            <a:normAutofit fontScale="70000" lnSpcReduction="20000"/>
           </a:bodyPr>
           <a:lstStyle/>
           <a:p>
@@ -17443,7 +17470,7 @@
             <a:pPr lvl="1"/>
             <a:r>
               <a:rPr lang="en-US" dirty="0"/>
-              <a:t>At most 32 warps</a:t>
+              <a:t>At most 64 warps resident on SM</a:t>
             </a:r>
           </a:p>
           <a:p>
@@ -17459,7 +17486,7 @@
             </a:r>
             <a:r>
               <a:rPr lang="en-US" dirty="0"/>
-              <a:t> 4 warp instructions/cycle</a:t>
+              <a:t> at most 4 warp instructions/cycle</a:t>
             </a:r>
           </a:p>
           <a:p>
@@ -17474,6 +17501,13 @@
             <a:r>
               <a:rPr lang="en-US" dirty="0"/>
               <a:t>Picked from ready warps</a:t>
+            </a:r>
+          </a:p>
+          <a:p>
+            <a:pPr lvl="1"/>
+            <a:r>
+              <a:rPr lang="en-US" dirty="0"/>
+              <a:t>Number of instructions depends on pipelines used</a:t>
             </a:r>
           </a:p>
           <a:p>
@@ -17600,7 +17634,7 @@
         <p:spPr>
           <a:xfrm>
             <a:off x="7842770" y="1870075"/>
-            <a:ext cx="3721981" cy="830997"/>
+            <a:ext cx="3685111" cy="830997"/>
           </a:xfrm>
           <a:prstGeom prst="rect">
             <a:avLst/>
@@ -17620,7 +17654,7 @@
           <a:p>
             <a:r>
               <a:rPr lang="en-US" sz="2400" dirty="0"/>
-              <a:t>Numbers for NVIDIA H100,</a:t>
+              <a:t>Numbers for NVIDIA A100,</a:t>
             </a:r>
             <a:br>
               <a:rPr lang="en-US" sz="2400" dirty="0"/>
@@ -18030,33 +18064,15 @@
                                   </p:childTnLst>
                                 </p:cTn>
                               </p:par>
-                            </p:childTnLst>
-                          </p:cTn>
-                        </p:par>
-                      </p:childTnLst>
-                    </p:cTn>
-                  </p:par>
-                  <p:par>
-                    <p:cTn id="31" fill="hold">
-                      <p:stCondLst>
-                        <p:cond delay="indefinite"/>
-                      </p:stCondLst>
-                      <p:childTnLst>
-                        <p:par>
-                          <p:cTn id="32" fill="hold">
-                            <p:stCondLst>
-                              <p:cond delay="0"/>
-                            </p:stCondLst>
-                            <p:childTnLst>
                               <p:par>
-                                <p:cTn id="33" presetID="1" presetClass="entr" presetSubtype="0" fill="hold" grpId="0" nodeType="clickEffect">
+                                <p:cTn id="31" presetID="1" presetClass="entr" presetSubtype="0" fill="hold" grpId="0" nodeType="withEffect">
                                   <p:stCondLst>
                                     <p:cond delay="0"/>
                                   </p:stCondLst>
                                   <p:childTnLst>
                                     <p:set>
                                       <p:cBhvr>
-                                        <p:cTn id="34" dur="1" fill="hold">
+                                        <p:cTn id="32" dur="1" fill="hold">
                                           <p:stCondLst>
                                             <p:cond delay="0"/>
                                           </p:stCondLst>
@@ -18079,8 +18095,26 @@
                                   </p:childTnLst>
                                 </p:cTn>
                               </p:par>
+                            </p:childTnLst>
+                          </p:cTn>
+                        </p:par>
+                      </p:childTnLst>
+                    </p:cTn>
+                  </p:par>
+                  <p:par>
+                    <p:cTn id="33" fill="hold">
+                      <p:stCondLst>
+                        <p:cond delay="indefinite"/>
+                      </p:stCondLst>
+                      <p:childTnLst>
+                        <p:par>
+                          <p:cTn id="34" fill="hold">
+                            <p:stCondLst>
+                              <p:cond delay="0"/>
+                            </p:stCondLst>
+                            <p:childTnLst>
                               <p:par>
-                                <p:cTn id="35" presetID="1" presetClass="entr" presetSubtype="0" fill="hold" grpId="0" nodeType="withEffect">
+                                <p:cTn id="35" presetID="1" presetClass="entr" presetSubtype="0" fill="hold" grpId="0" nodeType="clickEffect">
                                   <p:stCondLst>
                                     <p:cond delay="0"/>
                                   </p:stCondLst>
@@ -18172,6 +18206,37 @@
                                   </p:childTnLst>
                                 </p:cTn>
                               </p:par>
+                              <p:par>
+                                <p:cTn id="41" presetID="1" presetClass="entr" presetSubtype="0" fill="hold" grpId="0" nodeType="withEffect">
+                                  <p:stCondLst>
+                                    <p:cond delay="0"/>
+                                  </p:stCondLst>
+                                  <p:childTnLst>
+                                    <p:set>
+                                      <p:cBhvr>
+                                        <p:cTn id="42" dur="1" fill="hold">
+                                          <p:stCondLst>
+                                            <p:cond delay="0"/>
+                                          </p:stCondLst>
+                                        </p:cTn>
+                                        <p:tgtEl>
+                                          <p:spTgt spid="3">
+                                            <p:txEl>
+                                              <p:pRg st="14" end="14"/>
+                                            </p:txEl>
+                                          </p:spTgt>
+                                        </p:tgtEl>
+                                        <p:attrNameLst>
+                                          <p:attrName>style.visibility</p:attrName>
+                                        </p:attrNameLst>
+                                      </p:cBhvr>
+                                      <p:to>
+                                        <p:strVal val="visible"/>
+                                      </p:to>
+                                    </p:set>
+                                  </p:childTnLst>
+                                </p:cTn>
+                              </p:par>
                             </p:childTnLst>
                           </p:cTn>
                         </p:par>
@@ -18179,26 +18244,26 @@
                     </p:cTn>
                   </p:par>
                   <p:par>
-                    <p:cTn id="41" fill="hold">
+                    <p:cTn id="43" fill="hold">
                       <p:stCondLst>
                         <p:cond delay="indefinite"/>
                       </p:stCondLst>
                       <p:childTnLst>
                         <p:par>
-                          <p:cTn id="42" fill="hold">
+                          <p:cTn id="44" fill="hold">
                             <p:stCondLst>
                               <p:cond delay="0"/>
                             </p:stCondLst>
                             <p:childTnLst>
                               <p:par>
-                                <p:cTn id="43" presetID="1" presetClass="entr" presetSubtype="0" fill="hold" grpId="0" nodeType="clickEffect">
+                                <p:cTn id="45" presetID="1" presetClass="entr" presetSubtype="0" fill="hold" grpId="0" nodeType="clickEffect">
                                   <p:stCondLst>
                                     <p:cond delay="0"/>
                                   </p:stCondLst>
                                   <p:childTnLst>
                                     <p:set>
                                       <p:cBhvr>
-                                        <p:cTn id="44" dur="1" fill="hold">
+                                        <p:cTn id="46" dur="1" fill="hold">
                                           <p:stCondLst>
                                             <p:cond delay="0"/>
                                           </p:stCondLst>
@@ -21699,7 +21764,7 @@
             <p:ph idx="1"/>
             <p:extLst>
               <p:ext uri="{D42A27DB-BD31-4B8C-83A1-F6EECF244321}">
-                <p14:modId xmlns:p14="http://schemas.microsoft.com/office/powerpoint/2010/main" val="1239872096"/>
+                <p14:modId xmlns:p14="http://schemas.microsoft.com/office/powerpoint/2010/main" val="910326922"/>
               </p:ext>
             </p:extLst>
           </p:nvPr>
@@ -22081,8 +22146,12 @@
                     <a:lstStyle/>
                     <a:p>
                       <a:r>
+                        <a:rPr lang="en-US"/>
+                        <a:t>228 </a:t>
+                      </a:r>
+                      <a:r>
                         <a:rPr lang="en-US" dirty="0"/>
-                        <a:t>256 KB</a:t>
+                        <a:t>KB</a:t>
                       </a:r>
                       <a:endParaRPr lang="LID4096" dirty="0"/>
                     </a:p>
@@ -22117,7 +22186,7 @@
                     <a:p>
                       <a:r>
                         <a:rPr lang="en-US" dirty="0"/>
-                        <a:t>24Kb</a:t>
+                        <a:t>24 KB</a:t>
                       </a:r>
                       <a:endParaRPr lang="LID4096" dirty="0"/>
                     </a:p>
@@ -22248,7 +22317,7 @@
                     <a:p>
                       <a:r>
                         <a:rPr lang="en-US" dirty="0"/>
-                        <a:t>256-288 KB</a:t>
+                        <a:t>256 KB</a:t>
                       </a:r>
                       <a:endParaRPr lang="LID4096" dirty="0"/>
                     </a:p>
@@ -24167,6 +24236,14 @@
             </a:r>
             <a:r>
               <a:rPr lang="en-US" dirty="0"/>
+              <a:t>/</a:t>
+            </a:r>
+            <a:r>
+              <a:rPr lang="en-US" dirty="0" err="1"/>
+              <a:t>NVSwitch</a:t>
+            </a:r>
+            <a:r>
+              <a:rPr lang="en-US" dirty="0"/>
               <a:t> &amp; PCIe</a:t>
             </a:r>
             <a:endParaRPr lang="LID4096" dirty="0"/>
@@ -24189,14 +24266,14 @@
             <p:ph idx="1"/>
             <p:extLst>
               <p:ext uri="{D42A27DB-BD31-4B8C-83A1-F6EECF244321}">
-                <p14:modId xmlns:p14="http://schemas.microsoft.com/office/powerpoint/2010/main" val="4108829723"/>
+                <p14:modId xmlns:p14="http://schemas.microsoft.com/office/powerpoint/2010/main" val="3792309018"/>
               </p:ext>
             </p:extLst>
           </p:nvPr>
         </p:nvGraphicFramePr>
         <p:xfrm>
           <a:off x="1491475" y="1937137"/>
-          <a:ext cx="9209050" cy="2225040"/>
+          <a:ext cx="9209050" cy="2494280"/>
         </p:xfrm>
         <a:graphic>
           <a:graphicData uri="http://schemas.openxmlformats.org/drawingml/2006/table">
@@ -24272,6 +24349,13 @@
                         <a:rPr lang="en-US" dirty="0"/>
                         <a:t>GPU-GPU bandwidth (GB/s)</a:t>
                       </a:r>
+                      <a:br>
+                        <a:rPr lang="en-US" dirty="0"/>
+                      </a:br>
+                      <a:r>
+                        <a:rPr lang="en-US" dirty="0"/>
+                        <a:t>each way</a:t>
+                      </a:r>
                       <a:endParaRPr lang="LID4096" dirty="0"/>
                     </a:p>
                   </a:txBody>
@@ -24285,6 +24369,13 @@
                       <a:r>
                         <a:rPr lang="en-US" dirty="0"/>
                         <a:t>PCIe bandwidth (GB/s)</a:t>
+                      </a:r>
+                      <a:br>
+                        <a:rPr lang="en-US" dirty="0"/>
+                      </a:br>
+                      <a:r>
+                        <a:rPr lang="en-US" dirty="0"/>
+                        <a:t>each way</a:t>
                       </a:r>
                       <a:endParaRPr lang="LID4096" dirty="0"/>
                     </a:p>
@@ -24333,7 +24424,7 @@
                     <a:p>
                       <a:r>
                         <a:rPr lang="en-US" dirty="0"/>
-                        <a:t>40 to 80 (non-uniform)</a:t>
+                        <a:t>20 to 40 (non-uniform)</a:t>
                       </a:r>
                       <a:endParaRPr lang="LID4096" dirty="0"/>
                     </a:p>
@@ -24347,7 +24438,7 @@
                     <a:p>
                       <a:r>
                         <a:rPr lang="en-US" dirty="0"/>
-                        <a:t>32</a:t>
+                        <a:t>16</a:t>
                       </a:r>
                       <a:endParaRPr lang="LID4096" dirty="0"/>
                     </a:p>
@@ -24396,7 +24487,7 @@
                     <a:p>
                       <a:r>
                         <a:rPr lang="en-US" dirty="0"/>
-                        <a:t>50 (non-uniform)</a:t>
+                        <a:t>25 (non-uniform)</a:t>
                       </a:r>
                       <a:endParaRPr lang="LID4096" dirty="0"/>
                     </a:p>
@@ -24410,7 +24501,7 @@
                     <a:p>
                       <a:r>
                         <a:rPr lang="en-US" dirty="0"/>
-                        <a:t>32</a:t>
+                        <a:t>16</a:t>
                       </a:r>
                       <a:endParaRPr lang="LID4096" dirty="0"/>
                     </a:p>
@@ -24459,7 +24550,7 @@
                     <a:p>
                       <a:r>
                         <a:rPr lang="en-US" dirty="0"/>
-                        <a:t>200</a:t>
+                        <a:t>100</a:t>
                       </a:r>
                       <a:endParaRPr lang="LID4096" dirty="0"/>
                     </a:p>
@@ -24473,7 +24564,7 @@
                     <a:p>
                       <a:r>
                         <a:rPr lang="en-US" dirty="0"/>
-                        <a:t>64</a:t>
+                        <a:t>32</a:t>
                       </a:r>
                       <a:endParaRPr lang="LID4096" dirty="0"/>
                     </a:p>
@@ -24522,7 +24613,7 @@
                     <a:p>
                       <a:r>
                         <a:rPr lang="en-US" dirty="0"/>
-                        <a:t>300</a:t>
+                        <a:t>150</a:t>
                       </a:r>
                       <a:endParaRPr lang="LID4096" dirty="0"/>
                     </a:p>
@@ -24536,7 +24627,7 @@
                     <a:p>
                       <a:r>
                         <a:rPr lang="en-US" dirty="0"/>
-                        <a:t>128</a:t>
+                        <a:t>64</a:t>
                       </a:r>
                       <a:endParaRPr lang="LID4096" dirty="0"/>
                     </a:p>
@@ -24585,7 +24676,7 @@
                     <a:p>
                       <a:r>
                         <a:rPr lang="en-US" dirty="0"/>
-                        <a:t>600</a:t>
+                        <a:t>900</a:t>
                       </a:r>
                       <a:endParaRPr lang="LID4096" dirty="0"/>
                     </a:p>
@@ -24599,7 +24690,7 @@
                     <a:p>
                       <a:r>
                         <a:rPr lang="en-US" dirty="0"/>
-                        <a:t>128</a:t>
+                        <a:t>64</a:t>
                       </a:r>
                       <a:endParaRPr lang="LID4096" dirty="0"/>
                     </a:p>

--- a/gpu_programming.pptx
+++ b/gpu_programming.pptx
@@ -12914,7 +12914,7 @@
           <a:p>
             <a:r>
               <a:rPr lang="en-US" dirty="0"/>
-              <a:t>Memory management</a:t>
+              <a:t>Data placement</a:t>
             </a:r>
             <a:endParaRPr lang="LID4096" dirty="0"/>
           </a:p>
@@ -12936,44 +12936,55 @@
             <p:ph idx="1"/>
           </p:nvPr>
         </p:nvSpPr>
-        <p:spPr/>
+        <p:spPr>
+          <a:xfrm>
+            <a:off x="828368" y="3790813"/>
+            <a:ext cx="10515600" cy="2386150"/>
+          </a:xfrm>
+        </p:spPr>
         <p:txBody>
           <a:bodyPr>
-            <a:normAutofit fontScale="92500" lnSpcReduction="20000"/>
+            <a:normAutofit lnSpcReduction="10000"/>
           </a:bodyPr>
           <a:lstStyle/>
           <a:p>
             <a:r>
               <a:rPr lang="en-US" dirty="0"/>
-              <a:t>Explicit memory management</a:t>
+              <a:t>Making data available</a:t>
             </a:r>
           </a:p>
           <a:p>
             <a:pPr lvl="1"/>
             <a:r>
               <a:rPr lang="en-US" dirty="0"/>
-              <a:t>Memory allocation/deallocation</a:t>
+              <a:t>Explicit copy</a:t>
             </a:r>
           </a:p>
           <a:p>
             <a:pPr lvl="1"/>
             <a:r>
               <a:rPr lang="en-US" dirty="0"/>
-              <a:t>Host versus device addresses</a:t>
+              <a:t>Run-time managed migration</a:t>
             </a:r>
           </a:p>
           <a:p>
             <a:pPr lvl="1"/>
             <a:r>
               <a:rPr lang="en-US" dirty="0"/>
-              <a:t>Explicit  copy</a:t>
-            </a:r>
-          </a:p>
-          <a:p>
-            <a:pPr lvl="2"/>
+              <a:t>Coherent direct/remote access</a:t>
+            </a:r>
+          </a:p>
+          <a:p>
             <a:r>
               <a:rPr lang="en-US" dirty="0"/>
-              <a:t>Host </a:t>
+              <a:t>Correctness:</a:t>
+            </a:r>
+            <a:br>
+              <a:rPr lang="en-US" dirty="0"/>
+            </a:br>
+            <a:r>
+              <a:rPr lang="en-US" dirty="0"/>
+              <a:t>producer </a:t>
             </a:r>
             <a:r>
               <a:rPr lang="en-US" dirty="0">
@@ -12983,14 +12994,7 @@
             </a:r>
             <a:r>
               <a:rPr lang="en-US" dirty="0"/>
-              <a:t> device</a:t>
-            </a:r>
-          </a:p>
-          <a:p>
-            <a:pPr lvl="2"/>
-            <a:r>
-              <a:rPr lang="en-US" dirty="0"/>
-              <a:t>Device </a:t>
+              <a:t> dependency/synchronization </a:t>
             </a:r>
             <a:r>
               <a:rPr lang="en-US" dirty="0">
@@ -13000,69 +13004,7 @@
             </a:r>
             <a:r>
               <a:rPr lang="en-US" dirty="0"/>
-              <a:t> host</a:t>
-            </a:r>
-          </a:p>
-          <a:p>
-            <a:pPr lvl="2"/>
-            <a:r>
-              <a:rPr lang="en-US" dirty="0"/>
-              <a:t>Device </a:t>
-            </a:r>
-            <a:r>
-              <a:rPr lang="en-US" dirty="0">
-                <a:sym typeface="Symbol" panose="05050102010706020507" pitchFamily="18" charset="2"/>
-              </a:rPr>
-              <a:t>  </a:t>
-            </a:r>
-            <a:r>
-              <a:rPr lang="en-US" dirty="0"/>
-              <a:t>device</a:t>
-            </a:r>
-          </a:p>
-          <a:p>
-            <a:pPr lvl="1"/>
-            <a:r>
-              <a:rPr lang="en-US" dirty="0"/>
-              <a:t>Explicit synchronization</a:t>
-            </a:r>
-          </a:p>
-          <a:p>
-            <a:pPr lvl="1"/>
-            <a:endParaRPr lang="en-US" dirty="0"/>
-          </a:p>
-          <a:p>
-            <a:r>
-              <a:rPr lang="en-US" dirty="0"/>
-              <a:t>Unified memory management</a:t>
-            </a:r>
-          </a:p>
-          <a:p>
-            <a:pPr lvl="1"/>
-            <a:r>
-              <a:rPr lang="en-US" dirty="0"/>
-              <a:t>Memory allocation/deallocation </a:t>
-            </a:r>
-          </a:p>
-          <a:p>
-            <a:pPr lvl="1"/>
-            <a:r>
-              <a:rPr lang="en-US" dirty="0"/>
-              <a:t>Single address space</a:t>
-            </a:r>
-          </a:p>
-          <a:p>
-            <a:pPr lvl="1"/>
-            <a:r>
-              <a:rPr lang="en-US" dirty="0"/>
-              <a:t>Implicit data migration (page fault/page copy)</a:t>
-            </a:r>
-          </a:p>
-          <a:p>
-            <a:pPr lvl="1"/>
-            <a:r>
-              <a:rPr lang="en-US" dirty="0"/>
-              <a:t>Explicit synchronization</a:t>
+              <a:t> consumer</a:t>
             </a:r>
             <a:endParaRPr lang="LID4096" dirty="0"/>
           </a:p>
@@ -13111,10 +13053,10 @@
         </p:nvGrpSpPr>
         <p:grpSpPr>
           <a:xfrm>
-            <a:off x="6779941" y="1913153"/>
-            <a:ext cx="4252047" cy="1304651"/>
-            <a:chOff x="6779941" y="1913153"/>
-            <a:chExt cx="4252047" cy="1304651"/>
+            <a:off x="6835812" y="3611426"/>
+            <a:ext cx="4306303" cy="1236096"/>
+            <a:chOff x="6779941" y="1981708"/>
+            <a:chExt cx="4306303" cy="1236096"/>
           </a:xfrm>
         </p:grpSpPr>
         <p:sp>
@@ -13132,7 +13074,7 @@
           <p:spPr>
             <a:xfrm>
               <a:off x="6779941" y="2263697"/>
-              <a:ext cx="3968972" cy="954107"/>
+              <a:ext cx="3886577" cy="954107"/>
             </a:xfrm>
             <a:prstGeom prst="rect">
               <a:avLst/>
@@ -13152,14 +13094,13 @@
             <a:p>
               <a:r>
                 <a:rPr lang="en-US" sz="2800" dirty="0"/>
-                <a:t>More control, potentially</a:t>
+                <a:t>Physical placement</a:t>
               </a:r>
-              <a:br>
-                <a:rPr lang="en-US" sz="2800" dirty="0"/>
-              </a:br>
+            </a:p>
+            <a:p>
               <a:r>
                 <a:rPr lang="en-US" sz="2800" dirty="0"/>
-                <a:t>better performance</a:t>
+                <a:t>influences performance</a:t>
               </a:r>
               <a:endParaRPr lang="LID4096" sz="2800" dirty="0"/>
             </a:p>
@@ -13193,7 +13134,7 @@
           </p:blipFill>
           <p:spPr>
             <a:xfrm>
-              <a:off x="10465837" y="1913153"/>
+              <a:off x="10520093" y="1981708"/>
               <a:ext cx="566151" cy="566151"/>
             </a:xfrm>
             <a:prstGeom prst="rect">
@@ -13204,10 +13145,10 @@
       </p:grpSp>
       <p:sp>
         <p:nvSpPr>
-          <p:cNvPr id="8" name="Rectangle: Rounded Corners 7">
+          <p:cNvPr id="10" name="Rectangle: Rounded Corners 9">
             <a:extLst>
               <a:ext uri="{FF2B5EF4-FFF2-40B4-BE49-F238E27FC236}">
-                <a16:creationId xmlns:a16="http://schemas.microsoft.com/office/drawing/2014/main" id="{8A8F5C80-A544-0FC0-1FB4-9858900E196E}"/>
+                <a16:creationId xmlns:a16="http://schemas.microsoft.com/office/drawing/2014/main" id="{A18C2E28-5205-4A99-8C35-BCFF7BF25C57}"/>
               </a:ext>
             </a:extLst>
           </p:cNvPr>
@@ -13216,22 +13157,62 @@
         </p:nvSpPr>
         <p:spPr>
           <a:xfrm>
-            <a:off x="1550019" y="5754030"/>
-            <a:ext cx="2977375" cy="312233"/>
+            <a:off x="847837" y="1957304"/>
+            <a:ext cx="1140541" cy="481781"/>
           </a:xfrm>
           <a:prstGeom prst="roundRect">
             <a:avLst/>
           </a:prstGeom>
-          <a:solidFill>
-            <a:srgbClr val="FF0000">
-              <a:alpha val="44000"/>
-            </a:srgbClr>
-          </a:solidFill>
-          <a:ln>
-            <a:solidFill>
-              <a:srgbClr val="FF0000"/>
-            </a:solidFill>
-          </a:ln>
+        </p:spPr>
+        <p:style>
+          <a:lnRef idx="2">
+            <a:schemeClr val="accent2">
+              <a:shade val="15000"/>
+            </a:schemeClr>
+          </a:lnRef>
+          <a:fillRef idx="1">
+            <a:schemeClr val="accent2"/>
+          </a:fillRef>
+          <a:effectRef idx="0">
+            <a:schemeClr val="accent2"/>
+          </a:effectRef>
+          <a:fontRef idx="minor">
+            <a:schemeClr val="lt1"/>
+          </a:fontRef>
+        </p:style>
+        <p:txBody>
+          <a:bodyPr rtlCol="0" anchor="ctr"/>
+          <a:lstStyle/>
+          <a:p>
+            <a:pPr algn="ctr"/>
+            <a:r>
+              <a:rPr lang="en-US" dirty="0"/>
+              <a:t>CPU</a:t>
+            </a:r>
+            <a:endParaRPr lang="LID4096" dirty="0"/>
+          </a:p>
+        </p:txBody>
+      </p:sp>
+      <p:sp>
+        <p:nvSpPr>
+          <p:cNvPr id="11" name="Rectangle: Rounded Corners 10">
+            <a:extLst>
+              <a:ext uri="{FF2B5EF4-FFF2-40B4-BE49-F238E27FC236}">
+                <a16:creationId xmlns:a16="http://schemas.microsoft.com/office/drawing/2014/main" id="{41A2B143-13C3-A523-0B20-8BAD1D9A6E10}"/>
+              </a:ext>
+            </a:extLst>
+          </p:cNvPr>
+          <p:cNvSpPr/>
+          <p:nvPr/>
+        </p:nvSpPr>
+        <p:spPr>
+          <a:xfrm>
+            <a:off x="2622626" y="1870076"/>
+            <a:ext cx="1789469" cy="656236"/>
+          </a:xfrm>
+          <a:prstGeom prst="roundRect">
+            <a:avLst/>
+          </a:prstGeom>
         </p:spPr>
         <p:style>
           <a:lnRef idx="2">
@@ -13254,16 +13235,58 @@
           <a:lstStyle/>
           <a:p>
             <a:pPr algn="ctr"/>
-            <a:endParaRPr lang="LID4096"/>
+            <a:r>
+              <a:rPr lang="en-US" dirty="0"/>
+              <a:t>Host-attached memory</a:t>
+            </a:r>
+            <a:endParaRPr lang="LID4096" dirty="0"/>
           </a:p>
         </p:txBody>
       </p:sp>
+      <p:cxnSp>
+        <p:nvCxnSpPr>
+          <p:cNvPr id="12" name="Straight Connector 11">
+            <a:extLst>
+              <a:ext uri="{FF2B5EF4-FFF2-40B4-BE49-F238E27FC236}">
+                <a16:creationId xmlns:a16="http://schemas.microsoft.com/office/drawing/2014/main" id="{A0B8E717-008A-A058-AA25-76AD833C06E1}"/>
+              </a:ext>
+            </a:extLst>
+          </p:cNvPr>
+          <p:cNvCxnSpPr>
+            <a:cxnSpLocks/>
+          </p:cNvCxnSpPr>
+          <p:nvPr/>
+        </p:nvCxnSpPr>
+        <p:spPr>
+          <a:xfrm flipH="1">
+            <a:off x="1988378" y="2154581"/>
+            <a:ext cx="634248" cy="1"/>
+          </a:xfrm>
+          <a:prstGeom prst="line">
+            <a:avLst/>
+          </a:prstGeom>
+        </p:spPr>
+        <p:style>
+          <a:lnRef idx="2">
+            <a:schemeClr val="accent1"/>
+          </a:lnRef>
+          <a:fillRef idx="0">
+            <a:schemeClr val="accent1"/>
+          </a:fillRef>
+          <a:effectRef idx="1">
+            <a:schemeClr val="accent1"/>
+          </a:effectRef>
+          <a:fontRef idx="minor">
+            <a:schemeClr val="tx1"/>
+          </a:fontRef>
+        </p:style>
+      </p:cxnSp>
       <p:sp>
         <p:nvSpPr>
-          <p:cNvPr id="9" name="Rectangle: Rounded Corners 8">
+          <p:cNvPr id="18" name="Rectangle: Rounded Corners 17">
             <a:extLst>
               <a:ext uri="{FF2B5EF4-FFF2-40B4-BE49-F238E27FC236}">
-                <a16:creationId xmlns:a16="http://schemas.microsoft.com/office/drawing/2014/main" id="{E7A8C194-A20D-DCC5-2FD5-6F69B174B5F1}"/>
+                <a16:creationId xmlns:a16="http://schemas.microsoft.com/office/drawing/2014/main" id="{1D67C01E-C834-07BD-6BBA-82FABBBFF1BB}"/>
               </a:ext>
             </a:extLst>
           </p:cNvPr>
@@ -13272,22 +13295,12 @@
         </p:nvSpPr>
         <p:spPr>
           <a:xfrm>
-            <a:off x="1550019" y="4847064"/>
-            <a:ext cx="3980986" cy="312233"/>
+            <a:off x="5046343" y="1870076"/>
+            <a:ext cx="1789469" cy="656236"/>
           </a:xfrm>
           <a:prstGeom prst="roundRect">
             <a:avLst/>
           </a:prstGeom>
-          <a:solidFill>
-            <a:srgbClr val="FF0000">
-              <a:alpha val="44000"/>
-            </a:srgbClr>
-          </a:solidFill>
-          <a:ln>
-            <a:solidFill>
-              <a:srgbClr val="FF0000"/>
-            </a:solidFill>
-          </a:ln>
         </p:spPr>
         <p:style>
           <a:lnRef idx="2">
@@ -13310,7 +13323,177 @@
           <a:lstStyle/>
           <a:p>
             <a:pPr algn="ctr"/>
-            <a:endParaRPr lang="LID4096"/>
+            <a:r>
+              <a:rPr lang="en-US" dirty="0"/>
+              <a:t>Device-local memory</a:t>
+            </a:r>
+            <a:endParaRPr lang="LID4096" dirty="0"/>
+          </a:p>
+        </p:txBody>
+      </p:sp>
+      <p:cxnSp>
+        <p:nvCxnSpPr>
+          <p:cNvPr id="19" name="Straight Connector 18">
+            <a:extLst>
+              <a:ext uri="{FF2B5EF4-FFF2-40B4-BE49-F238E27FC236}">
+                <a16:creationId xmlns:a16="http://schemas.microsoft.com/office/drawing/2014/main" id="{42DE77CF-49C0-2C12-D1BA-4F411117EA28}"/>
+              </a:ext>
+            </a:extLst>
+          </p:cNvPr>
+          <p:cNvCxnSpPr>
+            <a:cxnSpLocks/>
+          </p:cNvCxnSpPr>
+          <p:nvPr/>
+        </p:nvCxnSpPr>
+        <p:spPr>
+          <a:xfrm flipH="1">
+            <a:off x="4412095" y="2198194"/>
+            <a:ext cx="634248" cy="0"/>
+          </a:xfrm>
+          <a:prstGeom prst="line">
+            <a:avLst/>
+          </a:prstGeom>
+          <a:ln>
+            <a:headEnd type="stealth" w="lg" len="lg"/>
+            <a:tailEnd type="stealth" w="lg" len="lg"/>
+          </a:ln>
+        </p:spPr>
+        <p:style>
+          <a:lnRef idx="2">
+            <a:schemeClr val="accent1"/>
+          </a:lnRef>
+          <a:fillRef idx="0">
+            <a:schemeClr val="accent1"/>
+          </a:fillRef>
+          <a:effectRef idx="1">
+            <a:schemeClr val="accent1"/>
+          </a:effectRef>
+          <a:fontRef idx="minor">
+            <a:schemeClr val="tx1"/>
+          </a:fontRef>
+        </p:style>
+      </p:cxnSp>
+      <p:sp>
+        <p:nvSpPr>
+          <p:cNvPr id="21" name="Rectangle: Rounded Corners 20">
+            <a:extLst>
+              <a:ext uri="{FF2B5EF4-FFF2-40B4-BE49-F238E27FC236}">
+                <a16:creationId xmlns:a16="http://schemas.microsoft.com/office/drawing/2014/main" id="{4209ECE4-16B5-81B2-5CEE-02CBF2BB0A80}"/>
+              </a:ext>
+            </a:extLst>
+          </p:cNvPr>
+          <p:cNvSpPr/>
+          <p:nvPr/>
+        </p:nvSpPr>
+        <p:spPr>
+          <a:xfrm>
+            <a:off x="7470059" y="1957304"/>
+            <a:ext cx="1140541" cy="481781"/>
+          </a:xfrm>
+          <a:prstGeom prst="roundRect">
+            <a:avLst/>
+          </a:prstGeom>
+        </p:spPr>
+        <p:style>
+          <a:lnRef idx="2">
+            <a:schemeClr val="accent2">
+              <a:shade val="15000"/>
+            </a:schemeClr>
+          </a:lnRef>
+          <a:fillRef idx="1">
+            <a:schemeClr val="accent2"/>
+          </a:fillRef>
+          <a:effectRef idx="0">
+            <a:schemeClr val="accent2"/>
+          </a:effectRef>
+          <a:fontRef idx="minor">
+            <a:schemeClr val="lt1"/>
+          </a:fontRef>
+        </p:style>
+        <p:txBody>
+          <a:bodyPr rtlCol="0" anchor="ctr"/>
+          <a:lstStyle/>
+          <a:p>
+            <a:pPr algn="ctr"/>
+            <a:r>
+              <a:rPr lang="en-US" dirty="0"/>
+              <a:t>GPU</a:t>
+            </a:r>
+            <a:endParaRPr lang="LID4096" dirty="0"/>
+          </a:p>
+        </p:txBody>
+      </p:sp>
+      <p:cxnSp>
+        <p:nvCxnSpPr>
+          <p:cNvPr id="22" name="Straight Connector 21">
+            <a:extLst>
+              <a:ext uri="{FF2B5EF4-FFF2-40B4-BE49-F238E27FC236}">
+                <a16:creationId xmlns:a16="http://schemas.microsoft.com/office/drawing/2014/main" id="{C4031E85-25F9-D2D9-A3D6-61B303C11BC1}"/>
+              </a:ext>
+            </a:extLst>
+          </p:cNvPr>
+          <p:cNvCxnSpPr>
+            <a:cxnSpLocks/>
+          </p:cNvCxnSpPr>
+          <p:nvPr/>
+        </p:nvCxnSpPr>
+        <p:spPr>
+          <a:xfrm>
+            <a:off x="6835812" y="2154581"/>
+            <a:ext cx="634247" cy="1"/>
+          </a:xfrm>
+          <a:prstGeom prst="line">
+            <a:avLst/>
+          </a:prstGeom>
+        </p:spPr>
+        <p:style>
+          <a:lnRef idx="2">
+            <a:schemeClr val="accent1"/>
+          </a:lnRef>
+          <a:fillRef idx="0">
+            <a:schemeClr val="accent1"/>
+          </a:fillRef>
+          <a:effectRef idx="1">
+            <a:schemeClr val="accent1"/>
+          </a:effectRef>
+          <a:fontRef idx="minor">
+            <a:schemeClr val="tx1"/>
+          </a:fontRef>
+        </p:style>
+      </p:cxnSp>
+      <p:sp>
+        <p:nvSpPr>
+          <p:cNvPr id="25" name="TextBox 24">
+            <a:extLst>
+              <a:ext uri="{FF2B5EF4-FFF2-40B4-BE49-F238E27FC236}">
+                <a16:creationId xmlns:a16="http://schemas.microsoft.com/office/drawing/2014/main" id="{750EDFA0-29F4-7C8C-BE8D-C11369749DA9}"/>
+              </a:ext>
+            </a:extLst>
+          </p:cNvPr>
+          <p:cNvSpPr txBox="1"/>
+          <p:nvPr/>
+        </p:nvSpPr>
+        <p:spPr>
+          <a:xfrm>
+            <a:off x="3873909" y="2665812"/>
+            <a:ext cx="1775166" cy="369332"/>
+          </a:xfrm>
+          <a:prstGeom prst="rect">
+            <a:avLst/>
+          </a:prstGeom>
+          <a:noFill/>
+        </p:spPr>
+        <p:txBody>
+          <a:bodyPr wrap="none" rtlCol="0">
+            <a:spAutoFit/>
+          </a:bodyPr>
+          <a:lstStyle/>
+          <a:p>
+            <a:r>
+              <a:rPr lang="en-US" dirty="0"/>
+              <a:t>Data movement</a:t>
+            </a:r>
+            <a:endParaRPr lang="LID4096" dirty="0"/>
           </a:p>
         </p:txBody>
       </p:sp>
@@ -13525,15 +13708,33 @@
                                   </p:childTnLst>
                                 </p:cTn>
                               </p:par>
+                            </p:childTnLst>
+                          </p:cTn>
+                        </p:par>
+                      </p:childTnLst>
+                    </p:cTn>
+                  </p:par>
+                  <p:par>
+                    <p:cTn id="19" fill="hold">
+                      <p:stCondLst>
+                        <p:cond delay="indefinite"/>
+                      </p:stCondLst>
+                      <p:childTnLst>
+                        <p:par>
+                          <p:cTn id="20" fill="hold">
+                            <p:stCondLst>
+                              <p:cond delay="0"/>
+                            </p:stCondLst>
+                            <p:childTnLst>
                               <p:par>
-                                <p:cTn id="19" presetID="1" presetClass="entr" presetSubtype="0" fill="hold" grpId="0" nodeType="withEffect">
+                                <p:cTn id="21" presetID="1" presetClass="entr" presetSubtype="0" fill="hold" grpId="0" nodeType="clickEffect">
                                   <p:stCondLst>
                                     <p:cond delay="0"/>
                                   </p:stCondLst>
                                   <p:childTnLst>
                                     <p:set>
                                       <p:cBhvr>
-                                        <p:cTn id="20" dur="1" fill="hold">
+                                        <p:cTn id="22" dur="1" fill="hold">
                                           <p:stCondLst>
                                             <p:cond delay="0"/>
                                           </p:stCondLst>
@@ -13556,68 +13757,6 @@
                                   </p:childTnLst>
                                 </p:cTn>
                               </p:par>
-                              <p:par>
-                                <p:cTn id="21" presetID="1" presetClass="entr" presetSubtype="0" fill="hold" grpId="0" nodeType="withEffect">
-                                  <p:stCondLst>
-                                    <p:cond delay="0"/>
-                                  </p:stCondLst>
-                                  <p:childTnLst>
-                                    <p:set>
-                                      <p:cBhvr>
-                                        <p:cTn id="22" dur="1" fill="hold">
-                                          <p:stCondLst>
-                                            <p:cond delay="0"/>
-                                          </p:stCondLst>
-                                        </p:cTn>
-                                        <p:tgtEl>
-                                          <p:spTgt spid="3">
-                                            <p:txEl>
-                                              <p:pRg st="5" end="5"/>
-                                            </p:txEl>
-                                          </p:spTgt>
-                                        </p:tgtEl>
-                                        <p:attrNameLst>
-                                          <p:attrName>style.visibility</p:attrName>
-                                        </p:attrNameLst>
-                                      </p:cBhvr>
-                                      <p:to>
-                                        <p:strVal val="visible"/>
-                                      </p:to>
-                                    </p:set>
-                                  </p:childTnLst>
-                                </p:cTn>
-                              </p:par>
-                              <p:par>
-                                <p:cTn id="23" presetID="1" presetClass="entr" presetSubtype="0" fill="hold" grpId="0" nodeType="withEffect">
-                                  <p:stCondLst>
-                                    <p:cond delay="0"/>
-                                  </p:stCondLst>
-                                  <p:childTnLst>
-                                    <p:set>
-                                      <p:cBhvr>
-                                        <p:cTn id="24" dur="1" fill="hold">
-                                          <p:stCondLst>
-                                            <p:cond delay="0"/>
-                                          </p:stCondLst>
-                                        </p:cTn>
-                                        <p:tgtEl>
-                                          <p:spTgt spid="3">
-                                            <p:txEl>
-                                              <p:pRg st="6" end="6"/>
-                                            </p:txEl>
-                                          </p:spTgt>
-                                        </p:tgtEl>
-                                        <p:attrNameLst>
-                                          <p:attrName>style.visibility</p:attrName>
-                                        </p:attrNameLst>
-                                      </p:cBhvr>
-                                      <p:to>
-                                        <p:strVal val="visible"/>
-                                      </p:to>
-                                    </p:set>
-                                  </p:childTnLst>
-                                </p:cTn>
-                              </p:par>
                             </p:childTnLst>
                           </p:cTn>
                         </p:par>
@@ -13625,410 +13764,26 @@
                     </p:cTn>
                   </p:par>
                   <p:par>
-                    <p:cTn id="25" fill="hold">
+                    <p:cTn id="23" fill="hold">
                       <p:stCondLst>
                         <p:cond delay="indefinite"/>
                       </p:stCondLst>
                       <p:childTnLst>
                         <p:par>
-                          <p:cTn id="26" fill="hold">
+                          <p:cTn id="24" fill="hold">
                             <p:stCondLst>
                               <p:cond delay="0"/>
                             </p:stCondLst>
                             <p:childTnLst>
                               <p:par>
-                                <p:cTn id="27" presetID="1" presetClass="entr" presetSubtype="0" fill="hold" grpId="0" nodeType="clickEffect">
+                                <p:cTn id="25" presetID="1" presetClass="entr" presetSubtype="0" fill="hold" nodeType="clickEffect">
                                   <p:stCondLst>
                                     <p:cond delay="0"/>
                                   </p:stCondLst>
                                   <p:childTnLst>
                                     <p:set>
                                       <p:cBhvr>
-                                        <p:cTn id="28" dur="1" fill="hold">
-                                          <p:stCondLst>
-                                            <p:cond delay="0"/>
-                                          </p:stCondLst>
-                                        </p:cTn>
-                                        <p:tgtEl>
-                                          <p:spTgt spid="3">
-                                            <p:txEl>
-                                              <p:pRg st="7" end="7"/>
-                                            </p:txEl>
-                                          </p:spTgt>
-                                        </p:tgtEl>
-                                        <p:attrNameLst>
-                                          <p:attrName>style.visibility</p:attrName>
-                                        </p:attrNameLst>
-                                      </p:cBhvr>
-                                      <p:to>
-                                        <p:strVal val="visible"/>
-                                      </p:to>
-                                    </p:set>
-                                  </p:childTnLst>
-                                </p:cTn>
-                              </p:par>
-                            </p:childTnLst>
-                          </p:cTn>
-                        </p:par>
-                      </p:childTnLst>
-                    </p:cTn>
-                  </p:par>
-                  <p:par>
-                    <p:cTn id="29" fill="hold">
-                      <p:stCondLst>
-                        <p:cond delay="indefinite"/>
-                      </p:stCondLst>
-                      <p:childTnLst>
-                        <p:par>
-                          <p:cTn id="30" fill="hold">
-                            <p:stCondLst>
-                              <p:cond delay="0"/>
-                            </p:stCondLst>
-                            <p:childTnLst>
-                              <p:par>
-                                <p:cTn id="31" presetID="1" presetClass="entr" presetSubtype="0" fill="hold" grpId="0" nodeType="clickEffect">
-                                  <p:stCondLst>
-                                    <p:cond delay="0"/>
-                                  </p:stCondLst>
-                                  <p:childTnLst>
-                                    <p:set>
-                                      <p:cBhvr>
-                                        <p:cTn id="32" dur="1" fill="hold">
-                                          <p:stCondLst>
-                                            <p:cond delay="0"/>
-                                          </p:stCondLst>
-                                        </p:cTn>
-                                        <p:tgtEl>
-                                          <p:spTgt spid="3">
-                                            <p:txEl>
-                                              <p:pRg st="9" end="9"/>
-                                            </p:txEl>
-                                          </p:spTgt>
-                                        </p:tgtEl>
-                                        <p:attrNameLst>
-                                          <p:attrName>style.visibility</p:attrName>
-                                        </p:attrNameLst>
-                                      </p:cBhvr>
-                                      <p:to>
-                                        <p:strVal val="visible"/>
-                                      </p:to>
-                                    </p:set>
-                                  </p:childTnLst>
-                                </p:cTn>
-                              </p:par>
-                            </p:childTnLst>
-                          </p:cTn>
-                        </p:par>
-                      </p:childTnLst>
-                    </p:cTn>
-                  </p:par>
-                  <p:par>
-                    <p:cTn id="33" fill="hold">
-                      <p:stCondLst>
-                        <p:cond delay="indefinite"/>
-                      </p:stCondLst>
-                      <p:childTnLst>
-                        <p:par>
-                          <p:cTn id="34" fill="hold">
-                            <p:stCondLst>
-                              <p:cond delay="0"/>
-                            </p:stCondLst>
-                            <p:childTnLst>
-                              <p:par>
-                                <p:cTn id="35" presetID="1" presetClass="entr" presetSubtype="0" fill="hold" grpId="0" nodeType="clickEffect">
-                                  <p:stCondLst>
-                                    <p:cond delay="0"/>
-                                  </p:stCondLst>
-                                  <p:childTnLst>
-                                    <p:set>
-                                      <p:cBhvr>
-                                        <p:cTn id="36" dur="1" fill="hold">
-                                          <p:stCondLst>
-                                            <p:cond delay="0"/>
-                                          </p:stCondLst>
-                                        </p:cTn>
-                                        <p:tgtEl>
-                                          <p:spTgt spid="3">
-                                            <p:txEl>
-                                              <p:pRg st="10" end="10"/>
-                                            </p:txEl>
-                                          </p:spTgt>
-                                        </p:tgtEl>
-                                        <p:attrNameLst>
-                                          <p:attrName>style.visibility</p:attrName>
-                                        </p:attrNameLst>
-                                      </p:cBhvr>
-                                      <p:to>
-                                        <p:strVal val="visible"/>
-                                      </p:to>
-                                    </p:set>
-                                  </p:childTnLst>
-                                </p:cTn>
-                              </p:par>
-                            </p:childTnLst>
-                          </p:cTn>
-                        </p:par>
-                      </p:childTnLst>
-                    </p:cTn>
-                  </p:par>
-                  <p:par>
-                    <p:cTn id="37" fill="hold">
-                      <p:stCondLst>
-                        <p:cond delay="indefinite"/>
-                      </p:stCondLst>
-                      <p:childTnLst>
-                        <p:par>
-                          <p:cTn id="38" fill="hold">
-                            <p:stCondLst>
-                              <p:cond delay="0"/>
-                            </p:stCondLst>
-                            <p:childTnLst>
-                              <p:par>
-                                <p:cTn id="39" presetID="1" presetClass="entr" presetSubtype="0" fill="hold" grpId="0" nodeType="clickEffect">
-                                  <p:stCondLst>
-                                    <p:cond delay="0"/>
-                                  </p:stCondLst>
-                                  <p:childTnLst>
-                                    <p:set>
-                                      <p:cBhvr>
-                                        <p:cTn id="40" dur="1" fill="hold">
-                                          <p:stCondLst>
-                                            <p:cond delay="0"/>
-                                          </p:stCondLst>
-                                        </p:cTn>
-                                        <p:tgtEl>
-                                          <p:spTgt spid="3">
-                                            <p:txEl>
-                                              <p:pRg st="11" end="11"/>
-                                            </p:txEl>
-                                          </p:spTgt>
-                                        </p:tgtEl>
-                                        <p:attrNameLst>
-                                          <p:attrName>style.visibility</p:attrName>
-                                        </p:attrNameLst>
-                                      </p:cBhvr>
-                                      <p:to>
-                                        <p:strVal val="visible"/>
-                                      </p:to>
-                                    </p:set>
-                                  </p:childTnLst>
-                                </p:cTn>
-                              </p:par>
-                            </p:childTnLst>
-                          </p:cTn>
-                        </p:par>
-                      </p:childTnLst>
-                    </p:cTn>
-                  </p:par>
-                  <p:par>
-                    <p:cTn id="41" fill="hold">
-                      <p:stCondLst>
-                        <p:cond delay="indefinite"/>
-                      </p:stCondLst>
-                      <p:childTnLst>
-                        <p:par>
-                          <p:cTn id="42" fill="hold">
-                            <p:stCondLst>
-                              <p:cond delay="0"/>
-                            </p:stCondLst>
-                            <p:childTnLst>
-                              <p:par>
-                                <p:cTn id="43" presetID="1" presetClass="entr" presetSubtype="0" fill="hold" grpId="0" nodeType="clickEffect">
-                                  <p:stCondLst>
-                                    <p:cond delay="0"/>
-                                  </p:stCondLst>
-                                  <p:childTnLst>
-                                    <p:set>
-                                      <p:cBhvr>
-                                        <p:cTn id="44" dur="1" fill="hold">
-                                          <p:stCondLst>
-                                            <p:cond delay="0"/>
-                                          </p:stCondLst>
-                                        </p:cTn>
-                                        <p:tgtEl>
-                                          <p:spTgt spid="3">
-                                            <p:txEl>
-                                              <p:pRg st="12" end="12"/>
-                                            </p:txEl>
-                                          </p:spTgt>
-                                        </p:tgtEl>
-                                        <p:attrNameLst>
-                                          <p:attrName>style.visibility</p:attrName>
-                                        </p:attrNameLst>
-                                      </p:cBhvr>
-                                      <p:to>
-                                        <p:strVal val="visible"/>
-                                      </p:to>
-                                    </p:set>
-                                  </p:childTnLst>
-                                </p:cTn>
-                              </p:par>
-                            </p:childTnLst>
-                          </p:cTn>
-                        </p:par>
-                      </p:childTnLst>
-                    </p:cTn>
-                  </p:par>
-                  <p:par>
-                    <p:cTn id="45" fill="hold">
-                      <p:stCondLst>
-                        <p:cond delay="indefinite"/>
-                      </p:stCondLst>
-                      <p:childTnLst>
-                        <p:par>
-                          <p:cTn id="46" fill="hold">
-                            <p:stCondLst>
-                              <p:cond delay="0"/>
-                            </p:stCondLst>
-                            <p:childTnLst>
-                              <p:par>
-                                <p:cTn id="47" presetID="1" presetClass="entr" presetSubtype="0" fill="hold" grpId="0" nodeType="clickEffect">
-                                  <p:stCondLst>
-                                    <p:cond delay="0"/>
-                                  </p:stCondLst>
-                                  <p:childTnLst>
-                                    <p:set>
-                                      <p:cBhvr>
-                                        <p:cTn id="48" dur="1" fill="hold">
-                                          <p:stCondLst>
-                                            <p:cond delay="0"/>
-                                          </p:stCondLst>
-                                        </p:cTn>
-                                        <p:tgtEl>
-                                          <p:spTgt spid="3">
-                                            <p:txEl>
-                                              <p:pRg st="13" end="13"/>
-                                            </p:txEl>
-                                          </p:spTgt>
-                                        </p:tgtEl>
-                                        <p:attrNameLst>
-                                          <p:attrName>style.visibility</p:attrName>
-                                        </p:attrNameLst>
-                                      </p:cBhvr>
-                                      <p:to>
-                                        <p:strVal val="visible"/>
-                                      </p:to>
-                                    </p:set>
-                                  </p:childTnLst>
-                                </p:cTn>
-                              </p:par>
-                            </p:childTnLst>
-                          </p:cTn>
-                        </p:par>
-                      </p:childTnLst>
-                    </p:cTn>
-                  </p:par>
-                  <p:par>
-                    <p:cTn id="49" fill="hold">
-                      <p:stCondLst>
-                        <p:cond delay="indefinite"/>
-                      </p:stCondLst>
-                      <p:childTnLst>
-                        <p:par>
-                          <p:cTn id="50" fill="hold">
-                            <p:stCondLst>
-                              <p:cond delay="0"/>
-                            </p:stCondLst>
-                            <p:childTnLst>
-                              <p:par>
-                                <p:cTn id="51" presetID="1" presetClass="entr" presetSubtype="0" fill="hold" grpId="0" nodeType="clickEffect">
-                                  <p:stCondLst>
-                                    <p:cond delay="0"/>
-                                  </p:stCondLst>
-                                  <p:childTnLst>
-                                    <p:set>
-                                      <p:cBhvr>
-                                        <p:cTn id="52" dur="1" fill="hold">
-                                          <p:stCondLst>
-                                            <p:cond delay="0"/>
-                                          </p:stCondLst>
-                                        </p:cTn>
-                                        <p:tgtEl>
-                                          <p:spTgt spid="9"/>
-                                        </p:tgtEl>
-                                        <p:attrNameLst>
-                                          <p:attrName>style.visibility</p:attrName>
-                                        </p:attrNameLst>
-                                      </p:cBhvr>
-                                      <p:to>
-                                        <p:strVal val="visible"/>
-                                      </p:to>
-                                    </p:set>
-                                  </p:childTnLst>
-                                </p:cTn>
-                              </p:par>
-                            </p:childTnLst>
-                          </p:cTn>
-                        </p:par>
-                      </p:childTnLst>
-                    </p:cTn>
-                  </p:par>
-                  <p:par>
-                    <p:cTn id="53" fill="hold">
-                      <p:stCondLst>
-                        <p:cond delay="indefinite"/>
-                      </p:stCondLst>
-                      <p:childTnLst>
-                        <p:par>
-                          <p:cTn id="54" fill="hold">
-                            <p:stCondLst>
-                              <p:cond delay="0"/>
-                            </p:stCondLst>
-                            <p:childTnLst>
-                              <p:par>
-                                <p:cTn id="55" presetID="1" presetClass="entr" presetSubtype="0" fill="hold" grpId="0" nodeType="clickEffect">
-                                  <p:stCondLst>
-                                    <p:cond delay="0"/>
-                                  </p:stCondLst>
-                                  <p:childTnLst>
-                                    <p:set>
-                                      <p:cBhvr>
-                                        <p:cTn id="56" dur="1" fill="hold">
-                                          <p:stCondLst>
-                                            <p:cond delay="0"/>
-                                          </p:stCondLst>
-                                        </p:cTn>
-                                        <p:tgtEl>
-                                          <p:spTgt spid="8"/>
-                                        </p:tgtEl>
-                                        <p:attrNameLst>
-                                          <p:attrName>style.visibility</p:attrName>
-                                        </p:attrNameLst>
-                                      </p:cBhvr>
-                                      <p:to>
-                                        <p:strVal val="visible"/>
-                                      </p:to>
-                                    </p:set>
-                                  </p:childTnLst>
-                                </p:cTn>
-                              </p:par>
-                            </p:childTnLst>
-                          </p:cTn>
-                        </p:par>
-                      </p:childTnLst>
-                    </p:cTn>
-                  </p:par>
-                  <p:par>
-                    <p:cTn id="57" fill="hold">
-                      <p:stCondLst>
-                        <p:cond delay="indefinite"/>
-                      </p:stCondLst>
-                      <p:childTnLst>
-                        <p:par>
-                          <p:cTn id="58" fill="hold">
-                            <p:stCondLst>
-                              <p:cond delay="0"/>
-                            </p:stCondLst>
-                            <p:childTnLst>
-                              <p:par>
-                                <p:cTn id="59" presetID="1" presetClass="entr" presetSubtype="0" fill="hold" nodeType="clickEffect">
-                                  <p:stCondLst>
-                                    <p:cond delay="0"/>
-                                  </p:stCondLst>
-                                  <p:childTnLst>
-                                    <p:set>
-                                      <p:cBhvr>
-                                        <p:cTn id="60" dur="1" fill="hold">
+                                        <p:cTn id="26" dur="1" fill="hold">
                                           <p:stCondLst>
                                             <p:cond delay="0"/>
                                           </p:stCondLst>
@@ -14076,8 +13831,6 @@
     </p:tnLst>
     <p:bldLst>
       <p:bldP spid="3" grpId="0" uiExpand="1" build="p" bldLvl="2"/>
-      <p:bldP spid="8" grpId="0" animBg="1"/>
-      <p:bldP spid="9" grpId="0" animBg="1"/>
     </p:bldLst>
   </p:timing>
 </p:sld>
